--- a/policy/proposal_003.pptx
+++ b/policy/proposal_003.pptx
@@ -3082,7 +3082,7 @@
     <p:bg>
       <p:bgPr>
         <a:solidFill>
-          <a:srgbClr val="0A0A0A"/>
+          <a:srgbClr val="F5F6F8"/>
         </a:solidFill>
       </p:bgPr>
     </p:bg>
@@ -3127,11 +3127,11 @@
             <a:r>
               <a:rPr lang="en-US" sz="1300" b="1" spc="300" kern="0" dirty="0">
                 <a:solidFill>
-                  <a:srgbClr val="D62828"/>
-                </a:solidFill>
-                <a:latin typeface="Arial" pitchFamily="34" charset="0"/>
-                <a:ea typeface="Arial" pitchFamily="34" charset="-122"/>
-                <a:cs typeface="Arial" pitchFamily="34" charset="-120"/>
+                  <a:srgbClr val="C8161D"/>
+                </a:solidFill>
+                <a:latin typeface="Arial" pitchFamily="34" charset="0"/>
+                <a:ea typeface="BIZ UDPGothic" pitchFamily="34" charset="-122"/>
+                <a:cs typeface="BIZ UDPGothic" pitchFamily="34" charset="-120"/>
               </a:rPr>
               <a:t>政策提言プラットフォーム　REBOOT JAPAN</a:t>
             </a:r>
@@ -3166,11 +3166,11 @@
             <a:r>
               <a:rPr lang="en-US" sz="2200" dirty="0">
                 <a:solidFill>
-                  <a:srgbClr val="CCCCCC"/>
-                </a:solidFill>
-                <a:latin typeface="Arial" pitchFamily="34" charset="0"/>
-                <a:ea typeface="Arial" pitchFamily="34" charset="-122"/>
-                <a:cs typeface="Arial" pitchFamily="34" charset="-120"/>
+                  <a:srgbClr val="2B2F36"/>
+                </a:solidFill>
+                <a:latin typeface="Arial" pitchFamily="34" charset="0"/>
+                <a:ea typeface="BIZ UDPGothic" pitchFamily="34" charset="-122"/>
+                <a:cs typeface="BIZ UDPGothic" pitchFamily="34" charset="-120"/>
               </a:rPr>
               <a:t>提言003</a:t>
             </a:r>
@@ -3208,11 +3208,11 @@
             <a:r>
               <a:rPr lang="en-US" sz="5400" b="1" dirty="0">
                 <a:solidFill>
-                  <a:srgbClr val="F5F5F0"/>
-                </a:solidFill>
-                <a:latin typeface="Arial" pitchFamily="34" charset="0"/>
-                <a:ea typeface="Arial" pitchFamily="34" charset="-122"/>
-                <a:cs typeface="Arial" pitchFamily="34" charset="-120"/>
+                  <a:srgbClr val="16181D"/>
+                </a:solidFill>
+                <a:latin typeface="Arial" pitchFamily="34" charset="0"/>
+                <a:ea typeface="BIZ UDPGothic" pitchFamily="34" charset="-122"/>
+                <a:cs typeface="BIZ UDPGothic" pitchFamily="34" charset="-120"/>
               </a:rPr>
               <a:t>零細を減らし、</a:t>
             </a:r>
@@ -3228,11 +3228,11 @@
             <a:r>
               <a:rPr lang="en-US" sz="5400" b="1" dirty="0">
                 <a:solidFill>
-                  <a:srgbClr val="D62828"/>
-                </a:solidFill>
-                <a:latin typeface="Arial" pitchFamily="34" charset="0"/>
-                <a:ea typeface="Arial" pitchFamily="34" charset="-122"/>
-                <a:cs typeface="Arial" pitchFamily="34" charset="-120"/>
+                  <a:srgbClr val="C8161D"/>
+                </a:solidFill>
+                <a:latin typeface="Arial" pitchFamily="34" charset="0"/>
+                <a:ea typeface="BIZ UDPGothic" pitchFamily="34" charset="-122"/>
+                <a:cs typeface="BIZ UDPGothic" pitchFamily="34" charset="-120"/>
               </a:rPr>
               <a:t>強い中堅を育てる</a:t>
             </a:r>
@@ -3267,11 +3267,11 @@
             <a:r>
               <a:rPr lang="en-US" sz="1600" dirty="0">
                 <a:solidFill>
-                  <a:srgbClr val="CCCCCC"/>
-                </a:solidFill>
-                <a:latin typeface="Arial" pitchFamily="34" charset="0"/>
-                <a:ea typeface="Arial" pitchFamily="34" charset="-122"/>
-                <a:cs typeface="Arial" pitchFamily="34" charset="-120"/>
+                  <a:srgbClr val="2B2F36"/>
+                </a:solidFill>
+                <a:latin typeface="Arial" pitchFamily="34" charset="0"/>
+                <a:ea typeface="BIZ UDPGothic" pitchFamily="34" charset="-122"/>
+                <a:cs typeface="BIZ UDPGothic" pitchFamily="34" charset="-120"/>
               </a:rPr>
               <a:t>BtoB下請け産業の構造再編と成長ドライブ施策</a:t>
             </a:r>
@@ -3296,7 +3296,7 @@
           <a:noFill/>
           <a:ln w="12700">
             <a:solidFill>
-              <a:srgbClr val="2E2E2E"/>
+              <a:srgbClr val="DDE0E6"/>
             </a:solidFill>
             <a:prstDash val="solid"/>
           </a:ln>
@@ -3329,11 +3329,11 @@
             <a:r>
               <a:rPr lang="en-US" sz="1200" dirty="0">
                 <a:solidFill>
-                  <a:srgbClr val="888888"/>
-                </a:solidFill>
-                <a:latin typeface="Arial" pitchFamily="34" charset="0"/>
-                <a:ea typeface="Arial" pitchFamily="34" charset="-122"/>
-                <a:cs typeface="Arial" pitchFamily="34" charset="-120"/>
+                  <a:srgbClr val="626875"/>
+                </a:solidFill>
+                <a:latin typeface="Arial" pitchFamily="34" charset="0"/>
+                <a:ea typeface="BIZ UDPGothic" pitchFamily="34" charset="-122"/>
+                <a:cs typeface="BIZ UDPGothic" pitchFamily="34" charset="-120"/>
               </a:rPr>
               <a:t>わかりやすい解説版　── 中学生でも理解できるスライド</a:t>
             </a:r>
@@ -3381,7 +3381,7 @@
     <p:bg>
       <p:bgPr>
         <a:solidFill>
-          <a:srgbClr val="0A0A0A"/>
+          <a:srgbClr val="F5F6F8"/>
         </a:solidFill>
       </p:bgPr>
     </p:bg>
@@ -3426,11 +3426,11 @@
             <a:r>
               <a:rPr lang="en-US" sz="1200" b="1" spc="300" kern="0" dirty="0">
                 <a:solidFill>
-                  <a:srgbClr val="D62828"/>
-                </a:solidFill>
-                <a:latin typeface="Arial" pitchFamily="34" charset="0"/>
-                <a:ea typeface="Arial" pitchFamily="34" charset="-122"/>
-                <a:cs typeface="Arial" pitchFamily="34" charset="-120"/>
+                  <a:srgbClr val="C8161D"/>
+                </a:solidFill>
+                <a:latin typeface="Arial" pitchFamily="34" charset="0"/>
+                <a:ea typeface="BIZ UDPGothic" pitchFamily="34" charset="-122"/>
+                <a:cs typeface="BIZ UDPGothic" pitchFamily="34" charset="-120"/>
               </a:rPr>
               <a:t>2. 誰が対象になるのか</a:t>
             </a:r>
@@ -3465,11 +3465,11 @@
             <a:r>
               <a:rPr lang="en-US" sz="3200" b="1" dirty="0">
                 <a:solidFill>
-                  <a:srgbClr val="F5F5F0"/>
-                </a:solidFill>
-                <a:latin typeface="Arial" pitchFamily="34" charset="0"/>
-                <a:ea typeface="Arial" pitchFamily="34" charset="-122"/>
-                <a:cs typeface="Arial" pitchFamily="34" charset="-120"/>
+                  <a:srgbClr val="16181D"/>
+                </a:solidFill>
+                <a:latin typeface="Arial" pitchFamily="34" charset="0"/>
+                <a:ea typeface="BIZ UDPGothic" pitchFamily="34" charset="-122"/>
+                <a:cs typeface="BIZ UDPGothic" pitchFamily="34" charset="-120"/>
               </a:rPr>
               <a:t>対象は「大企業を除く、中小・零細企業」</a:t>
             </a:r>
@@ -3504,11 +3504,11 @@
             <a:r>
               <a:rPr lang="en-US" sz="1000" dirty="0">
                 <a:solidFill>
-                  <a:srgbClr val="CCCCCC"/>
-                </a:solidFill>
-                <a:latin typeface="Arial" pitchFamily="34" charset="0"/>
-                <a:ea typeface="Arial" pitchFamily="34" charset="-122"/>
-                <a:cs typeface="Arial" pitchFamily="34" charset="-120"/>
+                  <a:srgbClr val="2B2F36"/>
+                </a:solidFill>
+                <a:latin typeface="Arial" pitchFamily="34" charset="0"/>
+                <a:ea typeface="BIZ UDPGothic" pitchFamily="34" charset="-122"/>
+                <a:cs typeface="BIZ UDPGothic" pitchFamily="34" charset="-120"/>
               </a:rPr>
               <a:t>10</a:t>
             </a:r>
@@ -3543,11 +3543,11 @@
             <a:r>
               <a:rPr lang="en-US" sz="900" dirty="0">
                 <a:solidFill>
-                  <a:srgbClr val="555555"/>
-                </a:solidFill>
-                <a:latin typeface="Arial" pitchFamily="34" charset="0"/>
-                <a:ea typeface="Arial" pitchFamily="34" charset="-122"/>
-                <a:cs typeface="Arial" pitchFamily="34" charset="-120"/>
+                  <a:srgbClr val="9AA0AA"/>
+                </a:solidFill>
+                <a:latin typeface="Arial" pitchFamily="34" charset="0"/>
+                <a:ea typeface="BIZ UDPGothic" pitchFamily="34" charset="-122"/>
+                <a:cs typeface="BIZ UDPGothic" pitchFamily="34" charset="-120"/>
               </a:rPr>
               <a:t>REBOOT JAPAN ── 提言003</a:t>
             </a:r>
@@ -3572,11 +3572,11 @@
             </a:avLst>
           </a:prstGeom>
           <a:solidFill>
-            <a:srgbClr val="1A1A1A"/>
+            <a:srgbClr val="FFFFFF"/>
           </a:solidFill>
           <a:ln w="12700">
             <a:solidFill>
-              <a:srgbClr val="2E2E2E"/>
+              <a:srgbClr val="DDE0E6"/>
             </a:solidFill>
             <a:prstDash val="solid"/>
           </a:ln>
@@ -3597,11 +3597,11 @@
             <a:avLst/>
           </a:prstGeom>
           <a:solidFill>
-            <a:srgbClr val="0A0A0A"/>
+            <a:srgbClr val="F5F6F8"/>
           </a:solidFill>
           <a:ln w="12700">
             <a:solidFill>
-              <a:srgbClr val="2E2E2E"/>
+              <a:srgbClr val="DDE0E6"/>
             </a:solidFill>
             <a:prstDash val="solid"/>
           </a:ln>
@@ -3658,11 +3658,11 @@
             <a:r>
               <a:rPr lang="en-US" sz="1600" b="1" dirty="0">
                 <a:solidFill>
-                  <a:srgbClr val="F5F5F0"/>
-                </a:solidFill>
-                <a:latin typeface="Arial" pitchFamily="34" charset="0"/>
-                <a:ea typeface="Arial" pitchFamily="34" charset="-122"/>
-                <a:cs typeface="Arial" pitchFamily="34" charset="-120"/>
+                  <a:srgbClr val="16181D"/>
+                </a:solidFill>
+                <a:latin typeface="Arial" pitchFamily="34" charset="0"/>
+                <a:ea typeface="BIZ UDPGothic" pitchFamily="34" charset="-122"/>
+                <a:cs typeface="BIZ UDPGothic" pitchFamily="34" charset="-120"/>
               </a:rPr>
               <a:t>新しく作った会社は守られる</a:t>
             </a:r>
@@ -3700,11 +3700,11 @@
             <a:r>
               <a:rPr lang="en-US" sz="1250" dirty="0">
                 <a:solidFill>
-                  <a:srgbClr val="CCCCCC"/>
-                </a:solidFill>
-                <a:latin typeface="Arial" pitchFamily="34" charset="0"/>
-                <a:ea typeface="Arial" pitchFamily="34" charset="-122"/>
-                <a:cs typeface="Arial" pitchFamily="34" charset="-120"/>
+                  <a:srgbClr val="2B2F36"/>
+                </a:solidFill>
+                <a:latin typeface="Arial" pitchFamily="34" charset="0"/>
+                <a:ea typeface="BIZ UDPGothic" pitchFamily="34" charset="-122"/>
+                <a:cs typeface="BIZ UDPGothic" pitchFamily="34" charset="-120"/>
               </a:rPr>
               <a:t>創業から3年間だけは、無条件で今と同じ優遇を受けられます。</a:t>
             </a:r>
@@ -3729,11 +3729,11 @@
             <a:r>
               <a:rPr lang="en-US" sz="1250" dirty="0">
                 <a:solidFill>
-                  <a:srgbClr val="CCCCCC"/>
-                </a:solidFill>
-                <a:latin typeface="Arial" pitchFamily="34" charset="0"/>
-                <a:ea typeface="Arial" pitchFamily="34" charset="-122"/>
-                <a:cs typeface="Arial" pitchFamily="34" charset="-120"/>
+                  <a:srgbClr val="2B2F36"/>
+                </a:solidFill>
+                <a:latin typeface="Arial" pitchFamily="34" charset="0"/>
+                <a:ea typeface="BIZ UDPGothic" pitchFamily="34" charset="-122"/>
+                <a:cs typeface="BIZ UDPGothic" pitchFamily="34" charset="-120"/>
               </a:rPr>
               <a:t>起業したばかりの会社を、いきなり厳しいルールに巻き込むことはしません。</a:t>
             </a:r>
@@ -3758,11 +3758,11 @@
             </a:avLst>
           </a:prstGeom>
           <a:solidFill>
-            <a:srgbClr val="1A1A1A"/>
+            <a:srgbClr val="FFFFFF"/>
           </a:solidFill>
           <a:ln w="12700">
             <a:solidFill>
-              <a:srgbClr val="2E2E2E"/>
+              <a:srgbClr val="DDE0E6"/>
             </a:solidFill>
             <a:prstDash val="solid"/>
           </a:ln>
@@ -3783,11 +3783,11 @@
             <a:avLst/>
           </a:prstGeom>
           <a:solidFill>
-            <a:srgbClr val="0A0A0A"/>
+            <a:srgbClr val="F5F6F8"/>
           </a:solidFill>
           <a:ln w="12700">
             <a:solidFill>
-              <a:srgbClr val="2E2E2E"/>
+              <a:srgbClr val="DDE0E6"/>
             </a:solidFill>
             <a:prstDash val="solid"/>
           </a:ln>
@@ -3844,11 +3844,11 @@
             <a:r>
               <a:rPr lang="en-US" sz="1600" b="1" dirty="0">
                 <a:solidFill>
-                  <a:srgbClr val="F5F5F0"/>
-                </a:solidFill>
-                <a:latin typeface="Arial" pitchFamily="34" charset="0"/>
-                <a:ea typeface="Arial" pitchFamily="34" charset="-122"/>
-                <a:cs typeface="Arial" pitchFamily="34" charset="-120"/>
+                  <a:srgbClr val="16181D"/>
+                </a:solidFill>
+                <a:latin typeface="Arial" pitchFamily="34" charset="0"/>
+                <a:ea typeface="BIZ UDPGothic" pitchFamily="34" charset="-122"/>
+                <a:cs typeface="BIZ UDPGothic" pitchFamily="34" charset="-120"/>
               </a:rPr>
               <a:t>4年目からはルールが変わる</a:t>
             </a:r>
@@ -3886,11 +3886,11 @@
             <a:r>
               <a:rPr lang="en-US" sz="1250" dirty="0">
                 <a:solidFill>
-                  <a:srgbClr val="CCCCCC"/>
-                </a:solidFill>
-                <a:latin typeface="Arial" pitchFamily="34" charset="0"/>
-                <a:ea typeface="Arial" pitchFamily="34" charset="-122"/>
-                <a:cs typeface="Arial" pitchFamily="34" charset="-120"/>
+                  <a:srgbClr val="2B2F36"/>
+                </a:solidFill>
+                <a:latin typeface="Arial" pitchFamily="34" charset="0"/>
+                <a:ea typeface="BIZ UDPGothic" pitchFamily="34" charset="-122"/>
+                <a:cs typeface="BIZ UDPGothic" pitchFamily="34" charset="-120"/>
               </a:rPr>
               <a:t>4年目以降は、後で説明する「成長条件」をクリアすることが必要になります。</a:t>
             </a:r>
@@ -3915,11 +3915,11 @@
             <a:r>
               <a:rPr lang="en-US" sz="1250" dirty="0">
                 <a:solidFill>
-                  <a:srgbClr val="CCCCCC"/>
-                </a:solidFill>
-                <a:latin typeface="Arial" pitchFamily="34" charset="0"/>
-                <a:ea typeface="Arial" pitchFamily="34" charset="-122"/>
-                <a:cs typeface="Arial" pitchFamily="34" charset="-120"/>
+                  <a:srgbClr val="2B2F36"/>
+                </a:solidFill>
+                <a:latin typeface="Arial" pitchFamily="34" charset="0"/>
+                <a:ea typeface="BIZ UDPGothic" pitchFamily="34" charset="-122"/>
+                <a:cs typeface="BIZ UDPGothic" pitchFamily="34" charset="-120"/>
               </a:rPr>
               <a:t>成長を続ける限り優遇は受けられますが、それが前提条件になります。</a:t>
             </a:r>
@@ -3941,7 +3941,7 @@
     <p:bg>
       <p:bgPr>
         <a:solidFill>
-          <a:srgbClr val="0A0A0A"/>
+          <a:srgbClr val="F5F6F8"/>
         </a:solidFill>
       </p:bgPr>
     </p:bg>
@@ -3986,11 +3986,11 @@
             <a:r>
               <a:rPr lang="en-US" sz="1200" b="1" spc="300" kern="0" dirty="0">
                 <a:solidFill>
-                  <a:srgbClr val="D62828"/>
-                </a:solidFill>
-                <a:latin typeface="Arial" pitchFamily="34" charset="0"/>
-                <a:ea typeface="Arial" pitchFamily="34" charset="-122"/>
-                <a:cs typeface="Arial" pitchFamily="34" charset="-120"/>
+                  <a:srgbClr val="C8161D"/>
+                </a:solidFill>
+                <a:latin typeface="Arial" pitchFamily="34" charset="0"/>
+                <a:ea typeface="BIZ UDPGothic" pitchFamily="34" charset="-122"/>
+                <a:cs typeface="BIZ UDPGothic" pitchFamily="34" charset="-120"/>
               </a:rPr>
               <a:t>2. 対象業種</a:t>
             </a:r>
@@ -4025,11 +4025,11 @@
             <a:r>
               <a:rPr lang="en-US" sz="3200" b="1" dirty="0">
                 <a:solidFill>
-                  <a:srgbClr val="F5F5F0"/>
-                </a:solidFill>
-                <a:latin typeface="Arial" pitchFamily="34" charset="0"/>
-                <a:ea typeface="Arial" pitchFamily="34" charset="-122"/>
-                <a:cs typeface="Arial" pitchFamily="34" charset="-120"/>
+                  <a:srgbClr val="16181D"/>
+                </a:solidFill>
+                <a:latin typeface="Arial" pitchFamily="34" charset="0"/>
+                <a:ea typeface="BIZ UDPGothic" pitchFamily="34" charset="-122"/>
+                <a:cs typeface="BIZ UDPGothic" pitchFamily="34" charset="-120"/>
               </a:rPr>
               <a:t>対象は「BtoB」の3つの業種だけ</a:t>
             </a:r>
@@ -4064,11 +4064,11 @@
             <a:r>
               <a:rPr lang="en-US" sz="1000" dirty="0">
                 <a:solidFill>
-                  <a:srgbClr val="CCCCCC"/>
-                </a:solidFill>
-                <a:latin typeface="Arial" pitchFamily="34" charset="0"/>
-                <a:ea typeface="Arial" pitchFamily="34" charset="-122"/>
-                <a:cs typeface="Arial" pitchFamily="34" charset="-120"/>
+                  <a:srgbClr val="2B2F36"/>
+                </a:solidFill>
+                <a:latin typeface="Arial" pitchFamily="34" charset="0"/>
+                <a:ea typeface="BIZ UDPGothic" pitchFamily="34" charset="-122"/>
+                <a:cs typeface="BIZ UDPGothic" pitchFamily="34" charset="-120"/>
               </a:rPr>
               <a:t>11</a:t>
             </a:r>
@@ -4103,11 +4103,11 @@
             <a:r>
               <a:rPr lang="en-US" sz="900" dirty="0">
                 <a:solidFill>
-                  <a:srgbClr val="555555"/>
-                </a:solidFill>
-                <a:latin typeface="Arial" pitchFamily="34" charset="0"/>
-                <a:ea typeface="Arial" pitchFamily="34" charset="-122"/>
-                <a:cs typeface="Arial" pitchFamily="34" charset="-120"/>
+                  <a:srgbClr val="9AA0AA"/>
+                </a:solidFill>
+                <a:latin typeface="Arial" pitchFamily="34" charset="0"/>
+                <a:ea typeface="BIZ UDPGothic" pitchFamily="34" charset="-122"/>
+                <a:cs typeface="BIZ UDPGothic" pitchFamily="34" charset="-120"/>
               </a:rPr>
               <a:t>REBOOT JAPAN ── 提言003</a:t>
             </a:r>
@@ -4142,11 +4142,11 @@
             <a:r>
               <a:rPr lang="en-US" sz="1300" dirty="0">
                 <a:solidFill>
-                  <a:srgbClr val="CCCCCC"/>
-                </a:solidFill>
-                <a:latin typeface="Arial" pitchFamily="34" charset="0"/>
-                <a:ea typeface="Arial" pitchFamily="34" charset="-122"/>
-                <a:cs typeface="Arial" pitchFamily="34" charset="-120"/>
+                  <a:srgbClr val="2B2F36"/>
+                </a:solidFill>
+                <a:latin typeface="Arial" pitchFamily="34" charset="0"/>
+                <a:ea typeface="BIZ UDPGothic" pitchFamily="34" charset="-122"/>
+                <a:cs typeface="BIZ UDPGothic" pitchFamily="34" charset="-120"/>
               </a:rPr>
               <a:t>BtoB＝企業同士で取引すること（Business to Business）。下請け構造が特に問題になりやすい3業種に絞ります。</a:t>
             </a:r>
@@ -4171,11 +4171,11 @@
             </a:avLst>
           </a:prstGeom>
           <a:solidFill>
-            <a:srgbClr val="1A1A1A"/>
+            <a:srgbClr val="FFFFFF"/>
           </a:solidFill>
           <a:ln w="12700">
             <a:solidFill>
-              <a:srgbClr val="2E2E2E"/>
+              <a:srgbClr val="DDE0E6"/>
             </a:solidFill>
             <a:prstDash val="solid"/>
           </a:ln>
@@ -4196,11 +4196,11 @@
             <a:avLst/>
           </a:prstGeom>
           <a:solidFill>
-            <a:srgbClr val="0A0A0A"/>
+            <a:srgbClr val="F5F6F8"/>
           </a:solidFill>
           <a:ln w="12700">
             <a:solidFill>
-              <a:srgbClr val="2E2E2E"/>
+              <a:srgbClr val="DDE0E6"/>
             </a:solidFill>
             <a:prstDash val="solid"/>
           </a:ln>
@@ -4257,11 +4257,11 @@
             <a:r>
               <a:rPr lang="en-US" sz="1600" b="1" dirty="0">
                 <a:solidFill>
-                  <a:srgbClr val="F5F5F0"/>
-                </a:solidFill>
-                <a:latin typeface="Arial" pitchFamily="34" charset="0"/>
-                <a:ea typeface="Arial" pitchFamily="34" charset="-122"/>
-                <a:cs typeface="Arial" pitchFamily="34" charset="-120"/>
+                  <a:srgbClr val="16181D"/>
+                </a:solidFill>
+                <a:latin typeface="Arial" pitchFamily="34" charset="0"/>
+                <a:ea typeface="BIZ UDPGothic" pitchFamily="34" charset="-122"/>
+                <a:cs typeface="BIZ UDPGothic" pitchFamily="34" charset="-120"/>
               </a:rPr>
               <a:t>建設・土木・建築業界</a:t>
             </a:r>
@@ -4299,11 +4299,11 @@
             <a:r>
               <a:rPr lang="en-US" sz="1250" dirty="0">
                 <a:solidFill>
-                  <a:srgbClr val="CCCCCC"/>
-                </a:solidFill>
-                <a:latin typeface="Arial" pitchFamily="34" charset="0"/>
-                <a:ea typeface="Arial" pitchFamily="34" charset="-122"/>
-                <a:cs typeface="Arial" pitchFamily="34" charset="-120"/>
+                  <a:srgbClr val="2B2F36"/>
+                </a:solidFill>
+                <a:latin typeface="Arial" pitchFamily="34" charset="0"/>
+                <a:ea typeface="BIZ UDPGothic" pitchFamily="34" charset="-122"/>
+                <a:cs typeface="BIZ UDPGothic" pitchFamily="34" charset="-120"/>
               </a:rPr>
               <a:t>名前だけのペーパーカンパニーを整理し、職人を自社できちんと雇う、筋肉質な中堅建設会社を増やします。</a:t>
             </a:r>
@@ -4328,11 +4328,11 @@
             </a:avLst>
           </a:prstGeom>
           <a:solidFill>
-            <a:srgbClr val="1A1A1A"/>
+            <a:srgbClr val="FFFFFF"/>
           </a:solidFill>
           <a:ln w="12700">
             <a:solidFill>
-              <a:srgbClr val="2E2E2E"/>
+              <a:srgbClr val="DDE0E6"/>
             </a:solidFill>
             <a:prstDash val="solid"/>
           </a:ln>
@@ -4353,11 +4353,11 @@
             <a:avLst/>
           </a:prstGeom>
           <a:solidFill>
-            <a:srgbClr val="0A0A0A"/>
+            <a:srgbClr val="F5F6F8"/>
           </a:solidFill>
           <a:ln w="12700">
             <a:solidFill>
-              <a:srgbClr val="2E2E2E"/>
+              <a:srgbClr val="DDE0E6"/>
             </a:solidFill>
             <a:prstDash val="solid"/>
           </a:ln>
@@ -4414,11 +4414,11 @@
             <a:r>
               <a:rPr lang="en-US" sz="1600" b="1" dirty="0">
                 <a:solidFill>
-                  <a:srgbClr val="F5F5F0"/>
-                </a:solidFill>
-                <a:latin typeface="Arial" pitchFamily="34" charset="0"/>
-                <a:ea typeface="Arial" pitchFamily="34" charset="-122"/>
-                <a:cs typeface="Arial" pitchFamily="34" charset="-120"/>
+                  <a:srgbClr val="16181D"/>
+                </a:solidFill>
+                <a:latin typeface="Arial" pitchFamily="34" charset="0"/>
+                <a:ea typeface="BIZ UDPGothic" pitchFamily="34" charset="-122"/>
+                <a:cs typeface="BIZ UDPGothic" pitchFamily="34" charset="-120"/>
               </a:rPr>
               <a:t>IT・システム開発業界</a:t>
             </a:r>
@@ -4456,11 +4456,11 @@
             <a:r>
               <a:rPr lang="en-US" sz="1250" dirty="0">
                 <a:solidFill>
-                  <a:srgbClr val="CCCCCC"/>
-                </a:solidFill>
-                <a:latin typeface="Arial" pitchFamily="34" charset="0"/>
-                <a:ea typeface="Arial" pitchFamily="34" charset="-122"/>
-                <a:cs typeface="Arial" pitchFamily="34" charset="-120"/>
+                  <a:srgbClr val="2B2F36"/>
+                </a:solidFill>
+                <a:latin typeface="Arial" pitchFamily="34" charset="0"/>
+                <a:ea typeface="BIZ UDPGothic" pitchFamily="34" charset="-122"/>
+                <a:cs typeface="BIZ UDPGothic" pitchFamily="34" charset="-120"/>
               </a:rPr>
               <a:t>何社も間に入って手数料だけ取る「中抜き」をなくし、ちゃんと開発する力を持った会社に仕事を集めます。</a:t>
             </a:r>
@@ -4485,11 +4485,11 @@
             </a:avLst>
           </a:prstGeom>
           <a:solidFill>
-            <a:srgbClr val="1A1A1A"/>
+            <a:srgbClr val="FFFFFF"/>
           </a:solidFill>
           <a:ln w="12700">
             <a:solidFill>
-              <a:srgbClr val="2E2E2E"/>
+              <a:srgbClr val="DDE0E6"/>
             </a:solidFill>
             <a:prstDash val="solid"/>
           </a:ln>
@@ -4510,11 +4510,11 @@
             <a:avLst/>
           </a:prstGeom>
           <a:solidFill>
-            <a:srgbClr val="0A0A0A"/>
+            <a:srgbClr val="F5F6F8"/>
           </a:solidFill>
           <a:ln w="12700">
             <a:solidFill>
-              <a:srgbClr val="2E2E2E"/>
+              <a:srgbClr val="DDE0E6"/>
             </a:solidFill>
             <a:prstDash val="solid"/>
           </a:ln>
@@ -4571,11 +4571,11 @@
             <a:r>
               <a:rPr lang="en-US" sz="1600" b="1" dirty="0">
                 <a:solidFill>
-                  <a:srgbClr val="F5F5F0"/>
-                </a:solidFill>
-                <a:latin typeface="Arial" pitchFamily="34" charset="0"/>
-                <a:ea typeface="Arial" pitchFamily="34" charset="-122"/>
-                <a:cs typeface="Arial" pitchFamily="34" charset="-120"/>
+                  <a:srgbClr val="16181D"/>
+                </a:solidFill>
+                <a:latin typeface="Arial" pitchFamily="34" charset="0"/>
+                <a:ea typeface="BIZ UDPGothic" pitchFamily="34" charset="-122"/>
+                <a:cs typeface="BIZ UDPGothic" pitchFamily="34" charset="-120"/>
               </a:rPr>
               <a:t>製造業（部品加工など）</a:t>
             </a:r>
@@ -4613,11 +4613,11 @@
             <a:r>
               <a:rPr lang="en-US" sz="1250" dirty="0">
                 <a:solidFill>
-                  <a:srgbClr val="CCCCCC"/>
-                </a:solidFill>
-                <a:latin typeface="Arial" pitchFamily="34" charset="0"/>
-                <a:ea typeface="Arial" pitchFamily="34" charset="-122"/>
-                <a:cs typeface="Arial" pitchFamily="34" charset="-120"/>
+                  <a:srgbClr val="2B2F36"/>
+                </a:solidFill>
+                <a:latin typeface="Arial" pitchFamily="34" charset="0"/>
+                <a:ea typeface="BIZ UDPGothic" pitchFamily="34" charset="-122"/>
+                <a:cs typeface="BIZ UDPGothic" pitchFamily="34" charset="-120"/>
               </a:rPr>
               <a:t>1社だけで生き延びようとするのをやめ、同業同士の合併で、強い部品供給元へと進化させます。</a:t>
             </a:r>
@@ -4639,7 +4639,7 @@
     <p:bg>
       <p:bgPr>
         <a:solidFill>
-          <a:srgbClr val="0A0A0A"/>
+          <a:srgbClr val="F5F6F8"/>
         </a:solidFill>
       </p:bgPr>
     </p:bg>
@@ -4684,11 +4684,11 @@
             <a:r>
               <a:rPr lang="en-US" sz="1200" b="1" spc="300" kern="0" dirty="0">
                 <a:solidFill>
-                  <a:srgbClr val="D62828"/>
-                </a:solidFill>
-                <a:latin typeface="Arial" pitchFamily="34" charset="0"/>
-                <a:ea typeface="Arial" pitchFamily="34" charset="-122"/>
-                <a:cs typeface="Arial" pitchFamily="34" charset="-120"/>
+                  <a:srgbClr val="C8161D"/>
+                </a:solidFill>
+                <a:latin typeface="Arial" pitchFamily="34" charset="0"/>
+                <a:ea typeface="BIZ UDPGothic" pitchFamily="34" charset="-122"/>
+                <a:cs typeface="BIZ UDPGothic" pitchFamily="34" charset="-120"/>
               </a:rPr>
               <a:t>2. 対象外になるもの</a:t>
             </a:r>
@@ -4723,11 +4723,11 @@
             <a:r>
               <a:rPr lang="en-US" sz="3200" b="1" dirty="0">
                 <a:solidFill>
-                  <a:srgbClr val="F5F5F0"/>
-                </a:solidFill>
-                <a:latin typeface="Arial" pitchFamily="34" charset="0"/>
-                <a:ea typeface="Arial" pitchFamily="34" charset="-122"/>
-                <a:cs typeface="Arial" pitchFamily="34" charset="-120"/>
+                  <a:srgbClr val="16181D"/>
+                </a:solidFill>
+                <a:latin typeface="Arial" pitchFamily="34" charset="0"/>
+                <a:ea typeface="BIZ UDPGothic" pitchFamily="34" charset="-122"/>
+                <a:cs typeface="BIZ UDPGothic" pitchFamily="34" charset="-120"/>
               </a:rPr>
               <a:t>飲食・美容など「BtoC」のお店は対象外</a:t>
             </a:r>
@@ -4762,11 +4762,11 @@
             <a:r>
               <a:rPr lang="en-US" sz="1000" dirty="0">
                 <a:solidFill>
-                  <a:srgbClr val="CCCCCC"/>
-                </a:solidFill>
-                <a:latin typeface="Arial" pitchFamily="34" charset="0"/>
-                <a:ea typeface="Arial" pitchFamily="34" charset="-122"/>
-                <a:cs typeface="Arial" pitchFamily="34" charset="-120"/>
+                  <a:srgbClr val="2B2F36"/>
+                </a:solidFill>
+                <a:latin typeface="Arial" pitchFamily="34" charset="0"/>
+                <a:ea typeface="BIZ UDPGothic" pitchFamily="34" charset="-122"/>
+                <a:cs typeface="BIZ UDPGothic" pitchFamily="34" charset="-120"/>
               </a:rPr>
               <a:t>12</a:t>
             </a:r>
@@ -4801,11 +4801,11 @@
             <a:r>
               <a:rPr lang="en-US" sz="900" dirty="0">
                 <a:solidFill>
-                  <a:srgbClr val="555555"/>
-                </a:solidFill>
-                <a:latin typeface="Arial" pitchFamily="34" charset="0"/>
-                <a:ea typeface="Arial" pitchFamily="34" charset="-122"/>
-                <a:cs typeface="Arial" pitchFamily="34" charset="-120"/>
+                  <a:srgbClr val="9AA0AA"/>
+                </a:solidFill>
+                <a:latin typeface="Arial" pitchFamily="34" charset="0"/>
+                <a:ea typeface="BIZ UDPGothic" pitchFamily="34" charset="-122"/>
+                <a:cs typeface="BIZ UDPGothic" pitchFamily="34" charset="-120"/>
               </a:rPr>
               <a:t>REBOOT JAPAN ── 提言003</a:t>
             </a:r>
@@ -4830,11 +4830,11 @@
             </a:avLst>
           </a:prstGeom>
           <a:solidFill>
-            <a:srgbClr val="1A1A1A"/>
+            <a:srgbClr val="FFFFFF"/>
           </a:solidFill>
           <a:ln w="12700">
             <a:solidFill>
-              <a:srgbClr val="2E2E2E"/>
+              <a:srgbClr val="DDE0E6"/>
             </a:solidFill>
             <a:prstDash val="solid"/>
           </a:ln>
@@ -4891,11 +4891,11 @@
             <a:r>
               <a:rPr lang="en-US" sz="1700" b="1" dirty="0">
                 <a:solidFill>
-                  <a:srgbClr val="F5F5F0"/>
-                </a:solidFill>
-                <a:latin typeface="Arial" pitchFamily="34" charset="0"/>
-                <a:ea typeface="Arial" pitchFamily="34" charset="-122"/>
-                <a:cs typeface="Arial" pitchFamily="34" charset="-120"/>
+                  <a:srgbClr val="16181D"/>
+                </a:solidFill>
+                <a:latin typeface="Arial" pitchFamily="34" charset="0"/>
+                <a:ea typeface="BIZ UDPGothic" pitchFamily="34" charset="-122"/>
+                <a:cs typeface="BIZ UDPGothic" pitchFamily="34" charset="-120"/>
               </a:rPr>
               <a:t>BtoC（個人のお客さんを相手にする業種）は完全除外</a:t>
             </a:r>
@@ -4933,11 +4933,11 @@
             <a:r>
               <a:rPr lang="en-US" sz="1300" dirty="0">
                 <a:solidFill>
-                  <a:srgbClr val="CCCCCC"/>
-                </a:solidFill>
-                <a:latin typeface="Arial" pitchFamily="34" charset="0"/>
-                <a:ea typeface="Arial" pitchFamily="34" charset="-122"/>
-                <a:cs typeface="Arial" pitchFamily="34" charset="-120"/>
+                  <a:srgbClr val="2B2F36"/>
+                </a:solidFill>
+                <a:latin typeface="Arial" pitchFamily="34" charset="0"/>
+                <a:ea typeface="BIZ UDPGothic" pitchFamily="34" charset="-122"/>
+                <a:cs typeface="BIZ UDPGothic" pitchFamily="34" charset="-120"/>
               </a:rPr>
               <a:t>飲食店・美容室・アパレル・エンタメなどは、この提言の対象から完全に除外し、現行の優遇枠組みのまま維持・保護します。</a:t>
             </a:r>
@@ -4972,11 +4972,11 @@
             <a:r>
               <a:rPr lang="en-US" sz="1500" b="1" dirty="0">
                 <a:solidFill>
-                  <a:srgbClr val="D62828"/>
-                </a:solidFill>
-                <a:latin typeface="Arial" pitchFamily="34" charset="0"/>
-                <a:ea typeface="Arial" pitchFamily="34" charset="-122"/>
-                <a:cs typeface="Arial" pitchFamily="34" charset="-120"/>
+                  <a:srgbClr val="C8161D"/>
+                </a:solidFill>
+                <a:latin typeface="Arial" pitchFamily="34" charset="0"/>
+                <a:ea typeface="BIZ UDPGothic" pitchFamily="34" charset="-122"/>
+                <a:cs typeface="BIZ UDPGothic" pitchFamily="34" charset="-120"/>
               </a:rPr>
               <a:t>BtoBとBtoCを両方やっている会社はどう判定する？</a:t>
             </a:r>
@@ -5015,11 +5015,11 @@
             <a:r>
               <a:rPr lang="en-US" sz="1400" dirty="0">
                 <a:solidFill>
-                  <a:srgbClr val="CCCCCC"/>
-                </a:solidFill>
-                <a:latin typeface="Arial" pitchFamily="34" charset="0"/>
-                <a:ea typeface="Arial" pitchFamily="34" charset="-122"/>
-                <a:cs typeface="Arial" pitchFamily="34" charset="-120"/>
+                  <a:srgbClr val="2B2F36"/>
+                </a:solidFill>
+                <a:latin typeface="Arial" pitchFamily="34" charset="0"/>
+                <a:ea typeface="BIZ UDPGothic" pitchFamily="34" charset="-122"/>
+                <a:cs typeface="BIZ UDPGothic" pitchFamily="34" charset="-120"/>
               </a:rPr>
               <a:t>「BtoB売上が50%を超えている」</a:t>
             </a:r>
@@ -5036,11 +5036,11 @@
             <a:r>
               <a:rPr lang="en-US" sz="1400" dirty="0">
                 <a:solidFill>
-                  <a:srgbClr val="CCCCCC"/>
-                </a:solidFill>
-                <a:latin typeface="Arial" pitchFamily="34" charset="0"/>
-                <a:ea typeface="Arial" pitchFamily="34" charset="-122"/>
-                <a:cs typeface="Arial" pitchFamily="34" charset="-120"/>
+                  <a:srgbClr val="2B2F36"/>
+                </a:solidFill>
+                <a:latin typeface="Arial" pitchFamily="34" charset="0"/>
+                <a:ea typeface="BIZ UDPGothic" pitchFamily="34" charset="-122"/>
+                <a:cs typeface="BIZ UDPGothic" pitchFamily="34" charset="-120"/>
               </a:rPr>
               <a:t>または「国の産業分類で対象業種に当てはまる」</a:t>
             </a:r>
@@ -5075,11 +5075,11 @@
             <a:r>
               <a:rPr lang="en-US" sz="1300" dirty="0">
                 <a:solidFill>
-                  <a:srgbClr val="999999"/>
-                </a:solidFill>
-                <a:latin typeface="Arial" pitchFamily="34" charset="0"/>
-                <a:ea typeface="Arial" pitchFamily="34" charset="-122"/>
-                <a:cs typeface="Arial" pitchFamily="34" charset="-120"/>
+                  <a:srgbClr val="4B515C"/>
+                </a:solidFill>
+                <a:latin typeface="Arial" pitchFamily="34" charset="0"/>
+                <a:ea typeface="BIZ UDPGothic" pitchFamily="34" charset="-122"/>
+                <a:cs typeface="BIZ UDPGothic" pitchFamily="34" charset="-120"/>
               </a:rPr>
               <a:t>このどちらかで判定します。</a:t>
             </a:r>
@@ -5101,7 +5101,7 @@
     <p:bg>
       <p:bgPr>
         <a:solidFill>
-          <a:srgbClr val="0A0A0A"/>
+          <a:srgbClr val="F5F6F8"/>
         </a:solidFill>
       </p:bgPr>
     </p:bg>
@@ -5146,11 +5146,11 @@
             <a:r>
               <a:rPr lang="en-US" sz="1200" b="1" spc="300" kern="0" dirty="0">
                 <a:solidFill>
-                  <a:srgbClr val="D62828"/>
-                </a:solidFill>
-                <a:latin typeface="Arial" pitchFamily="34" charset="0"/>
-                <a:ea typeface="Arial" pitchFamily="34" charset="-122"/>
-                <a:cs typeface="Arial" pitchFamily="34" charset="-120"/>
+                  <a:srgbClr val="C8161D"/>
+                </a:solidFill>
+                <a:latin typeface="Arial" pitchFamily="34" charset="0"/>
+                <a:ea typeface="BIZ UDPGothic" pitchFamily="34" charset="-122"/>
+                <a:cs typeface="BIZ UDPGothic" pitchFamily="34" charset="-120"/>
               </a:rPr>
               <a:t>3. 何を変えるのか</a:t>
             </a:r>
@@ -5185,11 +5185,11 @@
             <a:r>
               <a:rPr lang="en-US" sz="3200" b="1" dirty="0">
                 <a:solidFill>
-                  <a:srgbClr val="F5F5F0"/>
-                </a:solidFill>
-                <a:latin typeface="Arial" pitchFamily="34" charset="0"/>
-                <a:ea typeface="Arial" pitchFamily="34" charset="-122"/>
-                <a:cs typeface="Arial" pitchFamily="34" charset="-120"/>
+                  <a:srgbClr val="16181D"/>
+                </a:solidFill>
+                <a:latin typeface="Arial" pitchFamily="34" charset="0"/>
+                <a:ea typeface="BIZ UDPGothic" pitchFamily="34" charset="-122"/>
+                <a:cs typeface="BIZ UDPGothic" pitchFamily="34" charset="-120"/>
               </a:rPr>
               <a:t>「条件なしの税金優遇」をやめます</a:t>
             </a:r>
@@ -5224,11 +5224,11 @@
             <a:r>
               <a:rPr lang="en-US" sz="1000" dirty="0">
                 <a:solidFill>
-                  <a:srgbClr val="CCCCCC"/>
-                </a:solidFill>
-                <a:latin typeface="Arial" pitchFamily="34" charset="0"/>
-                <a:ea typeface="Arial" pitchFamily="34" charset="-122"/>
-                <a:cs typeface="Arial" pitchFamily="34" charset="-120"/>
+                  <a:srgbClr val="2B2F36"/>
+                </a:solidFill>
+                <a:latin typeface="Arial" pitchFamily="34" charset="0"/>
+                <a:ea typeface="BIZ UDPGothic" pitchFamily="34" charset="-122"/>
+                <a:cs typeface="BIZ UDPGothic" pitchFamily="34" charset="-120"/>
               </a:rPr>
               <a:t>13</a:t>
             </a:r>
@@ -5263,11 +5263,11 @@
             <a:r>
               <a:rPr lang="en-US" sz="900" dirty="0">
                 <a:solidFill>
-                  <a:srgbClr val="555555"/>
-                </a:solidFill>
-                <a:latin typeface="Arial" pitchFamily="34" charset="0"/>
-                <a:ea typeface="Arial" pitchFamily="34" charset="-122"/>
-                <a:cs typeface="Arial" pitchFamily="34" charset="-120"/>
+                  <a:srgbClr val="9AA0AA"/>
+                </a:solidFill>
+                <a:latin typeface="Arial" pitchFamily="34" charset="0"/>
+                <a:ea typeface="BIZ UDPGothic" pitchFamily="34" charset="-122"/>
+                <a:cs typeface="BIZ UDPGothic" pitchFamily="34" charset="-120"/>
               </a:rPr>
               <a:t>REBOOT JAPAN ── 提言003</a:t>
             </a:r>
@@ -5302,11 +5302,11 @@
             <a:r>
               <a:rPr lang="en-US" sz="1300" b="1" dirty="0">
                 <a:solidFill>
-                  <a:srgbClr val="D62828"/>
-                </a:solidFill>
-                <a:latin typeface="Arial" pitchFamily="34" charset="0"/>
-                <a:ea typeface="Arial" pitchFamily="34" charset="-122"/>
-                <a:cs typeface="Arial" pitchFamily="34" charset="-120"/>
+                  <a:srgbClr val="C8161D"/>
+                </a:solidFill>
+                <a:latin typeface="Arial" pitchFamily="34" charset="0"/>
+                <a:ea typeface="BIZ UDPGothic" pitchFamily="34" charset="-122"/>
+                <a:cs typeface="BIZ UDPGothic" pitchFamily="34" charset="-120"/>
               </a:rPr>
               <a:t>用語解説：軽減税率</a:t>
             </a:r>
@@ -5341,11 +5341,11 @@
             <a:r>
               <a:rPr lang="en-US" sz="1250" dirty="0">
                 <a:solidFill>
-                  <a:srgbClr val="CCCCCC"/>
-                </a:solidFill>
-                <a:latin typeface="Arial" pitchFamily="34" charset="0"/>
-                <a:ea typeface="Arial" pitchFamily="34" charset="-122"/>
-                <a:cs typeface="Arial" pitchFamily="34" charset="-120"/>
+                  <a:srgbClr val="2B2F36"/>
+                </a:solidFill>
+                <a:latin typeface="Arial" pitchFamily="34" charset="0"/>
+                <a:ea typeface="BIZ UDPGothic" pitchFamily="34" charset="-122"/>
+                <a:cs typeface="BIZ UDPGothic" pitchFamily="34" charset="-120"/>
               </a:rPr>
               <a:t>本来の税率より低く設定された、優遇された税率のこと。</a:t>
             </a:r>
@@ -5380,11 +5380,11 @@
             <a:r>
               <a:rPr lang="en-US" sz="1500" dirty="0">
                 <a:solidFill>
-                  <a:srgbClr val="F5F5F0"/>
-                </a:solidFill>
-                <a:latin typeface="Arial" pitchFamily="34" charset="0"/>
-                <a:ea typeface="Arial" pitchFamily="34" charset="-122"/>
-                <a:cs typeface="Arial" pitchFamily="34" charset="-120"/>
+                  <a:srgbClr val="16181D"/>
+                </a:solidFill>
+                <a:latin typeface="Arial" pitchFamily="34" charset="0"/>
+                <a:ea typeface="BIZ UDPGothic" pitchFamily="34" charset="-122"/>
+                <a:cs typeface="BIZ UDPGothic" pitchFamily="34" charset="-120"/>
               </a:rPr>
               <a:t>今の制度：中小企業なら「自動的に」法人税が安くなる（軽減税率15%）</a:t>
             </a:r>
@@ -5443,11 +5443,11 @@
             <a:r>
               <a:rPr lang="en-US" sz="1350" dirty="0">
                 <a:solidFill>
-                  <a:srgbClr val="D62828"/>
-                </a:solidFill>
-                <a:latin typeface="Arial" pitchFamily="34" charset="0"/>
-                <a:ea typeface="Arial" pitchFamily="34" charset="-122"/>
-                <a:cs typeface="Arial" pitchFamily="34" charset="-120"/>
+                  <a:srgbClr val="C8161D"/>
+                </a:solidFill>
+                <a:latin typeface="Arial" pitchFamily="34" charset="0"/>
+                <a:ea typeface="BIZ UDPGothic" pitchFamily="34" charset="-122"/>
+                <a:cs typeface="BIZ UDPGothic" pitchFamily="34" charset="-120"/>
               </a:rPr>
               <a:t>成長していてもしていなくても、同じように優遇されてしまう</a:t>
             </a:r>
@@ -5472,7 +5472,7 @@
           <a:noFill/>
           <a:ln w="12700">
             <a:solidFill>
-              <a:srgbClr val="2E2E2E"/>
+              <a:srgbClr val="DDE0E6"/>
             </a:solidFill>
             <a:prstDash val="solid"/>
           </a:ln>
@@ -5505,11 +5505,11 @@
             <a:r>
               <a:rPr lang="en-US" sz="1500" dirty="0">
                 <a:solidFill>
-                  <a:srgbClr val="F5F5F0"/>
-                </a:solidFill>
-                <a:latin typeface="Arial" pitchFamily="34" charset="0"/>
-                <a:ea typeface="Arial" pitchFamily="34" charset="-122"/>
-                <a:cs typeface="Arial" pitchFamily="34" charset="-120"/>
+                  <a:srgbClr val="16181D"/>
+                </a:solidFill>
+                <a:latin typeface="Arial" pitchFamily="34" charset="0"/>
+                <a:ea typeface="BIZ UDPGothic" pitchFamily="34" charset="-122"/>
+                <a:cs typeface="BIZ UDPGothic" pitchFamily="34" charset="-120"/>
               </a:rPr>
               <a:t>新しい制度：会社の規模に関係なく、法人税は一律25%が基本</a:t>
             </a:r>
@@ -5568,11 +5568,11 @@
             <a:r>
               <a:rPr lang="en-US" sz="1350" dirty="0">
                 <a:solidFill>
-                  <a:srgbClr val="F5F5F0"/>
-                </a:solidFill>
-                <a:latin typeface="Arial" pitchFamily="34" charset="0"/>
-                <a:ea typeface="Arial" pitchFamily="34" charset="-122"/>
-                <a:cs typeface="Arial" pitchFamily="34" charset="-120"/>
+                  <a:srgbClr val="16181D"/>
+                </a:solidFill>
+                <a:latin typeface="Arial" pitchFamily="34" charset="0"/>
+                <a:ea typeface="BIZ UDPGothic" pitchFamily="34" charset="-122"/>
+                <a:cs typeface="BIZ UDPGothic" pitchFamily="34" charset="-120"/>
               </a:rPr>
               <a:t>成長の条件をクリアした会社だけが、税率を下げてもらえる</a:t>
             </a:r>
@@ -5594,7 +5594,7 @@
     <p:bg>
       <p:bgPr>
         <a:solidFill>
-          <a:srgbClr val="0A0A0A"/>
+          <a:srgbClr val="F5F6F8"/>
         </a:solidFill>
       </p:bgPr>
     </p:bg>
@@ -5639,11 +5639,11 @@
             <a:r>
               <a:rPr lang="en-US" sz="1200" b="1" spc="300" kern="0" dirty="0">
                 <a:solidFill>
-                  <a:srgbClr val="D62828"/>
-                </a:solidFill>
-                <a:latin typeface="Arial" pitchFamily="34" charset="0"/>
-                <a:ea typeface="Arial" pitchFamily="34" charset="-122"/>
-                <a:cs typeface="Arial" pitchFamily="34" charset="-120"/>
+                  <a:srgbClr val="C8161D"/>
+                </a:solidFill>
+                <a:latin typeface="Arial" pitchFamily="34" charset="0"/>
+                <a:ea typeface="BIZ UDPGothic" pitchFamily="34" charset="-122"/>
+                <a:cs typeface="BIZ UDPGothic" pitchFamily="34" charset="-120"/>
               </a:rPr>
               <a:t>3. 新しい税率ルール</a:t>
             </a:r>
@@ -5678,11 +5678,11 @@
             <a:r>
               <a:rPr lang="en-US" sz="3200" b="1" dirty="0">
                 <a:solidFill>
-                  <a:srgbClr val="F5F5F0"/>
-                </a:solidFill>
-                <a:latin typeface="Arial" pitchFamily="34" charset="0"/>
-                <a:ea typeface="Arial" pitchFamily="34" charset="-122"/>
-                <a:cs typeface="Arial" pitchFamily="34" charset="-120"/>
+                  <a:srgbClr val="16181D"/>
+                </a:solidFill>
+                <a:latin typeface="Arial" pitchFamily="34" charset="0"/>
+                <a:ea typeface="BIZ UDPGothic" pitchFamily="34" charset="-122"/>
+                <a:cs typeface="BIZ UDPGothic" pitchFamily="34" charset="-120"/>
               </a:rPr>
               <a:t>法人税は、成長した分だけ安くなる</a:t>
             </a:r>
@@ -5717,11 +5717,11 @@
             <a:r>
               <a:rPr lang="en-US" sz="1000" dirty="0">
                 <a:solidFill>
-                  <a:srgbClr val="CCCCCC"/>
-                </a:solidFill>
-                <a:latin typeface="Arial" pitchFamily="34" charset="0"/>
-                <a:ea typeface="Arial" pitchFamily="34" charset="-122"/>
-                <a:cs typeface="Arial" pitchFamily="34" charset="-120"/>
+                  <a:srgbClr val="2B2F36"/>
+                </a:solidFill>
+                <a:latin typeface="Arial" pitchFamily="34" charset="0"/>
+                <a:ea typeface="BIZ UDPGothic" pitchFamily="34" charset="-122"/>
+                <a:cs typeface="BIZ UDPGothic" pitchFamily="34" charset="-120"/>
               </a:rPr>
               <a:t>14</a:t>
             </a:r>
@@ -5756,11 +5756,11 @@
             <a:r>
               <a:rPr lang="en-US" sz="900" dirty="0">
                 <a:solidFill>
-                  <a:srgbClr val="555555"/>
-                </a:solidFill>
-                <a:latin typeface="Arial" pitchFamily="34" charset="0"/>
-                <a:ea typeface="Arial" pitchFamily="34" charset="-122"/>
-                <a:cs typeface="Arial" pitchFamily="34" charset="-120"/>
+                  <a:srgbClr val="9AA0AA"/>
+                </a:solidFill>
+                <a:latin typeface="Arial" pitchFamily="34" charset="0"/>
+                <a:ea typeface="BIZ UDPGothic" pitchFamily="34" charset="-122"/>
+                <a:cs typeface="BIZ UDPGothic" pitchFamily="34" charset="-120"/>
               </a:rPr>
               <a:t>REBOOT JAPAN ── 提言003</a:t>
             </a:r>
@@ -5783,11 +5783,11 @@
             <a:avLst/>
           </a:prstGeom>
           <a:solidFill>
-            <a:srgbClr val="2E2E2E"/>
+            <a:srgbClr val="DDE0E6"/>
           </a:solidFill>
           <a:ln w="9525">
             <a:solidFill>
-              <a:srgbClr val="2E2E2E"/>
+              <a:srgbClr val="DDE0E6"/>
             </a:solidFill>
             <a:prstDash val="solid"/>
           </a:ln>
@@ -5820,11 +5820,11 @@
             <a:r>
               <a:rPr lang="en-US" sz="1300" b="1" dirty="0">
                 <a:solidFill>
-                  <a:srgbClr val="F5F5F0"/>
-                </a:solidFill>
-                <a:latin typeface="Arial" pitchFamily="34" charset="0"/>
-                <a:ea typeface="Arial" pitchFamily="34" charset="-122"/>
-                <a:cs typeface="Arial" pitchFamily="34" charset="-120"/>
+                  <a:srgbClr val="16181D"/>
+                </a:solidFill>
+                <a:latin typeface="Arial" pitchFamily="34" charset="0"/>
+                <a:ea typeface="BIZ UDPGothic" pitchFamily="34" charset="-122"/>
+                <a:cs typeface="BIZ UDPGothic" pitchFamily="34" charset="-120"/>
               </a:rPr>
               <a:t>区分</a:t>
             </a:r>
@@ -5847,11 +5847,11 @@
             <a:avLst/>
           </a:prstGeom>
           <a:solidFill>
-            <a:srgbClr val="2E2E2E"/>
+            <a:srgbClr val="DDE0E6"/>
           </a:solidFill>
           <a:ln w="9525">
             <a:solidFill>
-              <a:srgbClr val="2E2E2E"/>
+              <a:srgbClr val="DDE0E6"/>
             </a:solidFill>
             <a:prstDash val="solid"/>
           </a:ln>
@@ -5884,11 +5884,11 @@
             <a:r>
               <a:rPr lang="en-US" sz="1300" b="1" dirty="0">
                 <a:solidFill>
-                  <a:srgbClr val="F5F5F0"/>
-                </a:solidFill>
-                <a:latin typeface="Arial" pitchFamily="34" charset="0"/>
-                <a:ea typeface="Arial" pitchFamily="34" charset="-122"/>
-                <a:cs typeface="Arial" pitchFamily="34" charset="-120"/>
+                  <a:srgbClr val="16181D"/>
+                </a:solidFill>
+                <a:latin typeface="Arial" pitchFamily="34" charset="0"/>
+                <a:ea typeface="BIZ UDPGothic" pitchFamily="34" charset="-122"/>
+                <a:cs typeface="BIZ UDPGothic" pitchFamily="34" charset="-120"/>
               </a:rPr>
               <a:t>今の実際の税率</a:t>
             </a:r>
@@ -5911,11 +5911,11 @@
             <a:avLst/>
           </a:prstGeom>
           <a:solidFill>
-            <a:srgbClr val="2E2E2E"/>
+            <a:srgbClr val="DDE0E6"/>
           </a:solidFill>
           <a:ln w="9525">
             <a:solidFill>
-              <a:srgbClr val="2E2E2E"/>
+              <a:srgbClr val="DDE0E6"/>
             </a:solidFill>
             <a:prstDash val="solid"/>
           </a:ln>
@@ -5948,11 +5948,11 @@
             <a:r>
               <a:rPr lang="en-US" sz="1300" b="1" dirty="0">
                 <a:solidFill>
-                  <a:srgbClr val="F5F5F0"/>
-                </a:solidFill>
-                <a:latin typeface="Arial" pitchFamily="34" charset="0"/>
-                <a:ea typeface="Arial" pitchFamily="34" charset="-122"/>
-                <a:cs typeface="Arial" pitchFamily="34" charset="-120"/>
+                  <a:srgbClr val="16181D"/>
+                </a:solidFill>
+                <a:latin typeface="Arial" pitchFamily="34" charset="0"/>
+                <a:ea typeface="BIZ UDPGothic" pitchFamily="34" charset="-122"/>
+                <a:cs typeface="BIZ UDPGothic" pitchFamily="34" charset="-120"/>
               </a:rPr>
               <a:t>新しい制度</a:t>
             </a:r>
@@ -5975,11 +5975,11 @@
             <a:avLst/>
           </a:prstGeom>
           <a:solidFill>
-            <a:srgbClr val="0A0A0A"/>
+            <a:srgbClr val="F5F6F8"/>
           </a:solidFill>
           <a:ln w="9525">
             <a:solidFill>
-              <a:srgbClr val="2E2E2E"/>
+              <a:srgbClr val="DDE0E6"/>
             </a:solidFill>
             <a:prstDash val="solid"/>
           </a:ln>
@@ -6012,11 +6012,11 @@
             <a:r>
               <a:rPr lang="en-US" sz="1350" dirty="0">
                 <a:solidFill>
-                  <a:srgbClr val="CCCCCC"/>
-                </a:solidFill>
-                <a:latin typeface="Arial" pitchFamily="34" charset="0"/>
-                <a:ea typeface="Arial" pitchFamily="34" charset="-122"/>
-                <a:cs typeface="Arial" pitchFamily="34" charset="-120"/>
+                  <a:srgbClr val="2B2F36"/>
+                </a:solidFill>
+                <a:latin typeface="Arial" pitchFamily="34" charset="0"/>
+                <a:ea typeface="BIZ UDPGothic" pitchFamily="34" charset="-122"/>
+                <a:cs typeface="BIZ UDPGothic" pitchFamily="34" charset="-120"/>
               </a:rPr>
               <a:t>中小企業（利益800万円以下）</a:t>
             </a:r>
@@ -6039,11 +6039,11 @@
             <a:avLst/>
           </a:prstGeom>
           <a:solidFill>
-            <a:srgbClr val="0A0A0A"/>
+            <a:srgbClr val="F5F6F8"/>
           </a:solidFill>
           <a:ln w="9525">
             <a:solidFill>
-              <a:srgbClr val="2E2E2E"/>
+              <a:srgbClr val="DDE0E6"/>
             </a:solidFill>
             <a:prstDash val="solid"/>
           </a:ln>
@@ -6076,11 +6076,11 @@
             <a:r>
               <a:rPr lang="en-US" sz="1350" dirty="0">
                 <a:solidFill>
-                  <a:srgbClr val="CCCCCC"/>
-                </a:solidFill>
-                <a:latin typeface="Arial" pitchFamily="34" charset="0"/>
-                <a:ea typeface="Arial" pitchFamily="34" charset="-122"/>
-                <a:cs typeface="Arial" pitchFamily="34" charset="-120"/>
+                  <a:srgbClr val="2B2F36"/>
+                </a:solidFill>
+                <a:latin typeface="Arial" pitchFamily="34" charset="0"/>
+                <a:ea typeface="BIZ UDPGothic" pitchFamily="34" charset="-122"/>
+                <a:cs typeface="BIZ UDPGothic" pitchFamily="34" charset="-120"/>
               </a:rPr>
               <a:t>約21%</a:t>
             </a:r>
@@ -6103,11 +6103,11 @@
             <a:avLst/>
           </a:prstGeom>
           <a:solidFill>
-            <a:srgbClr val="0A0A0A"/>
+            <a:srgbClr val="F5F6F8"/>
           </a:solidFill>
           <a:ln w="9525">
             <a:solidFill>
-              <a:srgbClr val="2E2E2E"/>
+              <a:srgbClr val="DDE0E6"/>
             </a:solidFill>
             <a:prstDash val="solid"/>
           </a:ln>
@@ -6140,11 +6140,11 @@
             <a:r>
               <a:rPr lang="en-US" sz="1350" b="1" dirty="0">
                 <a:solidFill>
-                  <a:srgbClr val="F5F5F0"/>
-                </a:solidFill>
-                <a:latin typeface="Arial" pitchFamily="34" charset="0"/>
-                <a:ea typeface="Arial" pitchFamily="34" charset="-122"/>
-                <a:cs typeface="Arial" pitchFamily="34" charset="-120"/>
+                  <a:srgbClr val="16181D"/>
+                </a:solidFill>
+                <a:latin typeface="Arial" pitchFamily="34" charset="0"/>
+                <a:ea typeface="BIZ UDPGothic" pitchFamily="34" charset="-122"/>
+                <a:cs typeface="BIZ UDPGothic" pitchFamily="34" charset="-120"/>
               </a:rPr>
               <a:t>25%（一律）</a:t>
             </a:r>
@@ -6167,11 +6167,11 @@
             <a:avLst/>
           </a:prstGeom>
           <a:solidFill>
-            <a:srgbClr val="1A1A1A"/>
+            <a:srgbClr val="FFFFFF"/>
           </a:solidFill>
           <a:ln w="9525">
             <a:solidFill>
-              <a:srgbClr val="2E2E2E"/>
+              <a:srgbClr val="DDE0E6"/>
             </a:solidFill>
             <a:prstDash val="solid"/>
           </a:ln>
@@ -6204,11 +6204,11 @@
             <a:r>
               <a:rPr lang="en-US" sz="1350" dirty="0">
                 <a:solidFill>
-                  <a:srgbClr val="CCCCCC"/>
-                </a:solidFill>
-                <a:latin typeface="Arial" pitchFamily="34" charset="0"/>
-                <a:ea typeface="Arial" pitchFamily="34" charset="-122"/>
-                <a:cs typeface="Arial" pitchFamily="34" charset="-120"/>
+                  <a:srgbClr val="2B2F36"/>
+                </a:solidFill>
+                <a:latin typeface="Arial" pitchFamily="34" charset="0"/>
+                <a:ea typeface="BIZ UDPGothic" pitchFamily="34" charset="-122"/>
+                <a:cs typeface="BIZ UDPGothic" pitchFamily="34" charset="-120"/>
               </a:rPr>
               <a:t>大企業</a:t>
             </a:r>
@@ -6231,11 +6231,11 @@
             <a:avLst/>
           </a:prstGeom>
           <a:solidFill>
-            <a:srgbClr val="1A1A1A"/>
+            <a:srgbClr val="FFFFFF"/>
           </a:solidFill>
           <a:ln w="9525">
             <a:solidFill>
-              <a:srgbClr val="2E2E2E"/>
+              <a:srgbClr val="DDE0E6"/>
             </a:solidFill>
             <a:prstDash val="solid"/>
           </a:ln>
@@ -6268,11 +6268,11 @@
             <a:r>
               <a:rPr lang="en-US" sz="1350" dirty="0">
                 <a:solidFill>
-                  <a:srgbClr val="CCCCCC"/>
-                </a:solidFill>
-                <a:latin typeface="Arial" pitchFamily="34" charset="0"/>
-                <a:ea typeface="Arial" pitchFamily="34" charset="-122"/>
-                <a:cs typeface="Arial" pitchFamily="34" charset="-120"/>
+                  <a:srgbClr val="2B2F36"/>
+                </a:solidFill>
+                <a:latin typeface="Arial" pitchFamily="34" charset="0"/>
+                <a:ea typeface="BIZ UDPGothic" pitchFamily="34" charset="-122"/>
+                <a:cs typeface="BIZ UDPGothic" pitchFamily="34" charset="-120"/>
               </a:rPr>
               <a:t>約30%</a:t>
             </a:r>
@@ -6295,11 +6295,11 @@
             <a:avLst/>
           </a:prstGeom>
           <a:solidFill>
-            <a:srgbClr val="1A1A1A"/>
+            <a:srgbClr val="FFFFFF"/>
           </a:solidFill>
           <a:ln w="9525">
             <a:solidFill>
-              <a:srgbClr val="2E2E2E"/>
+              <a:srgbClr val="DDE0E6"/>
             </a:solidFill>
             <a:prstDash val="solid"/>
           </a:ln>
@@ -6332,11 +6332,11 @@
             <a:r>
               <a:rPr lang="en-US" sz="1350" b="1" dirty="0">
                 <a:solidFill>
-                  <a:srgbClr val="F5F5F0"/>
-                </a:solidFill>
-                <a:latin typeface="Arial" pitchFamily="34" charset="0"/>
-                <a:ea typeface="Arial" pitchFamily="34" charset="-122"/>
-                <a:cs typeface="Arial" pitchFamily="34" charset="-120"/>
+                  <a:srgbClr val="16181D"/>
+                </a:solidFill>
+                <a:latin typeface="Arial" pitchFamily="34" charset="0"/>
+                <a:ea typeface="BIZ UDPGothic" pitchFamily="34" charset="-122"/>
+                <a:cs typeface="BIZ UDPGothic" pitchFamily="34" charset="-120"/>
               </a:rPr>
               <a:t>変更なし</a:t>
             </a:r>
@@ -6359,11 +6359,11 @@
             <a:avLst/>
           </a:prstGeom>
           <a:solidFill>
-            <a:srgbClr val="0A0A0A"/>
+            <a:srgbClr val="F5F6F8"/>
           </a:solidFill>
           <a:ln w="9525">
             <a:solidFill>
-              <a:srgbClr val="2E2E2E"/>
+              <a:srgbClr val="DDE0E6"/>
             </a:solidFill>
             <a:prstDash val="solid"/>
           </a:ln>
@@ -6396,11 +6396,11 @@
             <a:r>
               <a:rPr lang="en-US" sz="1350" dirty="0">
                 <a:solidFill>
-                  <a:srgbClr val="CCCCCC"/>
-                </a:solidFill>
-                <a:latin typeface="Arial" pitchFamily="34" charset="0"/>
-                <a:ea typeface="Arial" pitchFamily="34" charset="-122"/>
-                <a:cs typeface="Arial" pitchFamily="34" charset="-120"/>
+                  <a:srgbClr val="2B2F36"/>
+                </a:solidFill>
+                <a:latin typeface="Arial" pitchFamily="34" charset="0"/>
+                <a:ea typeface="BIZ UDPGothic" pitchFamily="34" charset="-122"/>
+                <a:cs typeface="BIZ UDPGothic" pitchFamily="34" charset="-120"/>
               </a:rPr>
               <a:t>条件達成企業（維持）</a:t>
             </a:r>
@@ -6423,11 +6423,11 @@
             <a:avLst/>
           </a:prstGeom>
           <a:solidFill>
-            <a:srgbClr val="0A0A0A"/>
+            <a:srgbClr val="F5F6F8"/>
           </a:solidFill>
           <a:ln w="9525">
             <a:solidFill>
-              <a:srgbClr val="2E2E2E"/>
+              <a:srgbClr val="DDE0E6"/>
             </a:solidFill>
             <a:prstDash val="solid"/>
           </a:ln>
@@ -6460,11 +6460,11 @@
             <a:r>
               <a:rPr lang="en-US" sz="1350" dirty="0">
                 <a:solidFill>
-                  <a:srgbClr val="CCCCCC"/>
-                </a:solidFill>
-                <a:latin typeface="Arial" pitchFamily="34" charset="0"/>
-                <a:ea typeface="Arial" pitchFamily="34" charset="-122"/>
-                <a:cs typeface="Arial" pitchFamily="34" charset="-120"/>
+                  <a:srgbClr val="2B2F36"/>
+                </a:solidFill>
+                <a:latin typeface="Arial" pitchFamily="34" charset="0"/>
+                <a:ea typeface="BIZ UDPGothic" pitchFamily="34" charset="-122"/>
+                <a:cs typeface="BIZ UDPGothic" pitchFamily="34" charset="-120"/>
               </a:rPr>
               <a:t>―</a:t>
             </a:r>
@@ -6487,11 +6487,11 @@
             <a:avLst/>
           </a:prstGeom>
           <a:solidFill>
-            <a:srgbClr val="0A0A0A"/>
+            <a:srgbClr val="F5F6F8"/>
           </a:solidFill>
           <a:ln w="9525">
             <a:solidFill>
-              <a:srgbClr val="2E2E2E"/>
+              <a:srgbClr val="DDE0E6"/>
             </a:solidFill>
             <a:prstDash val="solid"/>
           </a:ln>
@@ -6524,11 +6524,11 @@
             <a:r>
               <a:rPr lang="en-US" sz="1350" b="1" dirty="0">
                 <a:solidFill>
-                  <a:srgbClr val="F5F5F0"/>
-                </a:solidFill>
-                <a:latin typeface="Arial" pitchFamily="34" charset="0"/>
-                <a:ea typeface="Arial" pitchFamily="34" charset="-122"/>
-                <a:cs typeface="Arial" pitchFamily="34" charset="-120"/>
+                  <a:srgbClr val="16181D"/>
+                </a:solidFill>
+                <a:latin typeface="Arial" pitchFamily="34" charset="0"/>
+                <a:ea typeface="BIZ UDPGothic" pitchFamily="34" charset="-122"/>
+                <a:cs typeface="BIZ UDPGothic" pitchFamily="34" charset="-120"/>
               </a:rPr>
               <a:t>20%（5pt優遇）</a:t>
             </a:r>
@@ -6551,11 +6551,11 @@
             <a:avLst/>
           </a:prstGeom>
           <a:solidFill>
-            <a:srgbClr val="2A1414"/>
+            <a:srgbClr val="FCEBEB"/>
           </a:solidFill>
           <a:ln w="9525">
             <a:solidFill>
-              <a:srgbClr val="2E2E2E"/>
+              <a:srgbClr val="DDE0E6"/>
             </a:solidFill>
             <a:prstDash val="solid"/>
           </a:ln>
@@ -6588,11 +6588,11 @@
             <a:r>
               <a:rPr lang="en-US" sz="1350" dirty="0">
                 <a:solidFill>
-                  <a:srgbClr val="CCCCCC"/>
-                </a:solidFill>
-                <a:latin typeface="Arial" pitchFamily="34" charset="0"/>
-                <a:ea typeface="Arial" pitchFamily="34" charset="-122"/>
-                <a:cs typeface="Arial" pitchFamily="34" charset="-120"/>
+                  <a:srgbClr val="2B2F36"/>
+                </a:solidFill>
+                <a:latin typeface="Arial" pitchFamily="34" charset="0"/>
+                <a:ea typeface="BIZ UDPGothic" pitchFamily="34" charset="-122"/>
+                <a:cs typeface="BIZ UDPGothic" pitchFamily="34" charset="-120"/>
               </a:rPr>
               <a:t>条件達成企業（拡大）</a:t>
             </a:r>
@@ -6615,11 +6615,11 @@
             <a:avLst/>
           </a:prstGeom>
           <a:solidFill>
-            <a:srgbClr val="2A1414"/>
+            <a:srgbClr val="FCEBEB"/>
           </a:solidFill>
           <a:ln w="9525">
             <a:solidFill>
-              <a:srgbClr val="2E2E2E"/>
+              <a:srgbClr val="DDE0E6"/>
             </a:solidFill>
             <a:prstDash val="solid"/>
           </a:ln>
@@ -6652,11 +6652,11 @@
             <a:r>
               <a:rPr lang="en-US" sz="1350" dirty="0">
                 <a:solidFill>
-                  <a:srgbClr val="CCCCCC"/>
-                </a:solidFill>
-                <a:latin typeface="Arial" pitchFamily="34" charset="0"/>
-                <a:ea typeface="Arial" pitchFamily="34" charset="-122"/>
-                <a:cs typeface="Arial" pitchFamily="34" charset="-120"/>
+                  <a:srgbClr val="2B2F36"/>
+                </a:solidFill>
+                <a:latin typeface="Arial" pitchFamily="34" charset="0"/>
+                <a:ea typeface="BIZ UDPGothic" pitchFamily="34" charset="-122"/>
+                <a:cs typeface="BIZ UDPGothic" pitchFamily="34" charset="-120"/>
               </a:rPr>
               <a:t>―</a:t>
             </a:r>
@@ -6679,11 +6679,11 @@
             <a:avLst/>
           </a:prstGeom>
           <a:solidFill>
-            <a:srgbClr val="2A1414"/>
+            <a:srgbClr val="FCEBEB"/>
           </a:solidFill>
           <a:ln w="9525">
             <a:solidFill>
-              <a:srgbClr val="2E2E2E"/>
+              <a:srgbClr val="DDE0E6"/>
             </a:solidFill>
             <a:prstDash val="solid"/>
           </a:ln>
@@ -6716,11 +6716,11 @@
             <a:r>
               <a:rPr lang="en-US" sz="1350" b="1" dirty="0">
                 <a:solidFill>
-                  <a:srgbClr val="D62828"/>
-                </a:solidFill>
-                <a:latin typeface="Arial" pitchFamily="34" charset="0"/>
-                <a:ea typeface="Arial" pitchFamily="34" charset="-122"/>
-                <a:cs typeface="Arial" pitchFamily="34" charset="-120"/>
+                  <a:srgbClr val="C8161D"/>
+                </a:solidFill>
+                <a:latin typeface="Arial" pitchFamily="34" charset="0"/>
+                <a:ea typeface="BIZ UDPGothic" pitchFamily="34" charset="-122"/>
+                <a:cs typeface="BIZ UDPGothic" pitchFamily="34" charset="-120"/>
               </a:rPr>
               <a:t>15%（10pt優遇）</a:t>
             </a:r>
@@ -6743,11 +6743,11 @@
             <a:avLst/>
           </a:prstGeom>
           <a:solidFill>
-            <a:srgbClr val="0A0A0A"/>
+            <a:srgbClr val="F5F6F8"/>
           </a:solidFill>
           <a:ln w="9525">
             <a:solidFill>
-              <a:srgbClr val="2E2E2E"/>
+              <a:srgbClr val="DDE0E6"/>
             </a:solidFill>
             <a:prstDash val="solid"/>
           </a:ln>
@@ -6780,11 +6780,11 @@
             <a:r>
               <a:rPr lang="en-US" sz="1350" dirty="0">
                 <a:solidFill>
-                  <a:srgbClr val="CCCCCC"/>
-                </a:solidFill>
-                <a:latin typeface="Arial" pitchFamily="34" charset="0"/>
-                <a:ea typeface="Arial" pitchFamily="34" charset="-122"/>
-                <a:cs typeface="Arial" pitchFamily="34" charset="-120"/>
+                  <a:srgbClr val="2B2F36"/>
+                </a:solidFill>
+                <a:latin typeface="Arial" pitchFamily="34" charset="0"/>
+                <a:ea typeface="BIZ UDPGothic" pitchFamily="34" charset="-122"/>
+                <a:cs typeface="BIZ UDPGothic" pitchFamily="34" charset="-120"/>
               </a:rPr>
               <a:t>条件未達成企業</a:t>
             </a:r>
@@ -6807,11 +6807,11 @@
             <a:avLst/>
           </a:prstGeom>
           <a:solidFill>
-            <a:srgbClr val="0A0A0A"/>
+            <a:srgbClr val="F5F6F8"/>
           </a:solidFill>
           <a:ln w="9525">
             <a:solidFill>
-              <a:srgbClr val="2E2E2E"/>
+              <a:srgbClr val="DDE0E6"/>
             </a:solidFill>
             <a:prstDash val="solid"/>
           </a:ln>
@@ -6844,11 +6844,11 @@
             <a:r>
               <a:rPr lang="en-US" sz="1350" dirty="0">
                 <a:solidFill>
-                  <a:srgbClr val="CCCCCC"/>
-                </a:solidFill>
-                <a:latin typeface="Arial" pitchFamily="34" charset="0"/>
-                <a:ea typeface="Arial" pitchFamily="34" charset="-122"/>
-                <a:cs typeface="Arial" pitchFamily="34" charset="-120"/>
+                  <a:srgbClr val="2B2F36"/>
+                </a:solidFill>
+                <a:latin typeface="Arial" pitchFamily="34" charset="0"/>
+                <a:ea typeface="BIZ UDPGothic" pitchFamily="34" charset="-122"/>
+                <a:cs typeface="BIZ UDPGothic" pitchFamily="34" charset="-120"/>
               </a:rPr>
               <a:t>―</a:t>
             </a:r>
@@ -6871,11 +6871,11 @@
             <a:avLst/>
           </a:prstGeom>
           <a:solidFill>
-            <a:srgbClr val="0A0A0A"/>
+            <a:srgbClr val="F5F6F8"/>
           </a:solidFill>
           <a:ln w="9525">
             <a:solidFill>
-              <a:srgbClr val="2E2E2E"/>
+              <a:srgbClr val="DDE0E6"/>
             </a:solidFill>
             <a:prstDash val="solid"/>
           </a:ln>
@@ -6908,11 +6908,11 @@
             <a:r>
               <a:rPr lang="en-US" sz="1350" b="1" dirty="0">
                 <a:solidFill>
-                  <a:srgbClr val="F5F5F0"/>
-                </a:solidFill>
-                <a:latin typeface="Arial" pitchFamily="34" charset="0"/>
-                <a:ea typeface="Arial" pitchFamily="34" charset="-122"/>
-                <a:cs typeface="Arial" pitchFamily="34" charset="-120"/>
+                  <a:srgbClr val="16181D"/>
+                </a:solidFill>
+                <a:latin typeface="Arial" pitchFamily="34" charset="0"/>
+                <a:ea typeface="BIZ UDPGothic" pitchFamily="34" charset="-122"/>
+                <a:cs typeface="BIZ UDPGothic" pitchFamily="34" charset="-120"/>
               </a:rPr>
               <a:t>25%（優遇なし）</a:t>
             </a:r>
@@ -6947,11 +6947,11 @@
             <a:r>
               <a:rPr lang="en-US" sz="1250" i="1" dirty="0">
                 <a:solidFill>
-                  <a:srgbClr val="D62828"/>
-                </a:solidFill>
-                <a:latin typeface="Arial" pitchFamily="34" charset="0"/>
-                <a:ea typeface="Arial" pitchFamily="34" charset="-122"/>
-                <a:cs typeface="Arial" pitchFamily="34" charset="-120"/>
+                  <a:srgbClr val="C8161D"/>
+                </a:solidFill>
+                <a:latin typeface="Arial" pitchFamily="34" charset="0"/>
+                <a:ea typeface="BIZ UDPGothic" pitchFamily="34" charset="-122"/>
+                <a:cs typeface="BIZ UDPGothic" pitchFamily="34" charset="-120"/>
               </a:rPr>
               <a:t>「拡大条件」を達成した会社は、税率がほぼ半分（30%→15%）まで下がります。</a:t>
             </a:r>
@@ -6973,7 +6973,7 @@
     <p:bg>
       <p:bgPr>
         <a:solidFill>
-          <a:srgbClr val="0A0A0A"/>
+          <a:srgbClr val="F5F6F8"/>
         </a:solidFill>
       </p:bgPr>
     </p:bg>
@@ -7018,11 +7018,11 @@
             <a:r>
               <a:rPr lang="en-US" sz="1200" b="1" spc="300" kern="0" dirty="0">
                 <a:solidFill>
-                  <a:srgbClr val="D62828"/>
-                </a:solidFill>
-                <a:latin typeface="Arial" pitchFamily="34" charset="0"/>
-                <a:ea typeface="Arial" pitchFamily="34" charset="-122"/>
-                <a:cs typeface="Arial" pitchFamily="34" charset="-120"/>
+                  <a:srgbClr val="C8161D"/>
+                </a:solidFill>
+                <a:latin typeface="Arial" pitchFamily="34" charset="0"/>
+                <a:ea typeface="BIZ UDPGothic" pitchFamily="34" charset="-122"/>
+                <a:cs typeface="BIZ UDPGothic" pitchFamily="34" charset="-120"/>
               </a:rPr>
               <a:t>3. 補助金の見直し</a:t>
             </a:r>
@@ -7057,11 +7057,11 @@
             <a:r>
               <a:rPr lang="en-US" sz="3200" b="1" dirty="0">
                 <a:solidFill>
-                  <a:srgbClr val="F5F5F0"/>
-                </a:solidFill>
-                <a:latin typeface="Arial" pitchFamily="34" charset="0"/>
-                <a:ea typeface="Arial" pitchFamily="34" charset="-122"/>
-                <a:cs typeface="Arial" pitchFamily="34" charset="-120"/>
+                  <a:srgbClr val="16181D"/>
+                </a:solidFill>
+                <a:latin typeface="Arial" pitchFamily="34" charset="0"/>
+                <a:ea typeface="BIZ UDPGothic" pitchFamily="34" charset="-122"/>
+                <a:cs typeface="BIZ UDPGothic" pitchFamily="34" charset="-120"/>
               </a:rPr>
               <a:t>補助金は「赤字の穴埋め」ではなく「次の一手」へ</a:t>
             </a:r>
@@ -7096,11 +7096,11 @@
             <a:r>
               <a:rPr lang="en-US" sz="1000" dirty="0">
                 <a:solidFill>
-                  <a:srgbClr val="CCCCCC"/>
-                </a:solidFill>
-                <a:latin typeface="Arial" pitchFamily="34" charset="0"/>
-                <a:ea typeface="Arial" pitchFamily="34" charset="-122"/>
-                <a:cs typeface="Arial" pitchFamily="34" charset="-120"/>
+                  <a:srgbClr val="2B2F36"/>
+                </a:solidFill>
+                <a:latin typeface="Arial" pitchFamily="34" charset="0"/>
+                <a:ea typeface="BIZ UDPGothic" pitchFamily="34" charset="-122"/>
+                <a:cs typeface="BIZ UDPGothic" pitchFamily="34" charset="-120"/>
               </a:rPr>
               <a:t>15</a:t>
             </a:r>
@@ -7135,11 +7135,11 @@
             <a:r>
               <a:rPr lang="en-US" sz="900" dirty="0">
                 <a:solidFill>
-                  <a:srgbClr val="555555"/>
-                </a:solidFill>
-                <a:latin typeface="Arial" pitchFamily="34" charset="0"/>
-                <a:ea typeface="Arial" pitchFamily="34" charset="-122"/>
-                <a:cs typeface="Arial" pitchFamily="34" charset="-120"/>
+                  <a:srgbClr val="9AA0AA"/>
+                </a:solidFill>
+                <a:latin typeface="Arial" pitchFamily="34" charset="0"/>
+                <a:ea typeface="BIZ UDPGothic" pitchFamily="34" charset="-122"/>
+                <a:cs typeface="BIZ UDPGothic" pitchFamily="34" charset="-120"/>
               </a:rPr>
               <a:t>REBOOT JAPAN ── 提言003</a:t>
             </a:r>
@@ -7177,11 +7177,11 @@
             <a:r>
               <a:rPr lang="en-US" sz="1400" dirty="0">
                 <a:solidFill>
-                  <a:srgbClr val="CCCCCC"/>
-                </a:solidFill>
-                <a:latin typeface="Arial" pitchFamily="34" charset="0"/>
-                <a:ea typeface="Arial" pitchFamily="34" charset="-122"/>
-                <a:cs typeface="Arial" pitchFamily="34" charset="-120"/>
+                  <a:srgbClr val="2B2F36"/>
+                </a:solidFill>
+                <a:latin typeface="Arial" pitchFamily="34" charset="0"/>
+                <a:ea typeface="BIZ UDPGothic" pitchFamily="34" charset="-122"/>
+                <a:cs typeface="BIZ UDPGothic" pitchFamily="34" charset="-120"/>
               </a:rPr>
               <a:t>年間1〜2兆円規模の中小企業向け補助金を、根本から見直します。赤字の会社への補助金は、原則やめます。</a:t>
             </a:r>
@@ -7206,11 +7206,11 @@
             </a:avLst>
           </a:prstGeom>
           <a:solidFill>
-            <a:srgbClr val="1A1A1A"/>
+            <a:srgbClr val="FFFFFF"/>
           </a:solidFill>
           <a:ln w="12700">
             <a:solidFill>
-              <a:srgbClr val="2E2E2E"/>
+              <a:srgbClr val="DDE0E6"/>
             </a:solidFill>
             <a:prstDash val="solid"/>
           </a:ln>
@@ -7267,11 +7267,11 @@
             <a:r>
               <a:rPr lang="en-US" sz="1600" b="1" dirty="0">
                 <a:solidFill>
-                  <a:srgbClr val="F5F5F0"/>
-                </a:solidFill>
-                <a:latin typeface="Arial" pitchFamily="34" charset="0"/>
-                <a:ea typeface="Arial" pitchFamily="34" charset="-122"/>
-                <a:cs typeface="Arial" pitchFamily="34" charset="-120"/>
+                  <a:srgbClr val="16181D"/>
+                </a:solidFill>
+                <a:latin typeface="Arial" pitchFamily="34" charset="0"/>
+                <a:ea typeface="BIZ UDPGothic" pitchFamily="34" charset="-122"/>
+                <a:cs typeface="BIZ UDPGothic" pitchFamily="34" charset="-120"/>
               </a:rPr>
               <a:t>やめるもの</a:t>
             </a:r>
@@ -7310,11 +7310,11 @@
             <a:r>
               <a:rPr lang="en-US" sz="1300" dirty="0">
                 <a:solidFill>
-                  <a:srgbClr val="CCCCCC"/>
-                </a:solidFill>
-                <a:latin typeface="Arial" pitchFamily="34" charset="0"/>
-                <a:ea typeface="Arial" pitchFamily="34" charset="-122"/>
-                <a:cs typeface="Arial" pitchFamily="34" charset="-120"/>
+                  <a:srgbClr val="2B2F36"/>
+                </a:solidFill>
+                <a:latin typeface="Arial" pitchFamily="34" charset="0"/>
+                <a:ea typeface="BIZ UDPGothic" pitchFamily="34" charset="-122"/>
+                <a:cs typeface="BIZ UDPGothic" pitchFamily="34" charset="-120"/>
               </a:rPr>
               <a:t>小規模事業者持続化補助金</a:t>
             </a:r>
@@ -7331,11 +7331,11 @@
             <a:r>
               <a:rPr lang="en-US" sz="1300" dirty="0">
                 <a:solidFill>
-                  <a:srgbClr val="CCCCCC"/>
-                </a:solidFill>
-                <a:latin typeface="Arial" pitchFamily="34" charset="0"/>
-                <a:ea typeface="Arial" pitchFamily="34" charset="-122"/>
-                <a:cs typeface="Arial" pitchFamily="34" charset="-120"/>
+                  <a:srgbClr val="2B2F36"/>
+                </a:solidFill>
+                <a:latin typeface="Arial" pitchFamily="34" charset="0"/>
+                <a:ea typeface="BIZ UDPGothic" pitchFamily="34" charset="-122"/>
+                <a:cs typeface="BIZ UDPGothic" pitchFamily="34" charset="-120"/>
               </a:rPr>
               <a:t>事業再構築補助金（今のやり方）</a:t>
             </a:r>
@@ -7352,11 +7352,11 @@
             <a:r>
               <a:rPr lang="en-US" sz="1300" dirty="0">
                 <a:solidFill>
-                  <a:srgbClr val="CCCCCC"/>
-                </a:solidFill>
-                <a:latin typeface="Arial" pitchFamily="34" charset="0"/>
-                <a:ea typeface="Arial" pitchFamily="34" charset="-122"/>
-                <a:cs typeface="Arial" pitchFamily="34" charset="-120"/>
+                  <a:srgbClr val="2B2F36"/>
+                </a:solidFill>
+                <a:latin typeface="Arial" pitchFamily="34" charset="0"/>
+                <a:ea typeface="BIZ UDPGothic" pitchFamily="34" charset="-122"/>
+                <a:cs typeface="BIZ UDPGothic" pitchFamily="34" charset="-120"/>
               </a:rPr>
               <a:t>成長と結びついていない補助金全般</a:t>
             </a:r>
@@ -7381,11 +7381,11 @@
             </a:avLst>
           </a:prstGeom>
           <a:solidFill>
-            <a:srgbClr val="1A1A1A"/>
+            <a:srgbClr val="FFFFFF"/>
           </a:solidFill>
           <a:ln w="19050">
             <a:solidFill>
-              <a:srgbClr val="D62828"/>
+              <a:srgbClr val="C8161D"/>
             </a:solidFill>
             <a:prstDash val="solid"/>
           </a:ln>
@@ -7442,11 +7442,11 @@
             <a:r>
               <a:rPr lang="en-US" sz="1600" b="1" dirty="0">
                 <a:solidFill>
-                  <a:srgbClr val="F5F5F0"/>
-                </a:solidFill>
-                <a:latin typeface="Arial" pitchFamily="34" charset="0"/>
-                <a:ea typeface="Arial" pitchFamily="34" charset="-122"/>
-                <a:cs typeface="Arial" pitchFamily="34" charset="-120"/>
+                  <a:srgbClr val="16181D"/>
+                </a:solidFill>
+                <a:latin typeface="Arial" pitchFamily="34" charset="0"/>
+                <a:ea typeface="BIZ UDPGothic" pitchFamily="34" charset="-122"/>
+                <a:cs typeface="BIZ UDPGothic" pitchFamily="34" charset="-120"/>
               </a:rPr>
               <a:t>続ける・拡充するもの</a:t>
             </a:r>
@@ -7485,11 +7485,11 @@
             <a:r>
               <a:rPr lang="en-US" sz="1300" dirty="0">
                 <a:solidFill>
-                  <a:srgbClr val="CCCCCC"/>
-                </a:solidFill>
-                <a:latin typeface="Arial" pitchFamily="34" charset="0"/>
-                <a:ea typeface="Arial" pitchFamily="34" charset="-122"/>
-                <a:cs typeface="Arial" pitchFamily="34" charset="-120"/>
+                  <a:srgbClr val="2B2F36"/>
+                </a:solidFill>
+                <a:latin typeface="Arial" pitchFamily="34" charset="0"/>
+                <a:ea typeface="BIZ UDPGothic" pitchFamily="34" charset="-122"/>
+                <a:cs typeface="BIZ UDPGothic" pitchFamily="34" charset="-120"/>
               </a:rPr>
               <a:t>会社同士の合併（M&amp;A）の支援</a:t>
             </a:r>
@@ -7506,11 +7506,11 @@
             <a:r>
               <a:rPr lang="en-US" sz="1300" dirty="0">
                 <a:solidFill>
-                  <a:srgbClr val="CCCCCC"/>
-                </a:solidFill>
-                <a:latin typeface="Arial" pitchFamily="34" charset="0"/>
-                <a:ea typeface="Arial" pitchFamily="34" charset="-122"/>
-                <a:cs typeface="Arial" pitchFamily="34" charset="-120"/>
+                  <a:srgbClr val="2B2F36"/>
+                </a:solidFill>
+                <a:latin typeface="Arial" pitchFamily="34" charset="0"/>
+                <a:ea typeface="BIZ UDPGothic" pitchFamily="34" charset="-122"/>
+                <a:cs typeface="BIZ UDPGothic" pitchFamily="34" charset="-120"/>
               </a:rPr>
               <a:t>雇用を増やすための設備投資</a:t>
             </a:r>
@@ -7527,11 +7527,11 @@
             <a:r>
               <a:rPr lang="en-US" sz="1300" dirty="0">
                 <a:solidFill>
-                  <a:srgbClr val="CCCCCC"/>
-                </a:solidFill>
-                <a:latin typeface="Arial" pitchFamily="34" charset="0"/>
-                <a:ea typeface="Arial" pitchFamily="34" charset="-122"/>
-                <a:cs typeface="Arial" pitchFamily="34" charset="-120"/>
+                  <a:srgbClr val="2B2F36"/>
+                </a:solidFill>
+                <a:latin typeface="Arial" pitchFamily="34" charset="0"/>
+                <a:ea typeface="BIZ UDPGothic" pitchFamily="34" charset="-122"/>
+                <a:cs typeface="BIZ UDPGothic" pitchFamily="34" charset="-120"/>
               </a:rPr>
               <a:t>学び直し（リスキリング）支援（提言001と連動）</a:t>
             </a:r>
@@ -7553,7 +7553,7 @@
     <p:bg>
       <p:bgPr>
         <a:solidFill>
-          <a:srgbClr val="0A0A0A"/>
+          <a:srgbClr val="F5F6F8"/>
         </a:solidFill>
       </p:bgPr>
     </p:bg>
@@ -7598,11 +7598,11 @@
             <a:r>
               <a:rPr lang="en-US" sz="1200" b="1" spc="300" kern="0" dirty="0">
                 <a:solidFill>
-                  <a:srgbClr val="D62828"/>
-                </a:solidFill>
-                <a:latin typeface="Arial" pitchFamily="34" charset="0"/>
-                <a:ea typeface="Arial" pitchFamily="34" charset="-122"/>
-                <a:cs typeface="Arial" pitchFamily="34" charset="-120"/>
+                  <a:srgbClr val="C8161D"/>
+                </a:solidFill>
+                <a:latin typeface="Arial" pitchFamily="34" charset="0"/>
+                <a:ea typeface="BIZ UDPGothic" pitchFamily="34" charset="-122"/>
+                <a:cs typeface="BIZ UDPGothic" pitchFamily="34" charset="-120"/>
               </a:rPr>
               <a:t>4. 施策パッケージ</a:t>
             </a:r>
@@ -7637,11 +7637,11 @@
             <a:r>
               <a:rPr lang="en-US" sz="3200" b="1" dirty="0">
                 <a:solidFill>
-                  <a:srgbClr val="F5F5F0"/>
-                </a:solidFill>
-                <a:latin typeface="Arial" pitchFamily="34" charset="0"/>
-                <a:ea typeface="Arial" pitchFamily="34" charset="-122"/>
-                <a:cs typeface="Arial" pitchFamily="34" charset="-120"/>
+                  <a:srgbClr val="16181D"/>
+                </a:solidFill>
+                <a:latin typeface="Arial" pitchFamily="34" charset="0"/>
+                <a:ea typeface="BIZ UDPGothic" pitchFamily="34" charset="-122"/>
+                <a:cs typeface="BIZ UDPGothic" pitchFamily="34" charset="-120"/>
               </a:rPr>
               <a:t>変化を起こす「3つの柱」</a:t>
             </a:r>
@@ -7676,11 +7676,11 @@
             <a:r>
               <a:rPr lang="en-US" sz="1000" dirty="0">
                 <a:solidFill>
-                  <a:srgbClr val="CCCCCC"/>
-                </a:solidFill>
-                <a:latin typeface="Arial" pitchFamily="34" charset="0"/>
-                <a:ea typeface="Arial" pitchFamily="34" charset="-122"/>
-                <a:cs typeface="Arial" pitchFamily="34" charset="-120"/>
+                  <a:srgbClr val="2B2F36"/>
+                </a:solidFill>
+                <a:latin typeface="Arial" pitchFamily="34" charset="0"/>
+                <a:ea typeface="BIZ UDPGothic" pitchFamily="34" charset="-122"/>
+                <a:cs typeface="BIZ UDPGothic" pitchFamily="34" charset="-120"/>
               </a:rPr>
               <a:t>16</a:t>
             </a:r>
@@ -7715,11 +7715,11 @@
             <a:r>
               <a:rPr lang="en-US" sz="900" dirty="0">
                 <a:solidFill>
-                  <a:srgbClr val="555555"/>
-                </a:solidFill>
-                <a:latin typeface="Arial" pitchFamily="34" charset="0"/>
-                <a:ea typeface="Arial" pitchFamily="34" charset="-122"/>
-                <a:cs typeface="Arial" pitchFamily="34" charset="-120"/>
+                  <a:srgbClr val="9AA0AA"/>
+                </a:solidFill>
+                <a:latin typeface="Arial" pitchFamily="34" charset="0"/>
+                <a:ea typeface="BIZ UDPGothic" pitchFamily="34" charset="-122"/>
+                <a:cs typeface="BIZ UDPGothic" pitchFamily="34" charset="-120"/>
               </a:rPr>
               <a:t>REBOOT JAPAN ── 提言003</a:t>
             </a:r>
@@ -7744,11 +7744,11 @@
             </a:avLst>
           </a:prstGeom>
           <a:solidFill>
-            <a:srgbClr val="1A1A1A"/>
+            <a:srgbClr val="FFFFFF"/>
           </a:solidFill>
           <a:ln w="12700">
             <a:solidFill>
-              <a:srgbClr val="2E2E2E"/>
+              <a:srgbClr val="DDE0E6"/>
             </a:solidFill>
             <a:prstDash val="solid"/>
           </a:ln>
@@ -7781,11 +7781,11 @@
             <a:r>
               <a:rPr lang="en-US" sz="2200" b="1" dirty="0">
                 <a:solidFill>
-                  <a:srgbClr val="D62828"/>
-                </a:solidFill>
-                <a:latin typeface="Arial" pitchFamily="34" charset="0"/>
-                <a:ea typeface="Arial" pitchFamily="34" charset="-122"/>
-                <a:cs typeface="Arial" pitchFamily="34" charset="-120"/>
+                  <a:srgbClr val="C8161D"/>
+                </a:solidFill>
+                <a:latin typeface="Arial" pitchFamily="34" charset="0"/>
+                <a:ea typeface="BIZ UDPGothic" pitchFamily="34" charset="-122"/>
+                <a:cs typeface="BIZ UDPGothic" pitchFamily="34" charset="-120"/>
               </a:rPr>
               <a:t>柱①</a:t>
             </a:r>
@@ -7823,11 +7823,11 @@
             <a:r>
               <a:rPr lang="en-US" sz="1600" b="1" dirty="0">
                 <a:solidFill>
-                  <a:srgbClr val="F5F5F0"/>
-                </a:solidFill>
-                <a:latin typeface="Arial" pitchFamily="34" charset="0"/>
-                <a:ea typeface="Arial" pitchFamily="34" charset="-122"/>
-                <a:cs typeface="Arial" pitchFamily="34" charset="-120"/>
+                  <a:srgbClr val="16181D"/>
+                </a:solidFill>
+                <a:latin typeface="Arial" pitchFamily="34" charset="0"/>
+                <a:ea typeface="BIZ UDPGothic" pitchFamily="34" charset="-122"/>
+                <a:cs typeface="BIZ UDPGothic" pitchFamily="34" charset="-120"/>
               </a:rPr>
               <a:t>二段階の成長判定システム</a:t>
             </a:r>
@@ -7865,11 +7865,11 @@
             <a:r>
               <a:rPr lang="en-US" sz="1250" dirty="0">
                 <a:solidFill>
-                  <a:srgbClr val="CCCCCC"/>
-                </a:solidFill>
-                <a:latin typeface="Arial" pitchFamily="34" charset="0"/>
-                <a:ea typeface="Arial" pitchFamily="34" charset="-122"/>
-                <a:cs typeface="Arial" pitchFamily="34" charset="-120"/>
+                  <a:srgbClr val="2B2F36"/>
+                </a:solidFill>
+                <a:latin typeface="Arial" pitchFamily="34" charset="0"/>
+                <a:ea typeface="BIZ UDPGothic" pitchFamily="34" charset="-122"/>
+                <a:cs typeface="BIZ UDPGothic" pitchFamily="34" charset="-120"/>
               </a:rPr>
               <a:t>賃金と雇用を増やした会社だけ税金が安くなる、ずっと続く制度</a:t>
             </a:r>
@@ -7894,11 +7894,11 @@
             </a:avLst>
           </a:prstGeom>
           <a:solidFill>
-            <a:srgbClr val="1A1A1A"/>
+            <a:srgbClr val="FFFFFF"/>
           </a:solidFill>
           <a:ln w="12700">
             <a:solidFill>
-              <a:srgbClr val="2E2E2E"/>
+              <a:srgbClr val="DDE0E6"/>
             </a:solidFill>
             <a:prstDash val="solid"/>
           </a:ln>
@@ -7931,11 +7931,11 @@
             <a:r>
               <a:rPr lang="en-US" sz="2200" b="1" dirty="0">
                 <a:solidFill>
-                  <a:srgbClr val="D62828"/>
-                </a:solidFill>
-                <a:latin typeface="Arial" pitchFamily="34" charset="0"/>
-                <a:ea typeface="Arial" pitchFamily="34" charset="-122"/>
-                <a:cs typeface="Arial" pitchFamily="34" charset="-120"/>
+                  <a:srgbClr val="C8161D"/>
+                </a:solidFill>
+                <a:latin typeface="Arial" pitchFamily="34" charset="0"/>
+                <a:ea typeface="BIZ UDPGothic" pitchFamily="34" charset="-122"/>
+                <a:cs typeface="BIZ UDPGothic" pitchFamily="34" charset="-120"/>
               </a:rPr>
               <a:t>柱②</a:t>
             </a:r>
@@ -7973,11 +7973,11 @@
             <a:r>
               <a:rPr lang="en-US" sz="1600" b="1" dirty="0">
                 <a:solidFill>
-                  <a:srgbClr val="F5F5F0"/>
-                </a:solidFill>
-                <a:latin typeface="Arial" pitchFamily="34" charset="0"/>
-                <a:ea typeface="Arial" pitchFamily="34" charset="-122"/>
-                <a:cs typeface="Arial" pitchFamily="34" charset="-120"/>
+                  <a:srgbClr val="16181D"/>
+                </a:solidFill>
+                <a:latin typeface="Arial" pitchFamily="34" charset="0"/>
+                <a:ea typeface="BIZ UDPGothic" pitchFamily="34" charset="-122"/>
+                <a:cs typeface="BIZ UDPGothic" pitchFamily="34" charset="-120"/>
               </a:rPr>
               <a:t>M&amp;A（合併）の完全無税化</a:t>
             </a:r>
@@ -8015,11 +8015,11 @@
             <a:r>
               <a:rPr lang="en-US" sz="1250" dirty="0">
                 <a:solidFill>
-                  <a:srgbClr val="CCCCCC"/>
-                </a:solidFill>
-                <a:latin typeface="Arial" pitchFamily="34" charset="0"/>
-                <a:ea typeface="Arial" pitchFamily="34" charset="-122"/>
-                <a:cs typeface="Arial" pitchFamily="34" charset="-120"/>
+                  <a:srgbClr val="2B2F36"/>
+                </a:solidFill>
+                <a:latin typeface="Arial" pitchFamily="34" charset="0"/>
+                <a:ea typeface="BIZ UDPGothic" pitchFamily="34" charset="-122"/>
+                <a:cs typeface="BIZ UDPGothic" pitchFamily="34" charset="-120"/>
               </a:rPr>
               <a:t>会社同士が合併して強くなることを、税金面で全力支援</a:t>
             </a:r>
@@ -8044,11 +8044,11 @@
             </a:avLst>
           </a:prstGeom>
           <a:solidFill>
-            <a:srgbClr val="1A1A1A"/>
+            <a:srgbClr val="FFFFFF"/>
           </a:solidFill>
           <a:ln w="12700">
             <a:solidFill>
-              <a:srgbClr val="2E2E2E"/>
+              <a:srgbClr val="DDE0E6"/>
             </a:solidFill>
             <a:prstDash val="solid"/>
           </a:ln>
@@ -8081,11 +8081,11 @@
             <a:r>
               <a:rPr lang="en-US" sz="2200" b="1" dirty="0">
                 <a:solidFill>
-                  <a:srgbClr val="D62828"/>
-                </a:solidFill>
-                <a:latin typeface="Arial" pitchFamily="34" charset="0"/>
-                <a:ea typeface="Arial" pitchFamily="34" charset="-122"/>
-                <a:cs typeface="Arial" pitchFamily="34" charset="-120"/>
+                  <a:srgbClr val="C8161D"/>
+                </a:solidFill>
+                <a:latin typeface="Arial" pitchFamily="34" charset="0"/>
+                <a:ea typeface="BIZ UDPGothic" pitchFamily="34" charset="-122"/>
+                <a:cs typeface="BIZ UDPGothic" pitchFamily="34" charset="-120"/>
               </a:rPr>
               <a:t>柱③</a:t>
             </a:r>
@@ -8123,11 +8123,11 @@
             <a:r>
               <a:rPr lang="en-US" sz="1600" b="1" dirty="0">
                 <a:solidFill>
-                  <a:srgbClr val="F5F5F0"/>
-                </a:solidFill>
-                <a:latin typeface="Arial" pitchFamily="34" charset="0"/>
-                <a:ea typeface="Arial" pitchFamily="34" charset="-122"/>
-                <a:cs typeface="Arial" pitchFamily="34" charset="-120"/>
+                  <a:srgbClr val="16181D"/>
+                </a:solidFill>
+                <a:latin typeface="Arial" pitchFamily="34" charset="0"/>
+                <a:ea typeface="BIZ UDPGothic" pitchFamily="34" charset="-122"/>
+                <a:cs typeface="BIZ UDPGothic" pitchFamily="34" charset="-120"/>
               </a:rPr>
               <a:t>BtoB経費のクリーン化</a:t>
             </a:r>
@@ -8165,11 +8165,11 @@
             <a:r>
               <a:rPr lang="en-US" sz="1250" dirty="0">
                 <a:solidFill>
-                  <a:srgbClr val="CCCCCC"/>
-                </a:solidFill>
-                <a:latin typeface="Arial" pitchFamily="34" charset="0"/>
-                <a:ea typeface="Arial" pitchFamily="34" charset="-122"/>
-                <a:cs typeface="Arial" pitchFamily="34" charset="-120"/>
+                  <a:srgbClr val="2B2F36"/>
+                </a:solidFill>
+                <a:latin typeface="Arial" pitchFamily="34" charset="0"/>
+                <a:ea typeface="BIZ UDPGothic" pitchFamily="34" charset="-122"/>
+                <a:cs typeface="BIZ UDPGothic" pitchFamily="34" charset="-120"/>
               </a:rPr>
               <a:t>利益を隠す経費の悪用を取り締まり、発注元にも責任を持たせる</a:t>
             </a:r>
@@ -8191,7 +8191,7 @@
     <p:bg>
       <p:bgPr>
         <a:solidFill>
-          <a:srgbClr val="0A0A0A"/>
+          <a:srgbClr val="F5F6F8"/>
         </a:solidFill>
       </p:bgPr>
     </p:bg>
@@ -8236,11 +8236,11 @@
             <a:r>
               <a:rPr lang="en-US" sz="1200" b="1" spc="300" kern="0" dirty="0">
                 <a:solidFill>
-                  <a:srgbClr val="D62828"/>
-                </a:solidFill>
-                <a:latin typeface="Arial" pitchFamily="34" charset="0"/>
-                <a:ea typeface="Arial" pitchFamily="34" charset="-122"/>
-                <a:cs typeface="Arial" pitchFamily="34" charset="-120"/>
+                  <a:srgbClr val="C8161D"/>
+                </a:solidFill>
+                <a:latin typeface="Arial" pitchFamily="34" charset="0"/>
+                <a:ea typeface="BIZ UDPGothic" pitchFamily="34" charset="-122"/>
+                <a:cs typeface="BIZ UDPGothic" pitchFamily="34" charset="-120"/>
               </a:rPr>
               <a:t>4. 柱① 成長判定システム</a:t>
             </a:r>
@@ -8275,11 +8275,11 @@
             <a:r>
               <a:rPr lang="en-US" sz="3200" b="1" dirty="0">
                 <a:solidFill>
-                  <a:srgbClr val="F5F5F0"/>
-                </a:solidFill>
-                <a:latin typeface="Arial" pitchFamily="34" charset="0"/>
-                <a:ea typeface="Arial" pitchFamily="34" charset="-122"/>
-                <a:cs typeface="Arial" pitchFamily="34" charset="-120"/>
+                  <a:srgbClr val="16181D"/>
+                </a:solidFill>
+                <a:latin typeface="Arial" pitchFamily="34" charset="0"/>
+                <a:ea typeface="BIZ UDPGothic" pitchFamily="34" charset="-122"/>
+                <a:cs typeface="BIZ UDPGothic" pitchFamily="34" charset="-120"/>
               </a:rPr>
               <a:t>何を基準に「成長した」と判定するのか</a:t>
             </a:r>
@@ -8314,11 +8314,11 @@
             <a:r>
               <a:rPr lang="en-US" sz="1000" dirty="0">
                 <a:solidFill>
-                  <a:srgbClr val="CCCCCC"/>
-                </a:solidFill>
-                <a:latin typeface="Arial" pitchFamily="34" charset="0"/>
-                <a:ea typeface="Arial" pitchFamily="34" charset="-122"/>
-                <a:cs typeface="Arial" pitchFamily="34" charset="-120"/>
+                  <a:srgbClr val="2B2F36"/>
+                </a:solidFill>
+                <a:latin typeface="Arial" pitchFamily="34" charset="0"/>
+                <a:ea typeface="BIZ UDPGothic" pitchFamily="34" charset="-122"/>
+                <a:cs typeface="BIZ UDPGothic" pitchFamily="34" charset="-120"/>
               </a:rPr>
               <a:t>17</a:t>
             </a:r>
@@ -8353,11 +8353,11 @@
             <a:r>
               <a:rPr lang="en-US" sz="900" dirty="0">
                 <a:solidFill>
-                  <a:srgbClr val="555555"/>
-                </a:solidFill>
-                <a:latin typeface="Arial" pitchFamily="34" charset="0"/>
-                <a:ea typeface="Arial" pitchFamily="34" charset="-122"/>
-                <a:cs typeface="Arial" pitchFamily="34" charset="-120"/>
+                  <a:srgbClr val="9AA0AA"/>
+                </a:solidFill>
+                <a:latin typeface="Arial" pitchFamily="34" charset="0"/>
+                <a:ea typeface="BIZ UDPGothic" pitchFamily="34" charset="-122"/>
+                <a:cs typeface="BIZ UDPGothic" pitchFamily="34" charset="-120"/>
               </a:rPr>
               <a:t>REBOOT JAPAN ── 提言003</a:t>
             </a:r>
@@ -8382,11 +8382,11 @@
             </a:avLst>
           </a:prstGeom>
           <a:solidFill>
-            <a:srgbClr val="1A1A1A"/>
+            <a:srgbClr val="FFFFFF"/>
           </a:solidFill>
           <a:ln w="12700">
             <a:solidFill>
-              <a:srgbClr val="2E2E2E"/>
+              <a:srgbClr val="DDE0E6"/>
             </a:solidFill>
             <a:prstDash val="solid"/>
           </a:ln>
@@ -8407,11 +8407,11 @@
             <a:avLst/>
           </a:prstGeom>
           <a:solidFill>
-            <a:srgbClr val="0A0A0A"/>
+            <a:srgbClr val="F5F6F8"/>
           </a:solidFill>
           <a:ln w="12700">
             <a:solidFill>
-              <a:srgbClr val="2E2E2E"/>
+              <a:srgbClr val="DDE0E6"/>
             </a:solidFill>
             <a:prstDash val="solid"/>
           </a:ln>
@@ -8468,11 +8468,11 @@
             <a:r>
               <a:rPr lang="en-US" sz="1600" b="1" dirty="0">
                 <a:solidFill>
-                  <a:srgbClr val="F5F5F0"/>
-                </a:solidFill>
-                <a:latin typeface="Arial" pitchFamily="34" charset="0"/>
-                <a:ea typeface="Arial" pitchFamily="34" charset="-122"/>
-                <a:cs typeface="Arial" pitchFamily="34" charset="-120"/>
+                  <a:srgbClr val="16181D"/>
+                </a:solidFill>
+                <a:latin typeface="Arial" pitchFamily="34" charset="0"/>
+                <a:ea typeface="BIZ UDPGothic" pitchFamily="34" charset="-122"/>
+                <a:cs typeface="BIZ UDPGothic" pitchFamily="34" charset="-120"/>
               </a:rPr>
               <a:t>判定の基準：厚生年金被保険者ベースの年間平均在籍数</a:t>
             </a:r>
@@ -8510,11 +8510,11 @@
             <a:r>
               <a:rPr lang="en-US" sz="1250" dirty="0">
                 <a:solidFill>
-                  <a:srgbClr val="CCCCCC"/>
-                </a:solidFill>
-                <a:latin typeface="Arial" pitchFamily="34" charset="0"/>
-                <a:ea typeface="Arial" pitchFamily="34" charset="-122"/>
-                <a:cs typeface="Arial" pitchFamily="34" charset="-120"/>
+                  <a:srgbClr val="2B2F36"/>
+                </a:solidFill>
+                <a:latin typeface="Arial" pitchFamily="34" charset="0"/>
+                <a:ea typeface="BIZ UDPGothic" pitchFamily="34" charset="-122"/>
+                <a:cs typeface="BIZ UDPGothic" pitchFamily="34" charset="-120"/>
               </a:rPr>
               <a:t>つまり「社会保険にきちんと加入している社員が、1年間平均で何人いるか」を基準にします。アルバイトや名前だけの雇用ではなく、実態のある雇用を数えるためです。</a:t>
             </a:r>
@@ -8549,11 +8549,11 @@
             <a:r>
               <a:rPr lang="en-US" sz="1300" dirty="0">
                 <a:solidFill>
-                  <a:srgbClr val="999999"/>
-                </a:solidFill>
-                <a:latin typeface="Arial" pitchFamily="34" charset="0"/>
-                <a:ea typeface="Arial" pitchFamily="34" charset="-122"/>
-                <a:cs typeface="Arial" pitchFamily="34" charset="-120"/>
+                  <a:srgbClr val="4B515C"/>
+                </a:solidFill>
+                <a:latin typeface="Arial" pitchFamily="34" charset="0"/>
+                <a:ea typeface="BIZ UDPGothic" pitchFamily="34" charset="-122"/>
+                <a:cs typeface="BIZ UDPGothic" pitchFamily="34" charset="-120"/>
               </a:rPr>
               <a:t>この基準をもとに、次のスライドで「維持条件」と「拡大条件」の2段階を見ていきます。</a:t>
             </a:r>
@@ -8575,7 +8575,7 @@
     <p:bg>
       <p:bgPr>
         <a:solidFill>
-          <a:srgbClr val="0A0A0A"/>
+          <a:srgbClr val="F5F6F8"/>
         </a:solidFill>
       </p:bgPr>
     </p:bg>
@@ -8620,11 +8620,11 @@
             <a:r>
               <a:rPr lang="en-US" sz="1200" b="1" spc="300" kern="0" dirty="0">
                 <a:solidFill>
-                  <a:srgbClr val="D62828"/>
-                </a:solidFill>
-                <a:latin typeface="Arial" pitchFamily="34" charset="0"/>
-                <a:ea typeface="Arial" pitchFamily="34" charset="-122"/>
-                <a:cs typeface="Arial" pitchFamily="34" charset="-120"/>
+                  <a:srgbClr val="C8161D"/>
+                </a:solidFill>
+                <a:latin typeface="Arial" pitchFamily="34" charset="0"/>
+                <a:ea typeface="BIZ UDPGothic" pitchFamily="34" charset="-122"/>
+                <a:cs typeface="BIZ UDPGothic" pitchFamily="34" charset="-120"/>
               </a:rPr>
               <a:t>4. 柱① 二段階の条件</a:t>
             </a:r>
@@ -8659,11 +8659,11 @@
             <a:r>
               <a:rPr lang="en-US" sz="3200" b="1" dirty="0">
                 <a:solidFill>
-                  <a:srgbClr val="F5F5F0"/>
-                </a:solidFill>
-                <a:latin typeface="Arial" pitchFamily="34" charset="0"/>
-                <a:ea typeface="Arial" pitchFamily="34" charset="-122"/>
-                <a:cs typeface="Arial" pitchFamily="34" charset="-120"/>
+                  <a:srgbClr val="16181D"/>
+                </a:solidFill>
+                <a:latin typeface="Arial" pitchFamily="34" charset="0"/>
+                <a:ea typeface="BIZ UDPGothic" pitchFamily="34" charset="-122"/>
+                <a:cs typeface="BIZ UDPGothic" pitchFamily="34" charset="-120"/>
               </a:rPr>
               <a:t>「維持条件」と「拡大条件」の2段階</a:t>
             </a:r>
@@ -8698,11 +8698,11 @@
             <a:r>
               <a:rPr lang="en-US" sz="1000" dirty="0">
                 <a:solidFill>
-                  <a:srgbClr val="CCCCCC"/>
-                </a:solidFill>
-                <a:latin typeface="Arial" pitchFamily="34" charset="0"/>
-                <a:ea typeface="Arial" pitchFamily="34" charset="-122"/>
-                <a:cs typeface="Arial" pitchFamily="34" charset="-120"/>
+                  <a:srgbClr val="2B2F36"/>
+                </a:solidFill>
+                <a:latin typeface="Arial" pitchFamily="34" charset="0"/>
+                <a:ea typeface="BIZ UDPGothic" pitchFamily="34" charset="-122"/>
+                <a:cs typeface="BIZ UDPGothic" pitchFamily="34" charset="-120"/>
               </a:rPr>
               <a:t>18</a:t>
             </a:r>
@@ -8737,11 +8737,11 @@
             <a:r>
               <a:rPr lang="en-US" sz="900" dirty="0">
                 <a:solidFill>
-                  <a:srgbClr val="555555"/>
-                </a:solidFill>
-                <a:latin typeface="Arial" pitchFamily="34" charset="0"/>
-                <a:ea typeface="Arial" pitchFamily="34" charset="-122"/>
-                <a:cs typeface="Arial" pitchFamily="34" charset="-120"/>
+                  <a:srgbClr val="9AA0AA"/>
+                </a:solidFill>
+                <a:latin typeface="Arial" pitchFamily="34" charset="0"/>
+                <a:ea typeface="BIZ UDPGothic" pitchFamily="34" charset="-122"/>
+                <a:cs typeface="BIZ UDPGothic" pitchFamily="34" charset="-120"/>
               </a:rPr>
               <a:t>REBOOT JAPAN ── 提言003</a:t>
             </a:r>
@@ -8766,11 +8766,11 @@
             </a:avLst>
           </a:prstGeom>
           <a:solidFill>
-            <a:srgbClr val="1A1A1A"/>
+            <a:srgbClr val="FFFFFF"/>
           </a:solidFill>
           <a:ln w="12700">
             <a:solidFill>
-              <a:srgbClr val="2E2E2E"/>
+              <a:srgbClr val="DDE0E6"/>
             </a:solidFill>
             <a:prstDash val="solid"/>
           </a:ln>
@@ -8803,11 +8803,11 @@
             <a:r>
               <a:rPr lang="en-US" sz="1800" b="1" dirty="0">
                 <a:solidFill>
-                  <a:srgbClr val="F5F5F0"/>
-                </a:solidFill>
-                <a:latin typeface="Arial" pitchFamily="34" charset="0"/>
-                <a:ea typeface="Arial" pitchFamily="34" charset="-122"/>
-                <a:cs typeface="Arial" pitchFamily="34" charset="-120"/>
+                  <a:srgbClr val="16181D"/>
+                </a:solidFill>
+                <a:latin typeface="Arial" pitchFamily="34" charset="0"/>
+                <a:ea typeface="BIZ UDPGothic" pitchFamily="34" charset="-122"/>
+                <a:cs typeface="BIZ UDPGothic" pitchFamily="34" charset="-120"/>
               </a:rPr>
               <a:t>維持条件</a:t>
             </a:r>
@@ -8842,11 +8842,11 @@
             <a:r>
               <a:rPr lang="en-US" sz="1200" dirty="0">
                 <a:solidFill>
-                  <a:srgbClr val="999999"/>
-                </a:solidFill>
-                <a:latin typeface="Arial" pitchFamily="34" charset="0"/>
-                <a:ea typeface="Arial" pitchFamily="34" charset="-122"/>
-                <a:cs typeface="Arial" pitchFamily="34" charset="-120"/>
+                  <a:srgbClr val="4B515C"/>
+                </a:solidFill>
+                <a:latin typeface="Arial" pitchFamily="34" charset="0"/>
+                <a:ea typeface="BIZ UDPGothic" pitchFamily="34" charset="-122"/>
+                <a:cs typeface="BIZ UDPGothic" pitchFamily="34" charset="-120"/>
               </a:rPr>
               <a:t>法人税20%（5pt優遇）の最低ライン</a:t>
             </a:r>
@@ -8885,11 +8885,11 @@
             <a:r>
               <a:rPr lang="en-US" sz="1300" dirty="0">
                 <a:solidFill>
-                  <a:srgbClr val="CCCCCC"/>
-                </a:solidFill>
-                <a:latin typeface="Arial" pitchFamily="34" charset="0"/>
-                <a:ea typeface="Arial" pitchFamily="34" charset="-122"/>
-                <a:cs typeface="Arial" pitchFamily="34" charset="-120"/>
+                  <a:srgbClr val="2B2F36"/>
+                </a:solidFill>
+                <a:latin typeface="Arial" pitchFamily="34" charset="0"/>
+                <a:ea typeface="BIZ UDPGothic" pitchFamily="34" charset="-122"/>
+                <a:cs typeface="BIZ UDPGothic" pitchFamily="34" charset="-120"/>
               </a:rPr>
               <a:t>条件A：1人あたり賃金が、インフレ率（物価上昇率）×120%以上増加</a:t>
             </a:r>
@@ -8905,11 +8905,11 @@
             <a:r>
               <a:rPr lang="en-US" sz="1150" dirty="0">
                 <a:solidFill>
-                  <a:srgbClr val="999999"/>
-                </a:solidFill>
-                <a:latin typeface="Arial" pitchFamily="34" charset="0"/>
-                <a:ea typeface="Arial" pitchFamily="34" charset="-122"/>
-                <a:cs typeface="Arial" pitchFamily="34" charset="-120"/>
+                  <a:srgbClr val="4B515C"/>
+                </a:solidFill>
+                <a:latin typeface="Arial" pitchFamily="34" charset="0"/>
+                <a:ea typeface="BIZ UDPGothic" pitchFamily="34" charset="-122"/>
+                <a:cs typeface="BIZ UDPGothic" pitchFamily="34" charset="-120"/>
               </a:rPr>
               <a:t>　例：インフレ3%の年なら、手取りで3.6%以上の賃上げ</a:t>
             </a:r>
@@ -8926,11 +8926,11 @@
             <a:r>
               <a:rPr lang="en-US" sz="1300" dirty="0">
                 <a:solidFill>
-                  <a:srgbClr val="CCCCCC"/>
-                </a:solidFill>
-                <a:latin typeface="Arial" pitchFamily="34" charset="0"/>
-                <a:ea typeface="Arial" pitchFamily="34" charset="-122"/>
-                <a:cs typeface="Arial" pitchFamily="34" charset="-120"/>
+                  <a:srgbClr val="2B2F36"/>
+                </a:solidFill>
+                <a:latin typeface="Arial" pitchFamily="34" charset="0"/>
+                <a:ea typeface="BIZ UDPGothic" pitchFamily="34" charset="-122"/>
+                <a:cs typeface="BIZ UDPGothic" pitchFamily="34" charset="-120"/>
               </a:rPr>
               <a:t>条件B：正社員の数が、前年より減っていないこと</a:t>
             </a:r>
@@ -8955,11 +8955,11 @@
             </a:avLst>
           </a:prstGeom>
           <a:solidFill>
-            <a:srgbClr val="1A1A1A"/>
+            <a:srgbClr val="FFFFFF"/>
           </a:solidFill>
           <a:ln w="19050">
             <a:solidFill>
-              <a:srgbClr val="D62828"/>
+              <a:srgbClr val="C8161D"/>
             </a:solidFill>
             <a:prstDash val="solid"/>
           </a:ln>
@@ -8992,11 +8992,11 @@
             <a:r>
               <a:rPr lang="en-US" sz="1800" b="1" dirty="0">
                 <a:solidFill>
-                  <a:srgbClr val="D62828"/>
-                </a:solidFill>
-                <a:latin typeface="Arial" pitchFamily="34" charset="0"/>
-                <a:ea typeface="Arial" pitchFamily="34" charset="-122"/>
-                <a:cs typeface="Arial" pitchFamily="34" charset="-120"/>
+                  <a:srgbClr val="C8161D"/>
+                </a:solidFill>
+                <a:latin typeface="Arial" pitchFamily="34" charset="0"/>
+                <a:ea typeface="BIZ UDPGothic" pitchFamily="34" charset="-122"/>
+                <a:cs typeface="BIZ UDPGothic" pitchFamily="34" charset="-120"/>
               </a:rPr>
               <a:t>拡大条件</a:t>
             </a:r>
@@ -9031,11 +9031,11 @@
             <a:r>
               <a:rPr lang="en-US" sz="1200" dirty="0">
                 <a:solidFill>
-                  <a:srgbClr val="999999"/>
-                </a:solidFill>
-                <a:latin typeface="Arial" pitchFamily="34" charset="0"/>
-                <a:ea typeface="Arial" pitchFamily="34" charset="-122"/>
-                <a:cs typeface="Arial" pitchFamily="34" charset="-120"/>
+                  <a:srgbClr val="4B515C"/>
+                </a:solidFill>
+                <a:latin typeface="Arial" pitchFamily="34" charset="0"/>
+                <a:ea typeface="BIZ UDPGothic" pitchFamily="34" charset="-122"/>
+                <a:cs typeface="BIZ UDPGothic" pitchFamily="34" charset="-120"/>
               </a:rPr>
               <a:t>法人税15%（10pt優遇）の上位ライン</a:t>
             </a:r>
@@ -9074,11 +9074,11 @@
             <a:r>
               <a:rPr lang="en-US" sz="1300" dirty="0">
                 <a:solidFill>
-                  <a:srgbClr val="CCCCCC"/>
-                </a:solidFill>
-                <a:latin typeface="Arial" pitchFamily="34" charset="0"/>
-                <a:ea typeface="Arial" pitchFamily="34" charset="-122"/>
-                <a:cs typeface="Arial" pitchFamily="34" charset="-120"/>
+                  <a:srgbClr val="2B2F36"/>
+                </a:solidFill>
+                <a:latin typeface="Arial" pitchFamily="34" charset="0"/>
+                <a:ea typeface="BIZ UDPGothic" pitchFamily="34" charset="-122"/>
+                <a:cs typeface="BIZ UDPGothic" pitchFamily="34" charset="-120"/>
               </a:rPr>
               <a:t>条件C：正社員の数が、前年比3%以上増加</a:t>
             </a:r>
@@ -9095,11 +9095,11 @@
             <a:r>
               <a:rPr lang="en-US" sz="1300" dirty="0">
                 <a:solidFill>
-                  <a:srgbClr val="CCCCCC"/>
-                </a:solidFill>
-                <a:latin typeface="Arial" pitchFamily="34" charset="0"/>
-                <a:ea typeface="Arial" pitchFamily="34" charset="-122"/>
-                <a:cs typeface="Arial" pitchFamily="34" charset="-120"/>
+                  <a:srgbClr val="2B2F36"/>
+                </a:solidFill>
+                <a:latin typeface="Arial" pitchFamily="34" charset="0"/>
+                <a:ea typeface="BIZ UDPGothic" pitchFamily="34" charset="-122"/>
+                <a:cs typeface="BIZ UDPGothic" pitchFamily="34" charset="-120"/>
               </a:rPr>
               <a:t>条件D：給料の総額が、前年比5%以上増加</a:t>
             </a:r>
@@ -9121,7 +9121,7 @@
     <p:bg>
       <p:bgPr>
         <a:solidFill>
-          <a:srgbClr val="0A0A0A"/>
+          <a:srgbClr val="F5F6F8"/>
         </a:solidFill>
       </p:bgPr>
     </p:bg>
@@ -9166,11 +9166,11 @@
             <a:r>
               <a:rPr lang="en-US" sz="1200" b="1" spc="300" kern="0" dirty="0">
                 <a:solidFill>
-                  <a:srgbClr val="D62828"/>
-                </a:solidFill>
-                <a:latin typeface="Arial" pitchFamily="34" charset="0"/>
-                <a:ea typeface="Arial" pitchFamily="34" charset="-122"/>
-                <a:cs typeface="Arial" pitchFamily="34" charset="-120"/>
+                  <a:srgbClr val="C8161D"/>
+                </a:solidFill>
+                <a:latin typeface="Arial" pitchFamily="34" charset="0"/>
+                <a:ea typeface="BIZ UDPGothic" pitchFamily="34" charset="-122"/>
+                <a:cs typeface="BIZ UDPGothic" pitchFamily="34" charset="-120"/>
               </a:rPr>
               <a:t>4. 柱① 達成できなかったら</a:t>
             </a:r>
@@ -9205,11 +9205,11 @@
             <a:r>
               <a:rPr lang="en-US" sz="3200" b="1" dirty="0">
                 <a:solidFill>
-                  <a:srgbClr val="F5F5F0"/>
-                </a:solidFill>
-                <a:latin typeface="Arial" pitchFamily="34" charset="0"/>
-                <a:ea typeface="Arial" pitchFamily="34" charset="-122"/>
-                <a:cs typeface="Arial" pitchFamily="34" charset="-120"/>
+                  <a:srgbClr val="16181D"/>
+                </a:solidFill>
+                <a:latin typeface="Arial" pitchFamily="34" charset="0"/>
+                <a:ea typeface="BIZ UDPGothic" pitchFamily="34" charset="-122"/>
+                <a:cs typeface="BIZ UDPGothic" pitchFamily="34" charset="-120"/>
               </a:rPr>
               <a:t>条件を1年でも下回ったら、優遇は即なくなる</a:t>
             </a:r>
@@ -9244,11 +9244,11 @@
             <a:r>
               <a:rPr lang="en-US" sz="1000" dirty="0">
                 <a:solidFill>
-                  <a:srgbClr val="CCCCCC"/>
-                </a:solidFill>
-                <a:latin typeface="Arial" pitchFamily="34" charset="0"/>
-                <a:ea typeface="Arial" pitchFamily="34" charset="-122"/>
-                <a:cs typeface="Arial" pitchFamily="34" charset="-120"/>
+                  <a:srgbClr val="2B2F36"/>
+                </a:solidFill>
+                <a:latin typeface="Arial" pitchFamily="34" charset="0"/>
+                <a:ea typeface="BIZ UDPGothic" pitchFamily="34" charset="-122"/>
+                <a:cs typeface="BIZ UDPGothic" pitchFamily="34" charset="-120"/>
               </a:rPr>
               <a:t>19</a:t>
             </a:r>
@@ -9283,11 +9283,11 @@
             <a:r>
               <a:rPr lang="en-US" sz="900" dirty="0">
                 <a:solidFill>
-                  <a:srgbClr val="555555"/>
-                </a:solidFill>
-                <a:latin typeface="Arial" pitchFamily="34" charset="0"/>
-                <a:ea typeface="Arial" pitchFamily="34" charset="-122"/>
-                <a:cs typeface="Arial" pitchFamily="34" charset="-120"/>
+                  <a:srgbClr val="9AA0AA"/>
+                </a:solidFill>
+                <a:latin typeface="Arial" pitchFamily="34" charset="0"/>
+                <a:ea typeface="BIZ UDPGothic" pitchFamily="34" charset="-122"/>
+                <a:cs typeface="BIZ UDPGothic" pitchFamily="34" charset="-120"/>
               </a:rPr>
               <a:t>REBOOT JAPAN ── 提言003</a:t>
             </a:r>
@@ -9312,11 +9312,11 @@
             </a:avLst>
           </a:prstGeom>
           <a:solidFill>
-            <a:srgbClr val="1A1A1A"/>
+            <a:srgbClr val="FFFFFF"/>
           </a:solidFill>
           <a:ln w="19050">
             <a:solidFill>
-              <a:srgbClr val="D62828"/>
+              <a:srgbClr val="C8161D"/>
             </a:solidFill>
             <a:prstDash val="solid"/>
           </a:ln>
@@ -9373,11 +9373,11 @@
             <a:r>
               <a:rPr lang="en-US" sz="1600" b="1" dirty="0">
                 <a:solidFill>
-                  <a:srgbClr val="F5F5F0"/>
-                </a:solidFill>
-                <a:latin typeface="Arial" pitchFamily="34" charset="0"/>
-                <a:ea typeface="Arial" pitchFamily="34" charset="-122"/>
-                <a:cs typeface="Arial" pitchFamily="34" charset="-120"/>
+                  <a:srgbClr val="16181D"/>
+                </a:solidFill>
+                <a:latin typeface="Arial" pitchFamily="34" charset="0"/>
+                <a:ea typeface="BIZ UDPGothic" pitchFamily="34" charset="-122"/>
+                <a:cs typeface="BIZ UDPGothic" pitchFamily="34" charset="-120"/>
               </a:rPr>
               <a:t>条件を1年でも下回った場合 → 優遇を即時全廃（25%に戻る）</a:t>
             </a:r>
@@ -9412,11 +9412,11 @@
             <a:r>
               <a:rPr lang="en-US" sz="1300" dirty="0">
                 <a:solidFill>
-                  <a:srgbClr val="CCCCCC"/>
-                </a:solidFill>
-                <a:latin typeface="Arial" pitchFamily="34" charset="0"/>
-                <a:ea typeface="Arial" pitchFamily="34" charset="-122"/>
-                <a:cs typeface="Arial" pitchFamily="34" charset="-120"/>
+                  <a:srgbClr val="2B2F36"/>
+                </a:solidFill>
+                <a:latin typeface="Arial" pitchFamily="34" charset="0"/>
+                <a:ea typeface="BIZ UDPGothic" pitchFamily="34" charset="-122"/>
+                <a:cs typeface="BIZ UDPGothic" pitchFamily="34" charset="-120"/>
               </a:rPr>
               <a:t>翌年以降に条件を再達成すれば、優遇は再び適用されます。</a:t>
             </a:r>
@@ -9475,11 +9475,11 @@
             <a:r>
               <a:rPr lang="en-US" sz="1500" b="1" dirty="0">
                 <a:solidFill>
-                  <a:srgbClr val="D62828"/>
-                </a:solidFill>
-                <a:latin typeface="Arial" pitchFamily="34" charset="0"/>
-                <a:ea typeface="Arial" pitchFamily="34" charset="-122"/>
-                <a:cs typeface="Arial" pitchFamily="34" charset="-120"/>
+                  <a:srgbClr val="C8161D"/>
+                </a:solidFill>
+                <a:latin typeface="Arial" pitchFamily="34" charset="0"/>
+                <a:ea typeface="BIZ UDPGothic" pitchFamily="34" charset="-122"/>
+                <a:cs typeface="BIZ UDPGothic" pitchFamily="34" charset="-120"/>
               </a:rPr>
               <a:t>この制度は「ずっと続く恒久制度」</a:t>
             </a:r>
@@ -9517,11 +9517,11 @@
             <a:r>
               <a:rPr lang="en-US" sz="1300" dirty="0">
                 <a:solidFill>
-                  <a:srgbClr val="CCCCCC"/>
-                </a:solidFill>
-                <a:latin typeface="Arial" pitchFamily="34" charset="0"/>
-                <a:ea typeface="Arial" pitchFamily="34" charset="-122"/>
-                <a:cs typeface="Arial" pitchFamily="34" charset="-120"/>
+                  <a:srgbClr val="2B2F36"/>
+                </a:solidFill>
+                <a:latin typeface="Arial" pitchFamily="34" charset="0"/>
+                <a:ea typeface="BIZ UDPGothic" pitchFamily="34" charset="-122"/>
+                <a:cs typeface="BIZ UDPGothic" pitchFamily="34" charset="-120"/>
               </a:rPr>
               <a:t>10年間の数値目標の達成状況を見て、優遇の幅を調整します。目標を達成できたら優遇の幅を小さくする（または新しい目標を作る）、達成できなかったら優遇の幅を広げて、もっと成長を後押しします。</a:t>
             </a:r>
@@ -9543,7 +9543,7 @@
     <p:bg>
       <p:bgPr>
         <a:solidFill>
-          <a:srgbClr val="0A0A0A"/>
+          <a:srgbClr val="F5F6F8"/>
         </a:solidFill>
       </p:bgPr>
     </p:bg>
@@ -9588,11 +9588,11 @@
             <a:r>
               <a:rPr lang="en-US" sz="1200" b="1" spc="300" kern="0" dirty="0">
                 <a:solidFill>
-                  <a:srgbClr val="D62828"/>
-                </a:solidFill>
-                <a:latin typeface="Arial" pitchFamily="34" charset="0"/>
-                <a:ea typeface="Arial" pitchFamily="34" charset="-122"/>
-                <a:cs typeface="Arial" pitchFamily="34" charset="-120"/>
+                  <a:srgbClr val="C8161D"/>
+                </a:solidFill>
+                <a:latin typeface="Arial" pitchFamily="34" charset="0"/>
+                <a:ea typeface="BIZ UDPGothic" pitchFamily="34" charset="-122"/>
+                <a:cs typeface="BIZ UDPGothic" pitchFamily="34" charset="-120"/>
               </a:rPr>
               <a:t>CONTENTS</a:t>
             </a:r>
@@ -9627,11 +9627,11 @@
             <a:r>
               <a:rPr lang="en-US" sz="3200" b="1" dirty="0">
                 <a:solidFill>
-                  <a:srgbClr val="F5F5F0"/>
-                </a:solidFill>
-                <a:latin typeface="Arial" pitchFamily="34" charset="0"/>
-                <a:ea typeface="Arial" pitchFamily="34" charset="-122"/>
-                <a:cs typeface="Arial" pitchFamily="34" charset="-120"/>
+                  <a:srgbClr val="16181D"/>
+                </a:solidFill>
+                <a:latin typeface="Arial" pitchFamily="34" charset="0"/>
+                <a:ea typeface="BIZ UDPGothic" pitchFamily="34" charset="-122"/>
+                <a:cs typeface="BIZ UDPGothic" pitchFamily="34" charset="-120"/>
               </a:rPr>
               <a:t>このスライドで分かること</a:t>
             </a:r>
@@ -9666,11 +9666,11 @@
             <a:r>
               <a:rPr lang="en-US" sz="1000" dirty="0">
                 <a:solidFill>
-                  <a:srgbClr val="CCCCCC"/>
-                </a:solidFill>
-                <a:latin typeface="Arial" pitchFamily="34" charset="0"/>
-                <a:ea typeface="Arial" pitchFamily="34" charset="-122"/>
-                <a:cs typeface="Arial" pitchFamily="34" charset="-120"/>
+                  <a:srgbClr val="2B2F36"/>
+                </a:solidFill>
+                <a:latin typeface="Arial" pitchFamily="34" charset="0"/>
+                <a:ea typeface="BIZ UDPGothic" pitchFamily="34" charset="-122"/>
+                <a:cs typeface="BIZ UDPGothic" pitchFamily="34" charset="-120"/>
               </a:rPr>
               <a:t>02</a:t>
             </a:r>
@@ -9705,11 +9705,11 @@
             <a:r>
               <a:rPr lang="en-US" sz="900" dirty="0">
                 <a:solidFill>
-                  <a:srgbClr val="555555"/>
-                </a:solidFill>
-                <a:latin typeface="Arial" pitchFamily="34" charset="0"/>
-                <a:ea typeface="Arial" pitchFamily="34" charset="-122"/>
-                <a:cs typeface="Arial" pitchFamily="34" charset="-120"/>
+                  <a:srgbClr val="9AA0AA"/>
+                </a:solidFill>
+                <a:latin typeface="Arial" pitchFamily="34" charset="0"/>
+                <a:ea typeface="BIZ UDPGothic" pitchFamily="34" charset="-122"/>
+                <a:cs typeface="BIZ UDPGothic" pitchFamily="34" charset="-120"/>
               </a:rPr>
               <a:t>REBOOT JAPAN ── 提言003</a:t>
             </a:r>
@@ -9734,11 +9734,11 @@
             </a:avLst>
           </a:prstGeom>
           <a:solidFill>
-            <a:srgbClr val="1A1A1A"/>
+            <a:srgbClr val="FFFFFF"/>
           </a:solidFill>
           <a:ln w="12700">
             <a:solidFill>
-              <a:srgbClr val="2E2E2E"/>
+              <a:srgbClr val="DDE0E6"/>
             </a:solidFill>
             <a:prstDash val="solid"/>
           </a:ln>
@@ -9771,11 +9771,11 @@
             <a:r>
               <a:rPr lang="en-US" sz="3000" b="1" dirty="0">
                 <a:solidFill>
-                  <a:srgbClr val="D62828"/>
-                </a:solidFill>
-                <a:latin typeface="Arial" pitchFamily="34" charset="0"/>
-                <a:ea typeface="Arial" pitchFamily="34" charset="-122"/>
-                <a:cs typeface="Arial" pitchFamily="34" charset="-120"/>
+                  <a:srgbClr val="C8161D"/>
+                </a:solidFill>
+                <a:latin typeface="Arial" pitchFamily="34" charset="0"/>
+                <a:ea typeface="BIZ UDPGothic" pitchFamily="34" charset="-122"/>
+                <a:cs typeface="BIZ UDPGothic" pitchFamily="34" charset="-120"/>
               </a:rPr>
               <a:t>01</a:t>
             </a:r>
@@ -9810,11 +9810,11 @@
             <a:r>
               <a:rPr lang="en-US" sz="1500" b="1" dirty="0">
                 <a:solidFill>
-                  <a:srgbClr val="F5F5F0"/>
-                </a:solidFill>
-                <a:latin typeface="Arial" pitchFamily="34" charset="0"/>
-                <a:ea typeface="Arial" pitchFamily="34" charset="-122"/>
-                <a:cs typeface="Arial" pitchFamily="34" charset="-120"/>
+                  <a:srgbClr val="16181D"/>
+                </a:solidFill>
+                <a:latin typeface="Arial" pitchFamily="34" charset="0"/>
+                <a:ea typeface="BIZ UDPGothic" pitchFamily="34" charset="-122"/>
+                <a:cs typeface="BIZ UDPGothic" pitchFamily="34" charset="-120"/>
               </a:rPr>
               <a:t>今、何が問題なのか</a:t>
             </a:r>
@@ -9852,11 +9852,11 @@
             <a:r>
               <a:rPr lang="en-US" sz="1100" dirty="0">
                 <a:solidFill>
-                  <a:srgbClr val="CCCCCC"/>
-                </a:solidFill>
-                <a:latin typeface="Arial" pitchFamily="34" charset="0"/>
-                <a:ea typeface="Arial" pitchFamily="34" charset="-122"/>
-                <a:cs typeface="Arial" pitchFamily="34" charset="-120"/>
+                  <a:srgbClr val="2B2F36"/>
+                </a:solidFill>
+                <a:latin typeface="Arial" pitchFamily="34" charset="0"/>
+                <a:ea typeface="BIZ UDPGothic" pitchFamily="34" charset="-122"/>
+                <a:cs typeface="BIZ UDPGothic" pitchFamily="34" charset="-120"/>
               </a:rPr>
               <a:t>働く人の7割を占める中小企業の給料が上がらない理由</a:t>
             </a:r>
@@ -9881,11 +9881,11 @@
             </a:avLst>
           </a:prstGeom>
           <a:solidFill>
-            <a:srgbClr val="1A1A1A"/>
+            <a:srgbClr val="FFFFFF"/>
           </a:solidFill>
           <a:ln w="12700">
             <a:solidFill>
-              <a:srgbClr val="2E2E2E"/>
+              <a:srgbClr val="DDE0E6"/>
             </a:solidFill>
             <a:prstDash val="solid"/>
           </a:ln>
@@ -9918,11 +9918,11 @@
             <a:r>
               <a:rPr lang="en-US" sz="3000" b="1" dirty="0">
                 <a:solidFill>
-                  <a:srgbClr val="D62828"/>
-                </a:solidFill>
-                <a:latin typeface="Arial" pitchFamily="34" charset="0"/>
-                <a:ea typeface="Arial" pitchFamily="34" charset="-122"/>
-                <a:cs typeface="Arial" pitchFamily="34" charset="-120"/>
+                  <a:srgbClr val="C8161D"/>
+                </a:solidFill>
+                <a:latin typeface="Arial" pitchFamily="34" charset="0"/>
+                <a:ea typeface="BIZ UDPGothic" pitchFamily="34" charset="-122"/>
+                <a:cs typeface="BIZ UDPGothic" pitchFamily="34" charset="-120"/>
               </a:rPr>
               <a:t>02</a:t>
             </a:r>
@@ -9957,11 +9957,11 @@
             <a:r>
               <a:rPr lang="en-US" sz="1500" b="1" dirty="0">
                 <a:solidFill>
-                  <a:srgbClr val="F5F5F0"/>
-                </a:solidFill>
-                <a:latin typeface="Arial" pitchFamily="34" charset="0"/>
-                <a:ea typeface="Arial" pitchFamily="34" charset="-122"/>
-                <a:cs typeface="Arial" pitchFamily="34" charset="-120"/>
+                  <a:srgbClr val="16181D"/>
+                </a:solidFill>
+                <a:latin typeface="Arial" pitchFamily="34" charset="0"/>
+                <a:ea typeface="BIZ UDPGothic" pitchFamily="34" charset="-122"/>
+                <a:cs typeface="BIZ UDPGothic" pitchFamily="34" charset="-120"/>
               </a:rPr>
               <a:t>なぜそうなったのか</a:t>
             </a:r>
@@ -9999,11 +9999,11 @@
             <a:r>
               <a:rPr lang="en-US" sz="1100" dirty="0">
                 <a:solidFill>
-                  <a:srgbClr val="CCCCCC"/>
-                </a:solidFill>
-                <a:latin typeface="Arial" pitchFamily="34" charset="0"/>
-                <a:ea typeface="Arial" pitchFamily="34" charset="-122"/>
-                <a:cs typeface="Arial" pitchFamily="34" charset="-120"/>
+                  <a:srgbClr val="2B2F36"/>
+                </a:solidFill>
+                <a:latin typeface="Arial" pitchFamily="34" charset="0"/>
+                <a:ea typeface="BIZ UDPGothic" pitchFamily="34" charset="-122"/>
+                <a:cs typeface="BIZ UDPGothic" pitchFamily="34" charset="-120"/>
               </a:rPr>
               <a:t>「作られた赤字」と無条件の優遇税制のワナ</a:t>
             </a:r>
@@ -10028,11 +10028,11 @@
             </a:avLst>
           </a:prstGeom>
           <a:solidFill>
-            <a:srgbClr val="1A1A1A"/>
+            <a:srgbClr val="FFFFFF"/>
           </a:solidFill>
           <a:ln w="12700">
             <a:solidFill>
-              <a:srgbClr val="2E2E2E"/>
+              <a:srgbClr val="DDE0E6"/>
             </a:solidFill>
             <a:prstDash val="solid"/>
           </a:ln>
@@ -10065,11 +10065,11 @@
             <a:r>
               <a:rPr lang="en-US" sz="3000" b="1" dirty="0">
                 <a:solidFill>
-                  <a:srgbClr val="D62828"/>
-                </a:solidFill>
-                <a:latin typeface="Arial" pitchFamily="34" charset="0"/>
-                <a:ea typeface="Arial" pitchFamily="34" charset="-122"/>
-                <a:cs typeface="Arial" pitchFamily="34" charset="-120"/>
+                  <a:srgbClr val="C8161D"/>
+                </a:solidFill>
+                <a:latin typeface="Arial" pitchFamily="34" charset="0"/>
+                <a:ea typeface="BIZ UDPGothic" pitchFamily="34" charset="-122"/>
+                <a:cs typeface="BIZ UDPGothic" pitchFamily="34" charset="-120"/>
               </a:rPr>
               <a:t>03</a:t>
             </a:r>
@@ -10104,11 +10104,11 @@
             <a:r>
               <a:rPr lang="en-US" sz="1500" b="1" dirty="0">
                 <a:solidFill>
-                  <a:srgbClr val="F5F5F0"/>
-                </a:solidFill>
-                <a:latin typeface="Arial" pitchFamily="34" charset="0"/>
-                <a:ea typeface="Arial" pitchFamily="34" charset="-122"/>
-                <a:cs typeface="Arial" pitchFamily="34" charset="-120"/>
+                  <a:srgbClr val="16181D"/>
+                </a:solidFill>
+                <a:latin typeface="Arial" pitchFamily="34" charset="0"/>
+                <a:ea typeface="BIZ UDPGothic" pitchFamily="34" charset="-122"/>
+                <a:cs typeface="BIZ UDPGothic" pitchFamily="34" charset="-120"/>
               </a:rPr>
               <a:t>誰が対象になるのか</a:t>
             </a:r>
@@ -10146,11 +10146,11 @@
             <a:r>
               <a:rPr lang="en-US" sz="1100" dirty="0">
                 <a:solidFill>
-                  <a:srgbClr val="CCCCCC"/>
-                </a:solidFill>
-                <a:latin typeface="Arial" pitchFamily="34" charset="0"/>
-                <a:ea typeface="Arial" pitchFamily="34" charset="-122"/>
-                <a:cs typeface="Arial" pitchFamily="34" charset="-120"/>
+                  <a:srgbClr val="2B2F36"/>
+                </a:solidFill>
+                <a:latin typeface="Arial" pitchFamily="34" charset="0"/>
+                <a:ea typeface="BIZ UDPGothic" pitchFamily="34" charset="-122"/>
+                <a:cs typeface="BIZ UDPGothic" pitchFamily="34" charset="-120"/>
               </a:rPr>
               <a:t>BtoB3業種に絞った理由</a:t>
             </a:r>
@@ -10175,11 +10175,11 @@
             </a:avLst>
           </a:prstGeom>
           <a:solidFill>
-            <a:srgbClr val="1A1A1A"/>
+            <a:srgbClr val="FFFFFF"/>
           </a:solidFill>
           <a:ln w="12700">
             <a:solidFill>
-              <a:srgbClr val="2E2E2E"/>
+              <a:srgbClr val="DDE0E6"/>
             </a:solidFill>
             <a:prstDash val="solid"/>
           </a:ln>
@@ -10212,11 +10212,11 @@
             <a:r>
               <a:rPr lang="en-US" sz="3000" b="1" dirty="0">
                 <a:solidFill>
-                  <a:srgbClr val="D62828"/>
-                </a:solidFill>
-                <a:latin typeface="Arial" pitchFamily="34" charset="0"/>
-                <a:ea typeface="Arial" pitchFamily="34" charset="-122"/>
-                <a:cs typeface="Arial" pitchFamily="34" charset="-120"/>
+                  <a:srgbClr val="C8161D"/>
+                </a:solidFill>
+                <a:latin typeface="Arial" pitchFamily="34" charset="0"/>
+                <a:ea typeface="BIZ UDPGothic" pitchFamily="34" charset="-122"/>
+                <a:cs typeface="BIZ UDPGothic" pitchFamily="34" charset="-120"/>
               </a:rPr>
               <a:t>04</a:t>
             </a:r>
@@ -10251,11 +10251,11 @@
             <a:r>
               <a:rPr lang="en-US" sz="1500" b="1" dirty="0">
                 <a:solidFill>
-                  <a:srgbClr val="F5F5F0"/>
-                </a:solidFill>
-                <a:latin typeface="Arial" pitchFamily="34" charset="0"/>
-                <a:ea typeface="Arial" pitchFamily="34" charset="-122"/>
-                <a:cs typeface="Arial" pitchFamily="34" charset="-120"/>
+                  <a:srgbClr val="16181D"/>
+                </a:solidFill>
+                <a:latin typeface="Arial" pitchFamily="34" charset="0"/>
+                <a:ea typeface="BIZ UDPGothic" pitchFamily="34" charset="-122"/>
+                <a:cs typeface="BIZ UDPGothic" pitchFamily="34" charset="-120"/>
               </a:rPr>
               <a:t>何を変えるのか</a:t>
             </a:r>
@@ -10293,11 +10293,11 @@
             <a:r>
               <a:rPr lang="en-US" sz="1100" dirty="0">
                 <a:solidFill>
-                  <a:srgbClr val="CCCCCC"/>
-                </a:solidFill>
-                <a:latin typeface="Arial" pitchFamily="34" charset="0"/>
-                <a:ea typeface="Arial" pitchFamily="34" charset="-122"/>
-                <a:cs typeface="Arial" pitchFamily="34" charset="-120"/>
+                  <a:srgbClr val="2B2F36"/>
+                </a:solidFill>
+                <a:latin typeface="Arial" pitchFamily="34" charset="0"/>
+                <a:ea typeface="BIZ UDPGothic" pitchFamily="34" charset="-122"/>
+                <a:cs typeface="BIZ UDPGothic" pitchFamily="34" charset="-120"/>
               </a:rPr>
               <a:t>税率・補助金・M&amp;A・経費ルールの4つの柱</a:t>
             </a:r>
@@ -10322,11 +10322,11 @@
             </a:avLst>
           </a:prstGeom>
           <a:solidFill>
-            <a:srgbClr val="1A1A1A"/>
+            <a:srgbClr val="FFFFFF"/>
           </a:solidFill>
           <a:ln w="12700">
             <a:solidFill>
-              <a:srgbClr val="2E2E2E"/>
+              <a:srgbClr val="DDE0E6"/>
             </a:solidFill>
             <a:prstDash val="solid"/>
           </a:ln>
@@ -10359,11 +10359,11 @@
             <a:r>
               <a:rPr lang="en-US" sz="3000" b="1" dirty="0">
                 <a:solidFill>
-                  <a:srgbClr val="D62828"/>
-                </a:solidFill>
-                <a:latin typeface="Arial" pitchFamily="34" charset="0"/>
-                <a:ea typeface="Arial" pitchFamily="34" charset="-122"/>
-                <a:cs typeface="Arial" pitchFamily="34" charset="-120"/>
+                  <a:srgbClr val="C8161D"/>
+                </a:solidFill>
+                <a:latin typeface="Arial" pitchFamily="34" charset="0"/>
+                <a:ea typeface="BIZ UDPGothic" pitchFamily="34" charset="-122"/>
+                <a:cs typeface="BIZ UDPGothic" pitchFamily="34" charset="-120"/>
               </a:rPr>
               <a:t>05</a:t>
             </a:r>
@@ -10398,11 +10398,11 @@
             <a:r>
               <a:rPr lang="en-US" sz="1500" b="1" dirty="0">
                 <a:solidFill>
-                  <a:srgbClr val="F5F5F0"/>
-                </a:solidFill>
-                <a:latin typeface="Arial" pitchFamily="34" charset="0"/>
-                <a:ea typeface="Arial" pitchFamily="34" charset="-122"/>
-                <a:cs typeface="Arial" pitchFamily="34" charset="-120"/>
+                  <a:srgbClr val="16181D"/>
+                </a:solidFill>
+                <a:latin typeface="Arial" pitchFamily="34" charset="0"/>
+                <a:ea typeface="BIZ UDPGothic" pitchFamily="34" charset="-122"/>
+                <a:cs typeface="BIZ UDPGothic" pitchFamily="34" charset="-120"/>
               </a:rPr>
               <a:t>どう実現するのか</a:t>
             </a:r>
@@ -10440,11 +10440,11 @@
             <a:r>
               <a:rPr lang="en-US" sz="1100" dirty="0">
                 <a:solidFill>
-                  <a:srgbClr val="CCCCCC"/>
-                </a:solidFill>
-                <a:latin typeface="Arial" pitchFamily="34" charset="0"/>
-                <a:ea typeface="Arial" pitchFamily="34" charset="-122"/>
-                <a:cs typeface="Arial" pitchFamily="34" charset="-120"/>
+                  <a:srgbClr val="2B2F36"/>
+                </a:solidFill>
+                <a:latin typeface="Arial" pitchFamily="34" charset="0"/>
+                <a:ea typeface="BIZ UDPGothic" pitchFamily="34" charset="-122"/>
+                <a:cs typeface="BIZ UDPGothic" pitchFamily="34" charset="-120"/>
               </a:rPr>
               <a:t>2年間の移行スケジュールと10年後の数値目標</a:t>
             </a:r>
@@ -10469,11 +10469,11 @@
             </a:avLst>
           </a:prstGeom>
           <a:solidFill>
-            <a:srgbClr val="1A1A1A"/>
+            <a:srgbClr val="FFFFFF"/>
           </a:solidFill>
           <a:ln w="12700">
             <a:solidFill>
-              <a:srgbClr val="2E2E2E"/>
+              <a:srgbClr val="DDE0E6"/>
             </a:solidFill>
             <a:prstDash val="solid"/>
           </a:ln>
@@ -10506,11 +10506,11 @@
             <a:r>
               <a:rPr lang="en-US" sz="3000" b="1" dirty="0">
                 <a:solidFill>
-                  <a:srgbClr val="D62828"/>
-                </a:solidFill>
-                <a:latin typeface="Arial" pitchFamily="34" charset="0"/>
-                <a:ea typeface="Arial" pitchFamily="34" charset="-122"/>
-                <a:cs typeface="Arial" pitchFamily="34" charset="-120"/>
+                  <a:srgbClr val="C8161D"/>
+                </a:solidFill>
+                <a:latin typeface="Arial" pitchFamily="34" charset="0"/>
+                <a:ea typeface="BIZ UDPGothic" pitchFamily="34" charset="-122"/>
+                <a:cs typeface="BIZ UDPGothic" pitchFamily="34" charset="-120"/>
               </a:rPr>
               <a:t>06</a:t>
             </a:r>
@@ -10545,11 +10545,11 @@
             <a:r>
               <a:rPr lang="en-US" sz="1500" b="1" dirty="0">
                 <a:solidFill>
-                  <a:srgbClr val="F5F5F0"/>
-                </a:solidFill>
-                <a:latin typeface="Arial" pitchFamily="34" charset="0"/>
-                <a:ea typeface="Arial" pitchFamily="34" charset="-122"/>
-                <a:cs typeface="Arial" pitchFamily="34" charset="-120"/>
+                  <a:srgbClr val="16181D"/>
+                </a:solidFill>
+                <a:latin typeface="Arial" pitchFamily="34" charset="0"/>
+                <a:ea typeface="BIZ UDPGothic" pitchFamily="34" charset="-122"/>
+                <a:cs typeface="BIZ UDPGothic" pitchFamily="34" charset="-120"/>
               </a:rPr>
               <a:t>結果どうなるのか</a:t>
             </a:r>
@@ -10587,11 +10587,11 @@
             <a:r>
               <a:rPr lang="en-US" sz="1100" dirty="0">
                 <a:solidFill>
-                  <a:srgbClr val="CCCCCC"/>
-                </a:solidFill>
-                <a:latin typeface="Arial" pitchFamily="34" charset="0"/>
-                <a:ea typeface="Arial" pitchFamily="34" charset="-122"/>
-                <a:cs typeface="Arial" pitchFamily="34" charset="-120"/>
+                  <a:srgbClr val="2B2F36"/>
+                </a:solidFill>
+                <a:latin typeface="Arial" pitchFamily="34" charset="0"/>
+                <a:ea typeface="BIZ UDPGothic" pitchFamily="34" charset="-122"/>
+                <a:cs typeface="BIZ UDPGothic" pitchFamily="34" charset="-120"/>
               </a:rPr>
               <a:t>税収試算と10年後の日本経済</a:t>
             </a:r>
@@ -10613,7 +10613,7 @@
     <p:bg>
       <p:bgPr>
         <a:solidFill>
-          <a:srgbClr val="0A0A0A"/>
+          <a:srgbClr val="F5F6F8"/>
         </a:solidFill>
       </p:bgPr>
     </p:bg>
@@ -10658,11 +10658,11 @@
             <a:r>
               <a:rPr lang="en-US" sz="1200" b="1" spc="300" kern="0" dirty="0">
                 <a:solidFill>
-                  <a:srgbClr val="D62828"/>
-                </a:solidFill>
-                <a:latin typeface="Arial" pitchFamily="34" charset="0"/>
-                <a:ea typeface="Arial" pitchFamily="34" charset="-122"/>
-                <a:cs typeface="Arial" pitchFamily="34" charset="-120"/>
+                  <a:srgbClr val="C8161D"/>
+                </a:solidFill>
+                <a:latin typeface="Arial" pitchFamily="34" charset="0"/>
+                <a:ea typeface="BIZ UDPGothic" pitchFamily="34" charset="-122"/>
+                <a:cs typeface="BIZ UDPGothic" pitchFamily="34" charset="-120"/>
               </a:rPr>
               <a:t>4. 柱② M&amp;A（合併）の支援</a:t>
             </a:r>
@@ -10697,11 +10697,11 @@
             <a:r>
               <a:rPr lang="en-US" sz="3200" b="1" dirty="0">
                 <a:solidFill>
-                  <a:srgbClr val="F5F5F0"/>
-                </a:solidFill>
-                <a:latin typeface="Arial" pitchFamily="34" charset="0"/>
-                <a:ea typeface="Arial" pitchFamily="34" charset="-122"/>
-                <a:cs typeface="Arial" pitchFamily="34" charset="-120"/>
+                  <a:srgbClr val="16181D"/>
+                </a:solidFill>
+                <a:latin typeface="Arial" pitchFamily="34" charset="0"/>
+                <a:ea typeface="BIZ UDPGothic" pitchFamily="34" charset="-122"/>
+                <a:cs typeface="BIZ UDPGothic" pitchFamily="34" charset="-120"/>
               </a:rPr>
               <a:t>会社同士の合併（M&amp;A）は、完全に無税</a:t>
             </a:r>
@@ -10736,11 +10736,11 @@
             <a:r>
               <a:rPr lang="en-US" sz="1000" dirty="0">
                 <a:solidFill>
-                  <a:srgbClr val="CCCCCC"/>
-                </a:solidFill>
-                <a:latin typeface="Arial" pitchFamily="34" charset="0"/>
-                <a:ea typeface="Arial" pitchFamily="34" charset="-122"/>
-                <a:cs typeface="Arial" pitchFamily="34" charset="-120"/>
+                  <a:srgbClr val="2B2F36"/>
+                </a:solidFill>
+                <a:latin typeface="Arial" pitchFamily="34" charset="0"/>
+                <a:ea typeface="BIZ UDPGothic" pitchFamily="34" charset="-122"/>
+                <a:cs typeface="BIZ UDPGothic" pitchFamily="34" charset="-120"/>
               </a:rPr>
               <a:t>20</a:t>
             </a:r>
@@ -10775,11 +10775,11 @@
             <a:r>
               <a:rPr lang="en-US" sz="900" dirty="0">
                 <a:solidFill>
-                  <a:srgbClr val="555555"/>
-                </a:solidFill>
-                <a:latin typeface="Arial" pitchFamily="34" charset="0"/>
-                <a:ea typeface="Arial" pitchFamily="34" charset="-122"/>
-                <a:cs typeface="Arial" pitchFamily="34" charset="-120"/>
+                  <a:srgbClr val="9AA0AA"/>
+                </a:solidFill>
+                <a:latin typeface="Arial" pitchFamily="34" charset="0"/>
+                <a:ea typeface="BIZ UDPGothic" pitchFamily="34" charset="-122"/>
+                <a:cs typeface="BIZ UDPGothic" pitchFamily="34" charset="-120"/>
               </a:rPr>
               <a:t>REBOOT JAPAN ── 提言003</a:t>
             </a:r>
@@ -10814,11 +10814,11 @@
             <a:r>
               <a:rPr lang="en-US" sz="1300" b="1" dirty="0">
                 <a:solidFill>
-                  <a:srgbClr val="D62828"/>
-                </a:solidFill>
-                <a:latin typeface="Arial" pitchFamily="34" charset="0"/>
-                <a:ea typeface="Arial" pitchFamily="34" charset="-122"/>
-                <a:cs typeface="Arial" pitchFamily="34" charset="-120"/>
+                  <a:srgbClr val="C8161D"/>
+                </a:solidFill>
+                <a:latin typeface="Arial" pitchFamily="34" charset="0"/>
+                <a:ea typeface="BIZ UDPGothic" pitchFamily="34" charset="-122"/>
+                <a:cs typeface="BIZ UDPGothic" pitchFamily="34" charset="-120"/>
               </a:rPr>
               <a:t>用語解説：M&amp;A（エムアンドエー）</a:t>
             </a:r>
@@ -10853,11 +10853,11 @@
             <a:r>
               <a:rPr lang="en-US" sz="1250" dirty="0">
                 <a:solidFill>
-                  <a:srgbClr val="CCCCCC"/>
-                </a:solidFill>
-                <a:latin typeface="Arial" pitchFamily="34" charset="0"/>
-                <a:ea typeface="Arial" pitchFamily="34" charset="-122"/>
-                <a:cs typeface="Arial" pitchFamily="34" charset="-120"/>
+                  <a:srgbClr val="2B2F36"/>
+                </a:solidFill>
+                <a:latin typeface="Arial" pitchFamily="34" charset="0"/>
+                <a:ea typeface="BIZ UDPGothic" pitchFamily="34" charset="-122"/>
+                <a:cs typeface="BIZ UDPGothic" pitchFamily="34" charset="-120"/>
               </a:rPr>
               <a:t>会社同士が合併したり、買収したりすること。</a:t>
             </a:r>
@@ -10882,11 +10882,11 @@
             </a:avLst>
           </a:prstGeom>
           <a:solidFill>
-            <a:srgbClr val="1A1A1A"/>
+            <a:srgbClr val="FFFFFF"/>
           </a:solidFill>
           <a:ln w="12700">
             <a:solidFill>
-              <a:srgbClr val="2E2E2E"/>
+              <a:srgbClr val="DDE0E6"/>
             </a:solidFill>
             <a:prstDash val="solid"/>
           </a:ln>
@@ -10919,11 +10919,11 @@
             <a:r>
               <a:rPr lang="en-US" sz="1400" b="1" dirty="0">
                 <a:solidFill>
-                  <a:srgbClr val="D62828"/>
-                </a:solidFill>
-                <a:latin typeface="Arial" pitchFamily="34" charset="0"/>
-                <a:ea typeface="Arial" pitchFamily="34" charset="-122"/>
-                <a:cs typeface="Arial" pitchFamily="34" charset="-120"/>
+                  <a:srgbClr val="C8161D"/>
+                </a:solidFill>
+                <a:latin typeface="Arial" pitchFamily="34" charset="0"/>
+                <a:ea typeface="BIZ UDPGothic" pitchFamily="34" charset="-122"/>
+                <a:cs typeface="BIZ UDPGothic" pitchFamily="34" charset="-120"/>
               </a:rPr>
               <a:t>合併した年</a:t>
             </a:r>
@@ -10961,11 +10961,11 @@
             <a:r>
               <a:rPr lang="en-US" sz="1300" dirty="0">
                 <a:solidFill>
-                  <a:srgbClr val="CCCCCC"/>
-                </a:solidFill>
-                <a:latin typeface="Arial" pitchFamily="34" charset="0"/>
-                <a:ea typeface="Arial" pitchFamily="34" charset="-122"/>
-                <a:cs typeface="Arial" pitchFamily="34" charset="-120"/>
+                  <a:srgbClr val="2B2F36"/>
+                </a:solidFill>
+                <a:latin typeface="Arial" pitchFamily="34" charset="0"/>
+                <a:ea typeface="BIZ UDPGothic" pitchFamily="34" charset="-122"/>
+                <a:cs typeface="BIZ UDPGothic" pitchFamily="34" charset="-120"/>
               </a:rPr>
               <a:t>両方の会社とも自動的に「拡大条件を達成した」とみなす（15%優遇）</a:t>
             </a:r>
@@ -10990,11 +10990,11 @@
             </a:avLst>
           </a:prstGeom>
           <a:solidFill>
-            <a:srgbClr val="1A1A1A"/>
+            <a:srgbClr val="FFFFFF"/>
           </a:solidFill>
           <a:ln w="12700">
             <a:solidFill>
-              <a:srgbClr val="2E2E2E"/>
+              <a:srgbClr val="DDE0E6"/>
             </a:solidFill>
             <a:prstDash val="solid"/>
           </a:ln>
@@ -11027,11 +11027,11 @@
             <a:r>
               <a:rPr lang="en-US" sz="1400" b="1" dirty="0">
                 <a:solidFill>
-                  <a:srgbClr val="D62828"/>
-                </a:solidFill>
-                <a:latin typeface="Arial" pitchFamily="34" charset="0"/>
-                <a:ea typeface="Arial" pitchFamily="34" charset="-122"/>
-                <a:cs typeface="Arial" pitchFamily="34" charset="-120"/>
+                  <a:srgbClr val="C8161D"/>
+                </a:solidFill>
+                <a:latin typeface="Arial" pitchFamily="34" charset="0"/>
+                <a:ea typeface="BIZ UDPGothic" pitchFamily="34" charset="-122"/>
+                <a:cs typeface="BIZ UDPGothic" pitchFamily="34" charset="-120"/>
               </a:rPr>
               <a:t>合併にかかる税金</a:t>
             </a:r>
@@ -11069,11 +11069,11 @@
             <a:r>
               <a:rPr lang="en-US" sz="1300" dirty="0">
                 <a:solidFill>
-                  <a:srgbClr val="CCCCCC"/>
-                </a:solidFill>
-                <a:latin typeface="Arial" pitchFamily="34" charset="0"/>
-                <a:ea typeface="Arial" pitchFamily="34" charset="-122"/>
-                <a:cs typeface="Arial" pitchFamily="34" charset="-120"/>
+                  <a:srgbClr val="2B2F36"/>
+                </a:solidFill>
+                <a:latin typeface="Arial" pitchFamily="34" charset="0"/>
+                <a:ea typeface="BIZ UDPGothic" pitchFamily="34" charset="-122"/>
+                <a:cs typeface="BIZ UDPGothic" pitchFamily="34" charset="-120"/>
               </a:rPr>
               <a:t>登録免許税・不動産取得税・仲介手数料には、税金をかけない（ゼロ）</a:t>
             </a:r>
@@ -11098,11 +11098,11 @@
             </a:avLst>
           </a:prstGeom>
           <a:solidFill>
-            <a:srgbClr val="1A1A1A"/>
+            <a:srgbClr val="FFFFFF"/>
           </a:solidFill>
           <a:ln w="12700">
             <a:solidFill>
-              <a:srgbClr val="2E2E2E"/>
+              <a:srgbClr val="DDE0E6"/>
             </a:solidFill>
             <a:prstDash val="solid"/>
           </a:ln>
@@ -11135,11 +11135,11 @@
             <a:r>
               <a:rPr lang="en-US" sz="1400" b="1" dirty="0">
                 <a:solidFill>
-                  <a:srgbClr val="D62828"/>
-                </a:solidFill>
-                <a:latin typeface="Arial" pitchFamily="34" charset="0"/>
-                <a:ea typeface="Arial" pitchFamily="34" charset="-122"/>
-                <a:cs typeface="Arial" pitchFamily="34" charset="-120"/>
+                  <a:srgbClr val="C8161D"/>
+                </a:solidFill>
+                <a:latin typeface="Arial" pitchFamily="34" charset="0"/>
+                <a:ea typeface="BIZ UDPGothic" pitchFamily="34" charset="-122"/>
+                <a:cs typeface="BIZ UDPGothic" pitchFamily="34" charset="-120"/>
               </a:rPr>
               <a:t>合併翌年から</a:t>
             </a:r>
@@ -11177,11 +11177,11 @@
             <a:r>
               <a:rPr lang="en-US" sz="1300" dirty="0">
                 <a:solidFill>
-                  <a:srgbClr val="CCCCCC"/>
-                </a:solidFill>
-                <a:latin typeface="Arial" pitchFamily="34" charset="0"/>
-                <a:ea typeface="Arial" pitchFamily="34" charset="-122"/>
-                <a:cs typeface="Arial" pitchFamily="34" charset="-120"/>
+                  <a:srgbClr val="2B2F36"/>
+                </a:solidFill>
+                <a:latin typeface="Arial" pitchFamily="34" charset="0"/>
+                <a:ea typeface="BIZ UDPGothic" pitchFamily="34" charset="-122"/>
+                <a:cs typeface="BIZ UDPGothic" pitchFamily="34" charset="-120"/>
               </a:rPr>
               <a:t>合体した後の会社として、普通の維持・拡大条件を適用</a:t>
             </a:r>
@@ -11216,11 +11216,11 @@
             <a:r>
               <a:rPr lang="en-US" sz="1200" i="1" dirty="0">
                 <a:solidFill>
-                  <a:srgbClr val="999999"/>
-                </a:solidFill>
-                <a:latin typeface="Arial" pitchFamily="34" charset="0"/>
-                <a:ea typeface="Arial" pitchFamily="34" charset="-122"/>
-                <a:cs typeface="Arial" pitchFamily="34" charset="-120"/>
+                  <a:srgbClr val="4B515C"/>
+                </a:solidFill>
+                <a:latin typeface="Arial" pitchFamily="34" charset="0"/>
+                <a:ea typeface="BIZ UDPGothic" pitchFamily="34" charset="-122"/>
+                <a:cs typeface="BIZ UDPGothic" pitchFamily="34" charset="-120"/>
               </a:rPr>
               <a:t>「合併して強くなる」ことは、一時的な応援ではなく、これからの日本の産業がずっと目指すべき方向性 ── だからこの優遇は恒久制度です。</a:t>
             </a:r>
@@ -11242,7 +11242,7 @@
     <p:bg>
       <p:bgPr>
         <a:solidFill>
-          <a:srgbClr val="0A0A0A"/>
+          <a:srgbClr val="F5F6F8"/>
         </a:solidFill>
       </p:bgPr>
     </p:bg>
@@ -11287,11 +11287,11 @@
             <a:r>
               <a:rPr lang="en-US" sz="1200" b="1" spc="300" kern="0" dirty="0">
                 <a:solidFill>
-                  <a:srgbClr val="D62828"/>
-                </a:solidFill>
-                <a:latin typeface="Arial" pitchFamily="34" charset="0"/>
-                <a:ea typeface="Arial" pitchFamily="34" charset="-122"/>
-                <a:cs typeface="Arial" pitchFamily="34" charset="-120"/>
+                  <a:srgbClr val="C8161D"/>
+                </a:solidFill>
+                <a:latin typeface="Arial" pitchFamily="34" charset="0"/>
+                <a:ea typeface="BIZ UDPGothic" pitchFamily="34" charset="-122"/>
+                <a:cs typeface="BIZ UDPGothic" pitchFamily="34" charset="-120"/>
               </a:rPr>
               <a:t>4. 柱③ 経費のクリーン化</a:t>
             </a:r>
@@ -11326,11 +11326,11 @@
             <a:r>
               <a:rPr lang="en-US" sz="3200" b="1" dirty="0">
                 <a:solidFill>
-                  <a:srgbClr val="F5F5F0"/>
-                </a:solidFill>
-                <a:latin typeface="Arial" pitchFamily="34" charset="0"/>
-                <a:ea typeface="Arial" pitchFamily="34" charset="-122"/>
-                <a:cs typeface="Arial" pitchFamily="34" charset="-120"/>
+                  <a:srgbClr val="16181D"/>
+                </a:solidFill>
+                <a:latin typeface="Arial" pitchFamily="34" charset="0"/>
+                <a:ea typeface="BIZ UDPGothic" pitchFamily="34" charset="-122"/>
+                <a:cs typeface="BIZ UDPGothic" pitchFamily="34" charset="-120"/>
               </a:rPr>
               <a:t>利益を隠す経費は「脱税」として厳しく取り締まる</a:t>
             </a:r>
@@ -11365,11 +11365,11 @@
             <a:r>
               <a:rPr lang="en-US" sz="1000" dirty="0">
                 <a:solidFill>
-                  <a:srgbClr val="CCCCCC"/>
-                </a:solidFill>
-                <a:latin typeface="Arial" pitchFamily="34" charset="0"/>
-                <a:ea typeface="Arial" pitchFamily="34" charset="-122"/>
-                <a:cs typeface="Arial" pitchFamily="34" charset="-120"/>
+                  <a:srgbClr val="2B2F36"/>
+                </a:solidFill>
+                <a:latin typeface="Arial" pitchFamily="34" charset="0"/>
+                <a:ea typeface="BIZ UDPGothic" pitchFamily="34" charset="-122"/>
+                <a:cs typeface="BIZ UDPGothic" pitchFamily="34" charset="-120"/>
               </a:rPr>
               <a:t>21</a:t>
             </a:r>
@@ -11404,11 +11404,11 @@
             <a:r>
               <a:rPr lang="en-US" sz="900" dirty="0">
                 <a:solidFill>
-                  <a:srgbClr val="555555"/>
-                </a:solidFill>
-                <a:latin typeface="Arial" pitchFamily="34" charset="0"/>
-                <a:ea typeface="Arial" pitchFamily="34" charset="-122"/>
-                <a:cs typeface="Arial" pitchFamily="34" charset="-120"/>
+                  <a:srgbClr val="9AA0AA"/>
+                </a:solidFill>
+                <a:latin typeface="Arial" pitchFamily="34" charset="0"/>
+                <a:ea typeface="BIZ UDPGothic" pitchFamily="34" charset="-122"/>
+                <a:cs typeface="BIZ UDPGothic" pitchFamily="34" charset="-120"/>
               </a:rPr>
               <a:t>REBOOT JAPAN ── 提言003</a:t>
             </a:r>
@@ -11446,11 +11446,11 @@
             <a:r>
               <a:rPr lang="en-US" sz="1350" dirty="0">
                 <a:solidFill>
-                  <a:srgbClr val="CCCCCC"/>
-                </a:solidFill>
-                <a:latin typeface="Arial" pitchFamily="34" charset="0"/>
-                <a:ea typeface="Arial" pitchFamily="34" charset="-122"/>
-                <a:cs typeface="Arial" pitchFamily="34" charset="-120"/>
+                  <a:srgbClr val="2B2F36"/>
+                </a:solidFill>
+                <a:latin typeface="Arial" pitchFamily="34" charset="0"/>
+                <a:ea typeface="BIZ UDPGothic" pitchFamily="34" charset="-122"/>
+                <a:cs typeface="BIZ UDPGothic" pitchFamily="34" charset="-120"/>
               </a:rPr>
               <a:t>生産性に関係のない経費（高級な外車、個人的な飲み会の付け回しなど）で利益を圧縮することを、「脱税」とみなして厳罰化します。出た利益は、設備投資か、雇用・賃金を増やすための原資に回すことを法律で義務付けます。</a:t>
             </a:r>
@@ -11485,11 +11485,11 @@
             <a:r>
               <a:rPr lang="en-US" sz="1300" b="1" dirty="0">
                 <a:solidFill>
-                  <a:srgbClr val="D62828"/>
-                </a:solidFill>
-                <a:latin typeface="Arial" pitchFamily="34" charset="0"/>
-                <a:ea typeface="Arial" pitchFamily="34" charset="-122"/>
-                <a:cs typeface="Arial" pitchFamily="34" charset="-120"/>
+                  <a:srgbClr val="C8161D"/>
+                </a:solidFill>
+                <a:latin typeface="Arial" pitchFamily="34" charset="0"/>
+                <a:ea typeface="BIZ UDPGothic" pitchFamily="34" charset="-122"/>
+                <a:cs typeface="BIZ UDPGothic" pitchFamily="34" charset="-120"/>
               </a:rPr>
               <a:t>用語解説：連座制</a:t>
             </a:r>
@@ -11524,11 +11524,11 @@
             <a:r>
               <a:rPr lang="en-US" sz="1250" dirty="0">
                 <a:solidFill>
-                  <a:srgbClr val="CCCCCC"/>
-                </a:solidFill>
-                <a:latin typeface="Arial" pitchFamily="34" charset="0"/>
-                <a:ea typeface="Arial" pitchFamily="34" charset="-122"/>
-                <a:cs typeface="Arial" pitchFamily="34" charset="-120"/>
+                  <a:srgbClr val="2B2F36"/>
+                </a:solidFill>
+                <a:latin typeface="Arial" pitchFamily="34" charset="0"/>
+                <a:ea typeface="BIZ UDPGothic" pitchFamily="34" charset="-122"/>
+                <a:cs typeface="BIZ UDPGothic" pitchFamily="34" charset="-120"/>
               </a:rPr>
               <a:t>下請けの違反を見て見ぬふりをしていた発注元（元請け）にも、責任を問う仕組みのことです。</a:t>
             </a:r>
@@ -11553,11 +11553,11 @@
             </a:avLst>
           </a:prstGeom>
           <a:solidFill>
-            <a:srgbClr val="1A1A1A"/>
+            <a:srgbClr val="FFFFFF"/>
           </a:solidFill>
           <a:ln w="12700">
             <a:solidFill>
-              <a:srgbClr val="2E2E2E"/>
+              <a:srgbClr val="DDE0E6"/>
             </a:solidFill>
             <a:prstDash val="solid"/>
           </a:ln>
@@ -11590,11 +11590,11 @@
             <a:r>
               <a:rPr lang="en-US" sz="1350" b="1" dirty="0">
                 <a:solidFill>
-                  <a:srgbClr val="D62828"/>
-                </a:solidFill>
-                <a:latin typeface="Arial" pitchFamily="34" charset="0"/>
-                <a:ea typeface="Arial" pitchFamily="34" charset="-122"/>
-                <a:cs typeface="Arial" pitchFamily="34" charset="-120"/>
+                  <a:srgbClr val="C8161D"/>
+                </a:solidFill>
+                <a:latin typeface="Arial" pitchFamily="34" charset="0"/>
+                <a:ea typeface="BIZ UDPGothic" pitchFamily="34" charset="-122"/>
+                <a:cs typeface="BIZ UDPGothic" pitchFamily="34" charset="-120"/>
               </a:rPr>
               <a:t>通常違反</a:t>
             </a:r>
@@ -11629,11 +11629,11 @@
             <a:r>
               <a:rPr lang="en-US" sz="1250" dirty="0">
                 <a:solidFill>
-                  <a:srgbClr val="CCCCCC"/>
-                </a:solidFill>
-                <a:latin typeface="Arial" pitchFamily="34" charset="0"/>
-                <a:ea typeface="Arial" pitchFamily="34" charset="-122"/>
-                <a:cs typeface="Arial" pitchFamily="34" charset="-120"/>
+                  <a:srgbClr val="2B2F36"/>
+                </a:solidFill>
+                <a:latin typeface="Arial" pitchFamily="34" charset="0"/>
+                <a:ea typeface="BIZ UDPGothic" pitchFamily="34" charset="-122"/>
+                <a:cs typeface="BIZ UDPGothic" pitchFamily="34" charset="-120"/>
               </a:rPr>
               <a:t>法人税の加重課税（抑止力として）</a:t>
             </a:r>
@@ -11658,11 +11658,11 @@
             </a:avLst>
           </a:prstGeom>
           <a:solidFill>
-            <a:srgbClr val="1A1A1A"/>
+            <a:srgbClr val="FFFFFF"/>
           </a:solidFill>
           <a:ln w="12700">
             <a:solidFill>
-              <a:srgbClr val="2E2E2E"/>
+              <a:srgbClr val="DDE0E6"/>
             </a:solidFill>
             <a:prstDash val="solid"/>
           </a:ln>
@@ -11695,11 +11695,11 @@
             <a:r>
               <a:rPr lang="en-US" sz="1350" b="1" dirty="0">
                 <a:solidFill>
-                  <a:srgbClr val="D62828"/>
-                </a:solidFill>
-                <a:latin typeface="Arial" pitchFamily="34" charset="0"/>
-                <a:ea typeface="Arial" pitchFamily="34" charset="-122"/>
-                <a:cs typeface="Arial" pitchFamily="34" charset="-120"/>
+                  <a:srgbClr val="C8161D"/>
+                </a:solidFill>
+                <a:latin typeface="Arial" pitchFamily="34" charset="0"/>
+                <a:ea typeface="BIZ UDPGothic" pitchFamily="34" charset="-122"/>
+                <a:cs typeface="BIZ UDPGothic" pitchFamily="34" charset="-120"/>
               </a:rPr>
               <a:t>重大・反復違反</a:t>
             </a:r>
@@ -11734,11 +11734,11 @@
             <a:r>
               <a:rPr lang="en-US" sz="1250" dirty="0">
                 <a:solidFill>
-                  <a:srgbClr val="CCCCCC"/>
-                </a:solidFill>
-                <a:latin typeface="Arial" pitchFamily="34" charset="0"/>
-                <a:ea typeface="Arial" pitchFamily="34" charset="-122"/>
-                <a:cs typeface="Arial" pitchFamily="34" charset="-120"/>
+                  <a:srgbClr val="2B2F36"/>
+                </a:solidFill>
+                <a:latin typeface="Arial" pitchFamily="34" charset="0"/>
+                <a:ea typeface="BIZ UDPGothic" pitchFamily="34" charset="-122"/>
+                <a:cs typeface="BIZ UDPGothic" pitchFamily="34" charset="-120"/>
               </a:rPr>
               <a:t>官公庁の入札（公共工事などの受注）資格を停止（最終手段）</a:t>
             </a:r>
@@ -11763,11 +11763,11 @@
             </a:avLst>
           </a:prstGeom>
           <a:solidFill>
-            <a:srgbClr val="1A1A1A"/>
+            <a:srgbClr val="FFFFFF"/>
           </a:solidFill>
           <a:ln w="12700">
             <a:solidFill>
-              <a:srgbClr val="2E2E2E"/>
+              <a:srgbClr val="DDE0E6"/>
             </a:solidFill>
             <a:prstDash val="solid"/>
           </a:ln>
@@ -11800,11 +11800,11 @@
             <a:r>
               <a:rPr lang="en-US" sz="1350" b="1" dirty="0">
                 <a:solidFill>
-                  <a:srgbClr val="D62828"/>
-                </a:solidFill>
-                <a:latin typeface="Arial" pitchFamily="34" charset="0"/>
-                <a:ea typeface="Arial" pitchFamily="34" charset="-122"/>
-                <a:cs typeface="Arial" pitchFamily="34" charset="-120"/>
+                  <a:srgbClr val="C8161D"/>
+                </a:solidFill>
+                <a:latin typeface="Arial" pitchFamily="34" charset="0"/>
+                <a:ea typeface="BIZ UDPGothic" pitchFamily="34" charset="-122"/>
+                <a:cs typeface="BIZ UDPGothic" pitchFamily="34" charset="-120"/>
               </a:rPr>
               <a:t>災害・緊急時</a:t>
             </a:r>
@@ -11839,11 +11839,11 @@
             <a:r>
               <a:rPr lang="en-US" sz="1250" dirty="0">
                 <a:solidFill>
-                  <a:srgbClr val="CCCCCC"/>
-                </a:solidFill>
-                <a:latin typeface="Arial" pitchFamily="34" charset="0"/>
-                <a:ea typeface="Arial" pitchFamily="34" charset="-122"/>
-                <a:cs typeface="Arial" pitchFamily="34" charset="-120"/>
+                  <a:srgbClr val="2B2F36"/>
+                </a:solidFill>
+                <a:latin typeface="Arial" pitchFamily="34" charset="0"/>
+                <a:ea typeface="BIZ UDPGothic" pitchFamily="34" charset="-122"/>
+                <a:cs typeface="BIZ UDPGothic" pitchFamily="34" charset="-120"/>
               </a:rPr>
               <a:t>入札停止を自動的に解除する例外ルールを適用</a:t>
             </a:r>
@@ -11865,7 +11865,7 @@
     <p:bg>
       <p:bgPr>
         <a:solidFill>
-          <a:srgbClr val="0A0A0A"/>
+          <a:srgbClr val="F5F6F8"/>
         </a:solidFill>
       </p:bgPr>
     </p:bg>
@@ -11910,11 +11910,11 @@
             <a:r>
               <a:rPr lang="en-US" sz="1200" b="1" spc="300" kern="0" dirty="0">
                 <a:solidFill>
-                  <a:srgbClr val="D62828"/>
-                </a:solidFill>
-                <a:latin typeface="Arial" pitchFamily="34" charset="0"/>
-                <a:ea typeface="Arial" pitchFamily="34" charset="-122"/>
-                <a:cs typeface="Arial" pitchFamily="34" charset="-120"/>
+                  <a:srgbClr val="C8161D"/>
+                </a:solidFill>
+                <a:latin typeface="Arial" pitchFamily="34" charset="0"/>
+                <a:ea typeface="BIZ UDPGothic" pitchFamily="34" charset="-122"/>
+                <a:cs typeface="BIZ UDPGothic" pitchFamily="34" charset="-120"/>
               </a:rPr>
               <a:t>5. どう実現するのか</a:t>
             </a:r>
@@ -11949,11 +11949,11 @@
             <a:r>
               <a:rPr lang="en-US" sz="3200" b="1" dirty="0">
                 <a:solidFill>
-                  <a:srgbClr val="F5F5F0"/>
-                </a:solidFill>
-                <a:latin typeface="Arial" pitchFamily="34" charset="0"/>
-                <a:ea typeface="Arial" pitchFamily="34" charset="-122"/>
-                <a:cs typeface="Arial" pitchFamily="34" charset="-120"/>
+                  <a:srgbClr val="16181D"/>
+                </a:solidFill>
+                <a:latin typeface="Arial" pitchFamily="34" charset="0"/>
+                <a:ea typeface="BIZ UDPGothic" pitchFamily="34" charset="-122"/>
+                <a:cs typeface="BIZ UDPGothic" pitchFamily="34" charset="-120"/>
               </a:rPr>
               <a:t>いきなり変えない。2年間の「告知期間」</a:t>
             </a:r>
@@ -11988,11 +11988,11 @@
             <a:r>
               <a:rPr lang="en-US" sz="1000" dirty="0">
                 <a:solidFill>
-                  <a:srgbClr val="CCCCCC"/>
-                </a:solidFill>
-                <a:latin typeface="Arial" pitchFamily="34" charset="0"/>
-                <a:ea typeface="Arial" pitchFamily="34" charset="-122"/>
-                <a:cs typeface="Arial" pitchFamily="34" charset="-120"/>
+                  <a:srgbClr val="2B2F36"/>
+                </a:solidFill>
+                <a:latin typeface="Arial" pitchFamily="34" charset="0"/>
+                <a:ea typeface="BIZ UDPGothic" pitchFamily="34" charset="-122"/>
+                <a:cs typeface="BIZ UDPGothic" pitchFamily="34" charset="-120"/>
               </a:rPr>
               <a:t>22</a:t>
             </a:r>
@@ -12027,11 +12027,11 @@
             <a:r>
               <a:rPr lang="en-US" sz="900" dirty="0">
                 <a:solidFill>
-                  <a:srgbClr val="555555"/>
-                </a:solidFill>
-                <a:latin typeface="Arial" pitchFamily="34" charset="0"/>
-                <a:ea typeface="Arial" pitchFamily="34" charset="-122"/>
-                <a:cs typeface="Arial" pitchFamily="34" charset="-120"/>
+                  <a:srgbClr val="9AA0AA"/>
+                </a:solidFill>
+                <a:latin typeface="Arial" pitchFamily="34" charset="0"/>
+                <a:ea typeface="BIZ UDPGothic" pitchFamily="34" charset="-122"/>
+                <a:cs typeface="BIZ UDPGothic" pitchFamily="34" charset="-120"/>
               </a:rPr>
               <a:t>REBOOT JAPAN ── 提言003</a:t>
             </a:r>
@@ -12066,11 +12066,11 @@
             <a:r>
               <a:rPr lang="en-US" sz="1350" dirty="0">
                 <a:solidFill>
-                  <a:srgbClr val="CCCCCC"/>
-                </a:solidFill>
-                <a:latin typeface="Arial" pitchFamily="34" charset="0"/>
-                <a:ea typeface="Arial" pitchFamily="34" charset="-122"/>
-                <a:cs typeface="Arial" pitchFamily="34" charset="-120"/>
+                  <a:srgbClr val="2B2F36"/>
+                </a:solidFill>
+                <a:latin typeface="Arial" pitchFamily="34" charset="0"/>
+                <a:ea typeface="BIZ UDPGothic" pitchFamily="34" charset="-122"/>
+                <a:cs typeface="BIZ UDPGothic" pitchFamily="34" charset="-120"/>
               </a:rPr>
               <a:t>急な制度変更は、企業活動を混乱させます。各企業が準備できる時間をしっかり確保します。</a:t>
             </a:r>
@@ -12095,7 +12095,7 @@
           <a:noFill/>
           <a:ln w="25400">
             <a:solidFill>
-              <a:srgbClr val="2E2E2E"/>
+              <a:srgbClr val="DDE0E6"/>
             </a:solidFill>
             <a:prstDash val="solid"/>
           </a:ln>
@@ -12116,7 +12116,7 @@
             <a:avLst/>
           </a:prstGeom>
           <a:solidFill>
-            <a:srgbClr val="D62828"/>
+            <a:srgbClr val="C8161D"/>
           </a:solidFill>
           <a:ln/>
         </p:spPr>
@@ -12148,11 +12148,11 @@
             <a:r>
               <a:rPr lang="en-US" sz="1600" b="1" dirty="0">
                 <a:solidFill>
-                  <a:srgbClr val="F5F5F0"/>
-                </a:solidFill>
-                <a:latin typeface="Arial" pitchFamily="34" charset="0"/>
-                <a:ea typeface="Arial" pitchFamily="34" charset="-122"/>
-                <a:cs typeface="Arial" pitchFamily="34" charset="-120"/>
+                  <a:srgbClr val="FFFFFF"/>
+                </a:solidFill>
+                <a:latin typeface="Arial" pitchFamily="34" charset="0"/>
+                <a:ea typeface="BIZ UDPGothic" pitchFamily="34" charset="-122"/>
+                <a:cs typeface="BIZ UDPGothic" pitchFamily="34" charset="-120"/>
               </a:rPr>
               <a:t>1</a:t>
             </a:r>
@@ -12177,11 +12177,11 @@
             </a:avLst>
           </a:prstGeom>
           <a:solidFill>
-            <a:srgbClr val="1A1A1A"/>
+            <a:srgbClr val="FFFFFF"/>
           </a:solidFill>
           <a:ln w="12700">
             <a:solidFill>
-              <a:srgbClr val="2E2E2E"/>
+              <a:srgbClr val="DDE0E6"/>
             </a:solidFill>
             <a:prstDash val="solid"/>
           </a:ln>
@@ -12214,11 +12214,11 @@
             <a:r>
               <a:rPr lang="en-US" sz="1700" b="1" dirty="0">
                 <a:solidFill>
-                  <a:srgbClr val="F5F5F0"/>
-                </a:solidFill>
-                <a:latin typeface="Arial" pitchFamily="34" charset="0"/>
-                <a:ea typeface="Arial" pitchFamily="34" charset="-122"/>
-                <a:cs typeface="Arial" pitchFamily="34" charset="-120"/>
+                  <a:srgbClr val="16181D"/>
+                </a:solidFill>
+                <a:latin typeface="Arial" pitchFamily="34" charset="0"/>
+                <a:ea typeface="BIZ UDPGothic" pitchFamily="34" charset="-122"/>
+                <a:cs typeface="BIZ UDPGothic" pitchFamily="34" charset="-120"/>
               </a:rPr>
               <a:t>告知開始</a:t>
             </a:r>
@@ -12253,11 +12253,11 @@
             <a:r>
               <a:rPr lang="en-US" sz="1100" dirty="0">
                 <a:solidFill>
-                  <a:srgbClr val="D62828"/>
-                </a:solidFill>
-                <a:latin typeface="Arial" pitchFamily="34" charset="0"/>
-                <a:ea typeface="Arial" pitchFamily="34" charset="-122"/>
-                <a:cs typeface="Arial" pitchFamily="34" charset="-120"/>
+                  <a:srgbClr val="C8161D"/>
+                </a:solidFill>
+                <a:latin typeface="Arial" pitchFamily="34" charset="0"/>
+                <a:ea typeface="BIZ UDPGothic" pitchFamily="34" charset="-122"/>
+                <a:cs typeface="BIZ UDPGothic" pitchFamily="34" charset="-120"/>
               </a:rPr>
               <a:t>（制度開始の2年前）</a:t>
             </a:r>
@@ -12295,11 +12295,11 @@
             <a:r>
               <a:rPr lang="en-US" sz="1150" dirty="0">
                 <a:solidFill>
-                  <a:srgbClr val="CCCCCC"/>
-                </a:solidFill>
-                <a:latin typeface="Arial" pitchFamily="34" charset="0"/>
-                <a:ea typeface="Arial" pitchFamily="34" charset="-122"/>
-                <a:cs typeface="Arial" pitchFamily="34" charset="-120"/>
+                  <a:srgbClr val="2B2F36"/>
+                </a:solidFill>
+                <a:latin typeface="Arial" pitchFamily="34" charset="0"/>
+                <a:ea typeface="BIZ UDPGothic" pitchFamily="34" charset="-122"/>
+                <a:cs typeface="BIZ UDPGothic" pitchFamily="34" charset="-120"/>
               </a:rPr>
               <a:t>新しい制度の内容をすべて公表。各企業は合併・採用・賃金の計画を前もって考えられる</a:t>
             </a:r>
@@ -12322,7 +12322,7 @@
             <a:avLst/>
           </a:prstGeom>
           <a:solidFill>
-            <a:srgbClr val="D62828"/>
+            <a:srgbClr val="C8161D"/>
           </a:solidFill>
           <a:ln/>
         </p:spPr>
@@ -12354,11 +12354,11 @@
             <a:r>
               <a:rPr lang="en-US" sz="1600" b="1" dirty="0">
                 <a:solidFill>
-                  <a:srgbClr val="F5F5F0"/>
-                </a:solidFill>
-                <a:latin typeface="Arial" pitchFamily="34" charset="0"/>
-                <a:ea typeface="Arial" pitchFamily="34" charset="-122"/>
-                <a:cs typeface="Arial" pitchFamily="34" charset="-120"/>
+                  <a:srgbClr val="FFFFFF"/>
+                </a:solidFill>
+                <a:latin typeface="Arial" pitchFamily="34" charset="0"/>
+                <a:ea typeface="BIZ UDPGothic" pitchFamily="34" charset="-122"/>
+                <a:cs typeface="BIZ UDPGothic" pitchFamily="34" charset="-120"/>
               </a:rPr>
               <a:t>2</a:t>
             </a:r>
@@ -12383,11 +12383,11 @@
             </a:avLst>
           </a:prstGeom>
           <a:solidFill>
-            <a:srgbClr val="1A1A1A"/>
+            <a:srgbClr val="FFFFFF"/>
           </a:solidFill>
           <a:ln w="12700">
             <a:solidFill>
-              <a:srgbClr val="2E2E2E"/>
+              <a:srgbClr val="DDE0E6"/>
             </a:solidFill>
             <a:prstDash val="solid"/>
           </a:ln>
@@ -12420,11 +12420,11 @@
             <a:r>
               <a:rPr lang="en-US" sz="1700" b="1" dirty="0">
                 <a:solidFill>
-                  <a:srgbClr val="F5F5F0"/>
-                </a:solidFill>
-                <a:latin typeface="Arial" pitchFamily="34" charset="0"/>
-                <a:ea typeface="Arial" pitchFamily="34" charset="-122"/>
-                <a:cs typeface="Arial" pitchFamily="34" charset="-120"/>
+                  <a:srgbClr val="16181D"/>
+                </a:solidFill>
+                <a:latin typeface="Arial" pitchFamily="34" charset="0"/>
+                <a:ea typeface="BIZ UDPGothic" pitchFamily="34" charset="-122"/>
+                <a:cs typeface="BIZ UDPGothic" pitchFamily="34" charset="-120"/>
               </a:rPr>
               <a:t>準備期間</a:t>
             </a:r>
@@ -12459,11 +12459,11 @@
             <a:r>
               <a:rPr lang="en-US" sz="1100" dirty="0">
                 <a:solidFill>
-                  <a:srgbClr val="D62828"/>
-                </a:solidFill>
-                <a:latin typeface="Arial" pitchFamily="34" charset="0"/>
-                <a:ea typeface="Arial" pitchFamily="34" charset="-122"/>
-                <a:cs typeface="Arial" pitchFamily="34" charset="-120"/>
+                  <a:srgbClr val="C8161D"/>
+                </a:solidFill>
+                <a:latin typeface="Arial" pitchFamily="34" charset="0"/>
+                <a:ea typeface="BIZ UDPGothic" pitchFamily="34" charset="-122"/>
+                <a:cs typeface="BIZ UDPGothic" pitchFamily="34" charset="-120"/>
               </a:rPr>
               <a:t>（2年間）</a:t>
             </a:r>
@@ -12501,11 +12501,11 @@
             <a:r>
               <a:rPr lang="en-US" sz="1150" dirty="0">
                 <a:solidFill>
-                  <a:srgbClr val="CCCCCC"/>
-                </a:solidFill>
-                <a:latin typeface="Arial" pitchFamily="34" charset="0"/>
-                <a:ea typeface="Arial" pitchFamily="34" charset="-122"/>
-                <a:cs typeface="Arial" pitchFamily="34" charset="-120"/>
+                  <a:srgbClr val="2B2F36"/>
+                </a:solidFill>
+                <a:latin typeface="Arial" pitchFamily="34" charset="0"/>
+                <a:ea typeface="BIZ UDPGothic" pitchFamily="34" charset="-122"/>
+                <a:cs typeface="BIZ UDPGothic" pitchFamily="34" charset="-120"/>
               </a:rPr>
               <a:t>今の制度をそのまま継続。今の優遇と新しい優遇の間に「崖」を作らない</a:t>
             </a:r>
@@ -12528,7 +12528,7 @@
             <a:avLst/>
           </a:prstGeom>
           <a:solidFill>
-            <a:srgbClr val="D62828"/>
+            <a:srgbClr val="C8161D"/>
           </a:solidFill>
           <a:ln/>
         </p:spPr>
@@ -12560,11 +12560,11 @@
             <a:r>
               <a:rPr lang="en-US" sz="1600" b="1" dirty="0">
                 <a:solidFill>
-                  <a:srgbClr val="F5F5F0"/>
-                </a:solidFill>
-                <a:latin typeface="Arial" pitchFamily="34" charset="0"/>
-                <a:ea typeface="Arial" pitchFamily="34" charset="-122"/>
-                <a:cs typeface="Arial" pitchFamily="34" charset="-120"/>
+                  <a:srgbClr val="FFFFFF"/>
+                </a:solidFill>
+                <a:latin typeface="Arial" pitchFamily="34" charset="0"/>
+                <a:ea typeface="BIZ UDPGothic" pitchFamily="34" charset="-122"/>
+                <a:cs typeface="BIZ UDPGothic" pitchFamily="34" charset="-120"/>
               </a:rPr>
               <a:t>3</a:t>
             </a:r>
@@ -12589,11 +12589,11 @@
             </a:avLst>
           </a:prstGeom>
           <a:solidFill>
-            <a:srgbClr val="1A1A1A"/>
+            <a:srgbClr val="FFFFFF"/>
           </a:solidFill>
           <a:ln w="12700">
             <a:solidFill>
-              <a:srgbClr val="2E2E2E"/>
+              <a:srgbClr val="DDE0E6"/>
             </a:solidFill>
             <a:prstDash val="solid"/>
           </a:ln>
@@ -12626,11 +12626,11 @@
             <a:r>
               <a:rPr lang="en-US" sz="1700" b="1" dirty="0">
                 <a:solidFill>
-                  <a:srgbClr val="F5F5F0"/>
-                </a:solidFill>
-                <a:latin typeface="Arial" pitchFamily="34" charset="0"/>
-                <a:ea typeface="Arial" pitchFamily="34" charset="-122"/>
-                <a:cs typeface="Arial" pitchFamily="34" charset="-120"/>
+                  <a:srgbClr val="16181D"/>
+                </a:solidFill>
+                <a:latin typeface="Arial" pitchFamily="34" charset="0"/>
+                <a:ea typeface="BIZ UDPGothic" pitchFamily="34" charset="-122"/>
+                <a:cs typeface="BIZ UDPGothic" pitchFamily="34" charset="-120"/>
               </a:rPr>
               <a:t>制度スタート</a:t>
             </a:r>
@@ -12665,11 +12665,11 @@
             <a:r>
               <a:rPr lang="en-US" sz="1100" dirty="0">
                 <a:solidFill>
-                  <a:srgbClr val="D62828"/>
-                </a:solidFill>
-                <a:latin typeface="Arial" pitchFamily="34" charset="0"/>
-                <a:ea typeface="Arial" pitchFamily="34" charset="-122"/>
-                <a:cs typeface="Arial" pitchFamily="34" charset="-120"/>
+                  <a:srgbClr val="C8161D"/>
+                </a:solidFill>
+                <a:latin typeface="Arial" pitchFamily="34" charset="0"/>
+                <a:ea typeface="BIZ UDPGothic" pitchFamily="34" charset="-122"/>
+                <a:cs typeface="BIZ UDPGothic" pitchFamily="34" charset="-120"/>
               </a:rPr>
               <a:t>（Y年）</a:t>
             </a:r>
@@ -12707,11 +12707,11 @@
             <a:r>
               <a:rPr lang="en-US" sz="1150" dirty="0">
                 <a:solidFill>
-                  <a:srgbClr val="CCCCCC"/>
-                </a:solidFill>
-                <a:latin typeface="Arial" pitchFamily="34" charset="0"/>
-                <a:ea typeface="Arial" pitchFamily="34" charset="-122"/>
-                <a:cs typeface="Arial" pitchFamily="34" charset="-120"/>
+                  <a:srgbClr val="2B2F36"/>
+                </a:solidFill>
+                <a:latin typeface="Arial" pitchFamily="34" charset="0"/>
+                <a:ea typeface="BIZ UDPGothic" pitchFamily="34" charset="-122"/>
+                <a:cs typeface="BIZ UDPGothic" pitchFamily="34" charset="-120"/>
               </a:rPr>
               <a:t>新しい制度が本格的に始まる。合併が集中して起きることは、むしろ歓迎。補助金の廃止も同時実施</a:t>
             </a:r>
@@ -12733,7 +12733,7 @@
     <p:bg>
       <p:bgPr>
         <a:solidFill>
-          <a:srgbClr val="0A0A0A"/>
+          <a:srgbClr val="F5F6F8"/>
         </a:solidFill>
       </p:bgPr>
     </p:bg>
@@ -12778,11 +12778,11 @@
             <a:r>
               <a:rPr lang="en-US" sz="1200" b="1" spc="300" kern="0" dirty="0">
                 <a:solidFill>
-                  <a:srgbClr val="D62828"/>
-                </a:solidFill>
-                <a:latin typeface="Arial" pitchFamily="34" charset="0"/>
-                <a:ea typeface="Arial" pitchFamily="34" charset="-122"/>
-                <a:cs typeface="Arial" pitchFamily="34" charset="-120"/>
+                  <a:srgbClr val="C8161D"/>
+                </a:solidFill>
+                <a:latin typeface="Arial" pitchFamily="34" charset="0"/>
+                <a:ea typeface="BIZ UDPGothic" pitchFamily="34" charset="-122"/>
+                <a:cs typeface="BIZ UDPGothic" pitchFamily="34" charset="-120"/>
               </a:rPr>
               <a:t>5. 10年後の数値目標</a:t>
             </a:r>
@@ -12817,11 +12817,11 @@
             <a:r>
               <a:rPr lang="en-US" sz="3200" b="1" dirty="0">
                 <a:solidFill>
-                  <a:srgbClr val="F5F5F0"/>
-                </a:solidFill>
-                <a:latin typeface="Arial" pitchFamily="34" charset="0"/>
-                <a:ea typeface="Arial" pitchFamily="34" charset="-122"/>
-                <a:cs typeface="Arial" pitchFamily="34" charset="-120"/>
+                  <a:srgbClr val="16181D"/>
+                </a:solidFill>
+                <a:latin typeface="Arial" pitchFamily="34" charset="0"/>
+                <a:ea typeface="BIZ UDPGothic" pitchFamily="34" charset="-122"/>
+                <a:cs typeface="BIZ UDPGothic" pitchFamily="34" charset="-120"/>
               </a:rPr>
               <a:t>10年後、何をどこまで実現するか</a:t>
             </a:r>
@@ -12856,11 +12856,11 @@
             <a:r>
               <a:rPr lang="en-US" sz="1000" dirty="0">
                 <a:solidFill>
-                  <a:srgbClr val="CCCCCC"/>
-                </a:solidFill>
-                <a:latin typeface="Arial" pitchFamily="34" charset="0"/>
-                <a:ea typeface="Arial" pitchFamily="34" charset="-122"/>
-                <a:cs typeface="Arial" pitchFamily="34" charset="-120"/>
+                  <a:srgbClr val="2B2F36"/>
+                </a:solidFill>
+                <a:latin typeface="Arial" pitchFamily="34" charset="0"/>
+                <a:ea typeface="BIZ UDPGothic" pitchFamily="34" charset="-122"/>
+                <a:cs typeface="BIZ UDPGothic" pitchFamily="34" charset="-120"/>
               </a:rPr>
               <a:t>23</a:t>
             </a:r>
@@ -12895,11 +12895,11 @@
             <a:r>
               <a:rPr lang="en-US" sz="900" dirty="0">
                 <a:solidFill>
-                  <a:srgbClr val="555555"/>
-                </a:solidFill>
-                <a:latin typeface="Arial" pitchFamily="34" charset="0"/>
-                <a:ea typeface="Arial" pitchFamily="34" charset="-122"/>
-                <a:cs typeface="Arial" pitchFamily="34" charset="-120"/>
+                  <a:srgbClr val="9AA0AA"/>
+                </a:solidFill>
+                <a:latin typeface="Arial" pitchFamily="34" charset="0"/>
+                <a:ea typeface="BIZ UDPGothic" pitchFamily="34" charset="-122"/>
+                <a:cs typeface="BIZ UDPGothic" pitchFamily="34" charset="-120"/>
               </a:rPr>
               <a:t>REBOOT JAPAN ── 提言003</a:t>
             </a:r>
@@ -12924,11 +12924,11 @@
             </a:avLst>
           </a:prstGeom>
           <a:solidFill>
-            <a:srgbClr val="1A1A1A"/>
+            <a:srgbClr val="FFFFFF"/>
           </a:solidFill>
           <a:ln w="12700">
             <a:solidFill>
-              <a:srgbClr val="2E2E2E"/>
+              <a:srgbClr val="DDE0E6"/>
             </a:solidFill>
             <a:prstDash val="solid"/>
           </a:ln>
@@ -12961,11 +12961,11 @@
             <a:r>
               <a:rPr lang="en-US" sz="1500" b="1" dirty="0">
                 <a:solidFill>
-                  <a:srgbClr val="F5F5F0"/>
-                </a:solidFill>
-                <a:latin typeface="Arial" pitchFamily="34" charset="0"/>
-                <a:ea typeface="Arial" pitchFamily="34" charset="-122"/>
-                <a:cs typeface="Arial" pitchFamily="34" charset="-120"/>
+                  <a:srgbClr val="16181D"/>
+                </a:solidFill>
+                <a:latin typeface="Arial" pitchFamily="34" charset="0"/>
+                <a:ea typeface="BIZ UDPGothic" pitchFamily="34" charset="-122"/>
+                <a:cs typeface="BIZ UDPGothic" pitchFamily="34" charset="-120"/>
               </a:rPr>
               <a:t>中堅企業数</a:t>
             </a:r>
@@ -13000,11 +13000,11 @@
             <a:r>
               <a:rPr lang="en-US" sz="2600" b="1" dirty="0">
                 <a:solidFill>
-                  <a:srgbClr val="D62828"/>
-                </a:solidFill>
-                <a:latin typeface="Arial" pitchFamily="34" charset="0"/>
-                <a:ea typeface="Arial" pitchFamily="34" charset="-122"/>
-                <a:cs typeface="Arial" pitchFamily="34" charset="-120"/>
+                  <a:srgbClr val="C8161D"/>
+                </a:solidFill>
+                <a:latin typeface="Arial" pitchFamily="34" charset="0"/>
+                <a:ea typeface="BIZ UDPGothic" pitchFamily="34" charset="-122"/>
+                <a:cs typeface="BIZ UDPGothic" pitchFamily="34" charset="-120"/>
               </a:rPr>
               <a:t>9,229社 → 約27,000社</a:t>
             </a:r>
@@ -13039,11 +13039,11 @@
             <a:r>
               <a:rPr lang="en-US" sz="1300" dirty="0">
                 <a:solidFill>
-                  <a:srgbClr val="CCCCCC"/>
-                </a:solidFill>
-                <a:latin typeface="Arial" pitchFamily="34" charset="0"/>
-                <a:ea typeface="Arial" pitchFamily="34" charset="-122"/>
-                <a:cs typeface="Arial" pitchFamily="34" charset="-120"/>
+                  <a:srgbClr val="2B2F36"/>
+                </a:solidFill>
+                <a:latin typeface="Arial" pitchFamily="34" charset="0"/>
+                <a:ea typeface="BIZ UDPGothic" pitchFamily="34" charset="-122"/>
+                <a:cs typeface="BIZ UDPGothic" pitchFamily="34" charset="-120"/>
               </a:rPr>
               <a:t>0.7% → 2.1%（3倍増）</a:t>
             </a:r>
@@ -13081,11 +13081,11 @@
             <a:r>
               <a:rPr lang="en-US" sz="1250" dirty="0">
                 <a:solidFill>
-                  <a:srgbClr val="999999"/>
-                </a:solidFill>
-                <a:latin typeface="Arial" pitchFamily="34" charset="0"/>
-                <a:ea typeface="Arial" pitchFamily="34" charset="-122"/>
-                <a:cs typeface="Arial" pitchFamily="34" charset="-120"/>
+                  <a:srgbClr val="4B515C"/>
+                </a:solidFill>
+                <a:latin typeface="Arial" pitchFamily="34" charset="0"/>
+                <a:ea typeface="BIZ UDPGothic" pitchFamily="34" charset="-122"/>
+                <a:cs typeface="BIZ UDPGothic" pitchFamily="34" charset="-120"/>
               </a:rPr>
               <a:t>年間およそ1,800社ペースでの増加が目標です。</a:t>
             </a:r>
@@ -13110,11 +13110,11 @@
             </a:avLst>
           </a:prstGeom>
           <a:solidFill>
-            <a:srgbClr val="1A1A1A"/>
+            <a:srgbClr val="FFFFFF"/>
           </a:solidFill>
           <a:ln w="12700">
             <a:solidFill>
-              <a:srgbClr val="2E2E2E"/>
+              <a:srgbClr val="DDE0E6"/>
             </a:solidFill>
             <a:prstDash val="solid"/>
           </a:ln>
@@ -13147,11 +13147,11 @@
             <a:r>
               <a:rPr lang="en-US" sz="1500" b="1" dirty="0">
                 <a:solidFill>
-                  <a:srgbClr val="F5F5F0"/>
-                </a:solidFill>
-                <a:latin typeface="Arial" pitchFamily="34" charset="0"/>
-                <a:ea typeface="Arial" pitchFamily="34" charset="-122"/>
-                <a:cs typeface="Arial" pitchFamily="34" charset="-120"/>
+                  <a:srgbClr val="16181D"/>
+                </a:solidFill>
+                <a:latin typeface="Arial" pitchFamily="34" charset="0"/>
+                <a:ea typeface="BIZ UDPGothic" pitchFamily="34" charset="-122"/>
+                <a:cs typeface="BIZ UDPGothic" pitchFamily="34" charset="-120"/>
               </a:rPr>
               <a:t>赤字法人の割合</a:t>
             </a:r>
@@ -13186,11 +13186,11 @@
             <a:r>
               <a:rPr lang="en-US" sz="2600" b="1" dirty="0">
                 <a:solidFill>
-                  <a:srgbClr val="D62828"/>
-                </a:solidFill>
-                <a:latin typeface="Arial" pitchFamily="34" charset="0"/>
-                <a:ea typeface="Arial" pitchFamily="34" charset="-122"/>
-                <a:cs typeface="Arial" pitchFamily="34" charset="-120"/>
+                  <a:srgbClr val="C8161D"/>
+                </a:solidFill>
+                <a:latin typeface="Arial" pitchFamily="34" charset="0"/>
+                <a:ea typeface="BIZ UDPGothic" pitchFamily="34" charset="-122"/>
+                <a:cs typeface="BIZ UDPGothic" pitchFamily="34" charset="-120"/>
               </a:rPr>
               <a:t>61% → 10〜20%</a:t>
             </a:r>
@@ -13225,11 +13225,11 @@
             <a:r>
               <a:rPr lang="en-US" sz="1200" dirty="0">
                 <a:solidFill>
-                  <a:srgbClr val="CCCCCC"/>
-                </a:solidFill>
-                <a:latin typeface="Arial" pitchFamily="34" charset="0"/>
-                <a:ea typeface="Arial" pitchFamily="34" charset="-122"/>
-                <a:cs typeface="Arial" pitchFamily="34" charset="-120"/>
+                  <a:srgbClr val="2B2F36"/>
+                </a:solidFill>
+                <a:latin typeface="Arial" pitchFamily="34" charset="0"/>
+                <a:ea typeface="BIZ UDPGothic" pitchFamily="34" charset="-122"/>
+                <a:cs typeface="BIZ UDPGothic" pitchFamily="34" charset="-120"/>
               </a:rPr>
               <a:t>（10年平均63〜64% → 10年平均10〜20%）</a:t>
             </a:r>
@@ -13267,11 +13267,11 @@
             <a:r>
               <a:rPr lang="en-US" sz="1250" dirty="0">
                 <a:solidFill>
-                  <a:srgbClr val="999999"/>
-                </a:solidFill>
-                <a:latin typeface="Arial" pitchFamily="34" charset="0"/>
-                <a:ea typeface="Arial" pitchFamily="34" charset="-122"/>
-                <a:cs typeface="Arial" pitchFamily="34" charset="-120"/>
+                  <a:srgbClr val="4B515C"/>
+                </a:solidFill>
+                <a:latin typeface="Arial" pitchFamily="34" charset="0"/>
+                <a:ea typeface="BIZ UDPGothic" pitchFamily="34" charset="-122"/>
+                <a:cs typeface="BIZ UDPGothic" pitchFamily="34" charset="-120"/>
               </a:rPr>
               <a:t>「作られた赤字」を取り締まり、本来の利益にきちんと税金がかかる状態を目指します。</a:t>
             </a:r>
@@ -13306,11 +13306,11 @@
             <a:r>
               <a:rPr lang="en-US" sz="1250" i="1" dirty="0">
                 <a:solidFill>
-                  <a:srgbClr val="D62828"/>
-                </a:solidFill>
-                <a:latin typeface="Arial" pitchFamily="34" charset="0"/>
-                <a:ea typeface="Arial" pitchFamily="34" charset="-122"/>
-                <a:cs typeface="Arial" pitchFamily="34" charset="-120"/>
+                  <a:srgbClr val="C8161D"/>
+                </a:solidFill>
+                <a:latin typeface="Arial" pitchFamily="34" charset="0"/>
+                <a:ea typeface="BIZ UDPGothic" pitchFamily="34" charset="-122"/>
+                <a:cs typeface="BIZ UDPGothic" pitchFamily="34" charset="-120"/>
               </a:rPr>
               <a:t>「中堅企業27,000社」の達成が、この制度を縮小していい合図になります。</a:t>
             </a:r>
@@ -13332,7 +13332,7 @@
     <p:bg>
       <p:bgPr>
         <a:solidFill>
-          <a:srgbClr val="0A0A0A"/>
+          <a:srgbClr val="F5F6F8"/>
         </a:solidFill>
       </p:bgPr>
     </p:bg>
@@ -13377,11 +13377,11 @@
             <a:r>
               <a:rPr lang="en-US" sz="1200" b="1" spc="300" kern="0" dirty="0">
                 <a:solidFill>
-                  <a:srgbClr val="D62828"/>
-                </a:solidFill>
-                <a:latin typeface="Arial" pitchFamily="34" charset="0"/>
-                <a:ea typeface="Arial" pitchFamily="34" charset="-122"/>
-                <a:cs typeface="Arial" pitchFamily="34" charset="-120"/>
+                  <a:srgbClr val="C8161D"/>
+                </a:solidFill>
+                <a:latin typeface="Arial" pitchFamily="34" charset="0"/>
+                <a:ea typeface="BIZ UDPGothic" pitchFamily="34" charset="-122"/>
+                <a:cs typeface="BIZ UDPGothic" pitchFamily="34" charset="-120"/>
               </a:rPr>
               <a:t>6. 結果どうなるのか</a:t>
             </a:r>
@@ -13416,11 +13416,11 @@
             <a:r>
               <a:rPr lang="en-US" sz="3200" b="1" dirty="0">
                 <a:solidFill>
-                  <a:srgbClr val="F5F5F0"/>
-                </a:solidFill>
-                <a:latin typeface="Arial" pitchFamily="34" charset="0"/>
-                <a:ea typeface="Arial" pitchFamily="34" charset="-122"/>
-                <a:cs typeface="Arial" pitchFamily="34" charset="-120"/>
+                  <a:srgbClr val="16181D"/>
+                </a:solidFill>
+                <a:latin typeface="Arial" pitchFamily="34" charset="0"/>
+                <a:ea typeface="BIZ UDPGothic" pitchFamily="34" charset="-122"/>
+                <a:cs typeface="BIZ UDPGothic" pitchFamily="34" charset="-120"/>
               </a:rPr>
               <a:t>国の税収はどう変わるか（試算）</a:t>
             </a:r>
@@ -13455,11 +13455,11 @@
             <a:r>
               <a:rPr lang="en-US" sz="1000" dirty="0">
                 <a:solidFill>
-                  <a:srgbClr val="CCCCCC"/>
-                </a:solidFill>
-                <a:latin typeface="Arial" pitchFamily="34" charset="0"/>
-                <a:ea typeface="Arial" pitchFamily="34" charset="-122"/>
-                <a:cs typeface="Arial" pitchFamily="34" charset="-120"/>
+                  <a:srgbClr val="2B2F36"/>
+                </a:solidFill>
+                <a:latin typeface="Arial" pitchFamily="34" charset="0"/>
+                <a:ea typeface="BIZ UDPGothic" pitchFamily="34" charset="-122"/>
+                <a:cs typeface="BIZ UDPGothic" pitchFamily="34" charset="-120"/>
               </a:rPr>
               <a:t>24</a:t>
             </a:r>
@@ -13494,11 +13494,11 @@
             <a:r>
               <a:rPr lang="en-US" sz="900" dirty="0">
                 <a:solidFill>
-                  <a:srgbClr val="555555"/>
-                </a:solidFill>
-                <a:latin typeface="Arial" pitchFamily="34" charset="0"/>
-                <a:ea typeface="Arial" pitchFamily="34" charset="-122"/>
-                <a:cs typeface="Arial" pitchFamily="34" charset="-120"/>
+                  <a:srgbClr val="9AA0AA"/>
+                </a:solidFill>
+                <a:latin typeface="Arial" pitchFamily="34" charset="0"/>
+                <a:ea typeface="BIZ UDPGothic" pitchFamily="34" charset="-122"/>
+                <a:cs typeface="BIZ UDPGothic" pitchFamily="34" charset="-120"/>
               </a:rPr>
               <a:t>REBOOT JAPAN ── 提言003</a:t>
             </a:r>
@@ -13536,11 +13536,11 @@
             <a:r>
               <a:rPr lang="en-US" sz="1100" dirty="0">
                 <a:solidFill>
-                  <a:srgbClr val="999999"/>
-                </a:solidFill>
-                <a:latin typeface="Arial" pitchFamily="34" charset="0"/>
-                <a:ea typeface="Arial" pitchFamily="34" charset="-122"/>
-                <a:cs typeface="Arial" pitchFamily="34" charset="-120"/>
+                  <a:srgbClr val="4B515C"/>
+                </a:solidFill>
+                <a:latin typeface="Arial" pitchFamily="34" charset="0"/>
+                <a:ea typeface="BIZ UDPGothic" pitchFamily="34" charset="-122"/>
+                <a:cs typeface="BIZ UDPGothic" pitchFamily="34" charset="-120"/>
               </a:rPr>
               <a:t>前提：対象3業種の中小・零細企業 約100万社／黒字会社 約39万社／条件達成率40%／インフレ率3%。所得税は今の税率のままで計算（控えめな試算）</a:t>
             </a:r>
@@ -13563,11 +13563,11 @@
             <a:avLst/>
           </a:prstGeom>
           <a:solidFill>
-            <a:srgbClr val="1A1A1A"/>
+            <a:srgbClr val="FFFFFF"/>
           </a:solidFill>
           <a:ln w="6350">
             <a:solidFill>
-              <a:srgbClr val="2E2E2E"/>
+              <a:srgbClr val="DDE0E6"/>
             </a:solidFill>
             <a:prstDash val="solid"/>
           </a:ln>
@@ -13588,11 +13588,11 @@
             <a:avLst/>
           </a:prstGeom>
           <a:solidFill>
-            <a:srgbClr val="1A1A1A"/>
+            <a:srgbClr val="FFFFFF"/>
           </a:solidFill>
           <a:ln w="6350">
             <a:solidFill>
-              <a:srgbClr val="2E2E2E"/>
+              <a:srgbClr val="DDE0E6"/>
             </a:solidFill>
             <a:prstDash val="solid"/>
           </a:ln>
@@ -13625,11 +13625,11 @@
             <a:r>
               <a:rPr lang="en-US" sz="1200" dirty="0">
                 <a:solidFill>
-                  <a:srgbClr val="CCCCCC"/>
-                </a:solidFill>
-                <a:latin typeface="Arial" pitchFamily="34" charset="0"/>
-                <a:ea typeface="Arial" pitchFamily="34" charset="-122"/>
-                <a:cs typeface="Arial" pitchFamily="34" charset="-120"/>
+                  <a:srgbClr val="2B2F36"/>
+                </a:solidFill>
+                <a:latin typeface="Arial" pitchFamily="34" charset="0"/>
+                <a:ea typeface="BIZ UDPGothic" pitchFamily="34" charset="-122"/>
+                <a:cs typeface="BIZ UDPGothic" pitchFamily="34" charset="-120"/>
               </a:rPr>
               <a:t>法人税フラット化＋条件優遇による増収</a:t>
             </a:r>
@@ -13664,11 +13664,11 @@
             <a:r>
               <a:rPr lang="en-US" sz="1250" b="1" dirty="0">
                 <a:solidFill>
-                  <a:srgbClr val="F5F5F0"/>
-                </a:solidFill>
-                <a:latin typeface="Arial" pitchFamily="34" charset="0"/>
-                <a:ea typeface="Arial" pitchFamily="34" charset="-122"/>
-                <a:cs typeface="Arial" pitchFamily="34" charset="-120"/>
+                  <a:srgbClr val="16181D"/>
+                </a:solidFill>
+                <a:latin typeface="Arial" pitchFamily="34" charset="0"/>
+                <a:ea typeface="BIZ UDPGothic" pitchFamily="34" charset="-122"/>
+                <a:cs typeface="BIZ UDPGothic" pitchFamily="34" charset="-120"/>
               </a:rPr>
               <a:t>+約2,500億円</a:t>
             </a:r>
@@ -13691,11 +13691,11 @@
             <a:avLst/>
           </a:prstGeom>
           <a:solidFill>
-            <a:srgbClr val="0A0A0A"/>
+            <a:srgbClr val="F5F6F8"/>
           </a:solidFill>
           <a:ln w="6350">
             <a:solidFill>
-              <a:srgbClr val="2E2E2E"/>
+              <a:srgbClr val="DDE0E6"/>
             </a:solidFill>
             <a:prstDash val="solid"/>
           </a:ln>
@@ -13716,11 +13716,11 @@
             <a:avLst/>
           </a:prstGeom>
           <a:solidFill>
-            <a:srgbClr val="0A0A0A"/>
+            <a:srgbClr val="F5F6F8"/>
           </a:solidFill>
           <a:ln w="6350">
             <a:solidFill>
-              <a:srgbClr val="2E2E2E"/>
+              <a:srgbClr val="DDE0E6"/>
             </a:solidFill>
             <a:prstDash val="solid"/>
           </a:ln>
@@ -13753,11 +13753,11 @@
             <a:r>
               <a:rPr lang="en-US" sz="1200" dirty="0">
                 <a:solidFill>
-                  <a:srgbClr val="CCCCCC"/>
-                </a:solidFill>
-                <a:latin typeface="Arial" pitchFamily="34" charset="0"/>
-                <a:ea typeface="Arial" pitchFamily="34" charset="-122"/>
-                <a:cs typeface="Arial" pitchFamily="34" charset="-120"/>
+                  <a:srgbClr val="2B2F36"/>
+                </a:solidFill>
+                <a:latin typeface="Arial" pitchFamily="34" charset="0"/>
+                <a:ea typeface="BIZ UDPGothic" pitchFamily="34" charset="-122"/>
+                <a:cs typeface="BIZ UDPGothic" pitchFamily="34" charset="-120"/>
               </a:rPr>
               <a:t>所得税増収（賃金3.6%増・280万人）</a:t>
             </a:r>
@@ -13792,11 +13792,11 @@
             <a:r>
               <a:rPr lang="en-US" sz="1250" b="1" dirty="0">
                 <a:solidFill>
-                  <a:srgbClr val="F5F5F0"/>
-                </a:solidFill>
-                <a:latin typeface="Arial" pitchFamily="34" charset="0"/>
-                <a:ea typeface="Arial" pitchFamily="34" charset="-122"/>
-                <a:cs typeface="Arial" pitchFamily="34" charset="-120"/>
+                  <a:srgbClr val="16181D"/>
+                </a:solidFill>
+                <a:latin typeface="Arial" pitchFamily="34" charset="0"/>
+                <a:ea typeface="BIZ UDPGothic" pitchFamily="34" charset="-122"/>
+                <a:cs typeface="BIZ UDPGothic" pitchFamily="34" charset="-120"/>
               </a:rPr>
               <a:t>+約3,800億円</a:t>
             </a:r>
@@ -13819,11 +13819,11 @@
             <a:avLst/>
           </a:prstGeom>
           <a:solidFill>
-            <a:srgbClr val="1A1A1A"/>
+            <a:srgbClr val="FFFFFF"/>
           </a:solidFill>
           <a:ln w="6350">
             <a:solidFill>
-              <a:srgbClr val="2E2E2E"/>
+              <a:srgbClr val="DDE0E6"/>
             </a:solidFill>
             <a:prstDash val="solid"/>
           </a:ln>
@@ -13844,11 +13844,11 @@
             <a:avLst/>
           </a:prstGeom>
           <a:solidFill>
-            <a:srgbClr val="1A1A1A"/>
+            <a:srgbClr val="FFFFFF"/>
           </a:solidFill>
           <a:ln w="6350">
             <a:solidFill>
-              <a:srgbClr val="2E2E2E"/>
+              <a:srgbClr val="DDE0E6"/>
             </a:solidFill>
             <a:prstDash val="solid"/>
           </a:ln>
@@ -13881,11 +13881,11 @@
             <a:r>
               <a:rPr lang="en-US" sz="1200" dirty="0">
                 <a:solidFill>
-                  <a:srgbClr val="CCCCCC"/>
-                </a:solidFill>
-                <a:latin typeface="Arial" pitchFamily="34" charset="0"/>
-                <a:ea typeface="Arial" pitchFamily="34" charset="-122"/>
-                <a:cs typeface="Arial" pitchFamily="34" charset="-120"/>
+                  <a:srgbClr val="2B2F36"/>
+                </a:solidFill>
+                <a:latin typeface="Arial" pitchFamily="34" charset="0"/>
+                <a:ea typeface="BIZ UDPGothic" pitchFamily="34" charset="-122"/>
+                <a:cs typeface="BIZ UDPGothic" pitchFamily="34" charset="-120"/>
               </a:rPr>
               <a:t>社会保険料増収</a:t>
             </a:r>
@@ -13920,11 +13920,11 @@
             <a:r>
               <a:rPr lang="en-US" sz="1250" b="1" dirty="0">
                 <a:solidFill>
-                  <a:srgbClr val="F5F5F0"/>
-                </a:solidFill>
-                <a:latin typeface="Arial" pitchFamily="34" charset="0"/>
-                <a:ea typeface="Arial" pitchFamily="34" charset="-122"/>
-                <a:cs typeface="Arial" pitchFamily="34" charset="-120"/>
+                  <a:srgbClr val="16181D"/>
+                </a:solidFill>
+                <a:latin typeface="Arial" pitchFamily="34" charset="0"/>
+                <a:ea typeface="BIZ UDPGothic" pitchFamily="34" charset="-122"/>
+                <a:cs typeface="BIZ UDPGothic" pitchFamily="34" charset="-120"/>
               </a:rPr>
               <a:t>+約1.1兆円</a:t>
             </a:r>
@@ -13947,11 +13947,11 @@
             <a:avLst/>
           </a:prstGeom>
           <a:solidFill>
-            <a:srgbClr val="0A0A0A"/>
+            <a:srgbClr val="F5F6F8"/>
           </a:solidFill>
           <a:ln w="6350">
             <a:solidFill>
-              <a:srgbClr val="2E2E2E"/>
+              <a:srgbClr val="DDE0E6"/>
             </a:solidFill>
             <a:prstDash val="solid"/>
           </a:ln>
@@ -13972,11 +13972,11 @@
             <a:avLst/>
           </a:prstGeom>
           <a:solidFill>
-            <a:srgbClr val="0A0A0A"/>
+            <a:srgbClr val="F5F6F8"/>
           </a:solidFill>
           <a:ln w="6350">
             <a:solidFill>
-              <a:srgbClr val="2E2E2E"/>
+              <a:srgbClr val="DDE0E6"/>
             </a:solidFill>
             <a:prstDash val="solid"/>
           </a:ln>
@@ -14009,11 +14009,11 @@
             <a:r>
               <a:rPr lang="en-US" sz="1200" dirty="0">
                 <a:solidFill>
-                  <a:srgbClr val="CCCCCC"/>
-                </a:solidFill>
-                <a:latin typeface="Arial" pitchFamily="34" charset="0"/>
-                <a:ea typeface="Arial" pitchFamily="34" charset="-122"/>
-                <a:cs typeface="Arial" pitchFamily="34" charset="-120"/>
+                  <a:srgbClr val="2B2F36"/>
+                </a:solidFill>
+                <a:latin typeface="Arial" pitchFamily="34" charset="0"/>
+                <a:ea typeface="BIZ UDPGothic" pitchFamily="34" charset="-122"/>
+                <a:cs typeface="BIZ UDPGothic" pitchFamily="34" charset="-120"/>
               </a:rPr>
               <a:t>消費税増収（消費の拡大分）</a:t>
             </a:r>
@@ -14048,11 +14048,11 @@
             <a:r>
               <a:rPr lang="en-US" sz="1250" b="1" dirty="0">
                 <a:solidFill>
-                  <a:srgbClr val="F5F5F0"/>
-                </a:solidFill>
-                <a:latin typeface="Arial" pitchFamily="34" charset="0"/>
-                <a:ea typeface="Arial" pitchFamily="34" charset="-122"/>
-                <a:cs typeface="Arial" pitchFamily="34" charset="-120"/>
+                  <a:srgbClr val="16181D"/>
+                </a:solidFill>
+                <a:latin typeface="Arial" pitchFamily="34" charset="0"/>
+                <a:ea typeface="BIZ UDPGothic" pitchFamily="34" charset="-122"/>
+                <a:cs typeface="BIZ UDPGothic" pitchFamily="34" charset="-120"/>
               </a:rPr>
               <a:t>+約3,400億円</a:t>
             </a:r>
@@ -14075,11 +14075,11 @@
             <a:avLst/>
           </a:prstGeom>
           <a:solidFill>
-            <a:srgbClr val="1A1A1A"/>
+            <a:srgbClr val="FFFFFF"/>
           </a:solidFill>
           <a:ln w="6350">
             <a:solidFill>
-              <a:srgbClr val="2E2E2E"/>
+              <a:srgbClr val="DDE0E6"/>
             </a:solidFill>
             <a:prstDash val="solid"/>
           </a:ln>
@@ -14100,11 +14100,11 @@
             <a:avLst/>
           </a:prstGeom>
           <a:solidFill>
-            <a:srgbClr val="1A1A1A"/>
+            <a:srgbClr val="FFFFFF"/>
           </a:solidFill>
           <a:ln w="6350">
             <a:solidFill>
-              <a:srgbClr val="2E2E2E"/>
+              <a:srgbClr val="DDE0E6"/>
             </a:solidFill>
             <a:prstDash val="solid"/>
           </a:ln>
@@ -14137,11 +14137,11 @@
             <a:r>
               <a:rPr lang="en-US" sz="1200" dirty="0">
                 <a:solidFill>
-                  <a:srgbClr val="CCCCCC"/>
-                </a:solidFill>
-                <a:latin typeface="Arial" pitchFamily="34" charset="0"/>
-                <a:ea typeface="Arial" pitchFamily="34" charset="-122"/>
-                <a:cs typeface="Arial" pitchFamily="34" charset="-120"/>
+                  <a:srgbClr val="2B2F36"/>
+                </a:solidFill>
+                <a:latin typeface="Arial" pitchFamily="34" charset="0"/>
+                <a:ea typeface="BIZ UDPGothic" pitchFamily="34" charset="-122"/>
+                <a:cs typeface="BIZ UDPGothic" pitchFamily="34" charset="-120"/>
               </a:rPr>
               <a:t>補助金廃止による歳出削減</a:t>
             </a:r>
@@ -14176,11 +14176,11 @@
             <a:r>
               <a:rPr lang="en-US" sz="1250" b="1" dirty="0">
                 <a:solidFill>
-                  <a:srgbClr val="F5F5F0"/>
-                </a:solidFill>
-                <a:latin typeface="Arial" pitchFamily="34" charset="0"/>
-                <a:ea typeface="Arial" pitchFamily="34" charset="-122"/>
-                <a:cs typeface="Arial" pitchFamily="34" charset="-120"/>
+                  <a:srgbClr val="16181D"/>
+                </a:solidFill>
+                <a:latin typeface="Arial" pitchFamily="34" charset="0"/>
+                <a:ea typeface="BIZ UDPGothic" pitchFamily="34" charset="-122"/>
+                <a:cs typeface="BIZ UDPGothic" pitchFamily="34" charset="-120"/>
               </a:rPr>
               <a:t>+約1〜2兆円</a:t>
             </a:r>
@@ -14203,11 +14203,11 @@
             <a:avLst/>
           </a:prstGeom>
           <a:solidFill>
-            <a:srgbClr val="0A0A0A"/>
+            <a:srgbClr val="F5F6F8"/>
           </a:solidFill>
           <a:ln w="6350">
             <a:solidFill>
-              <a:srgbClr val="2E2E2E"/>
+              <a:srgbClr val="DDE0E6"/>
             </a:solidFill>
             <a:prstDash val="solid"/>
           </a:ln>
@@ -14228,11 +14228,11 @@
             <a:avLst/>
           </a:prstGeom>
           <a:solidFill>
-            <a:srgbClr val="0A0A0A"/>
+            <a:srgbClr val="F5F6F8"/>
           </a:solidFill>
           <a:ln w="6350">
             <a:solidFill>
-              <a:srgbClr val="2E2E2E"/>
+              <a:srgbClr val="DDE0E6"/>
             </a:solidFill>
             <a:prstDash val="solid"/>
           </a:ln>
@@ -14265,11 +14265,11 @@
             <a:r>
               <a:rPr lang="en-US" sz="1200" dirty="0">
                 <a:solidFill>
-                  <a:srgbClr val="CCCCCC"/>
-                </a:solidFill>
-                <a:latin typeface="Arial" pitchFamily="34" charset="0"/>
-                <a:ea typeface="Arial" pitchFamily="34" charset="-122"/>
-                <a:cs typeface="Arial" pitchFamily="34" charset="-120"/>
+                  <a:srgbClr val="2B2F36"/>
+                </a:solidFill>
+                <a:latin typeface="Arial" pitchFamily="34" charset="0"/>
+                <a:ea typeface="BIZ UDPGothic" pitchFamily="34" charset="-122"/>
+                <a:cs typeface="BIZ UDPGothic" pitchFamily="34" charset="-120"/>
               </a:rPr>
               <a:t>赤字法人の黒字化による法人税増収</a:t>
             </a:r>
@@ -14304,11 +14304,11 @@
             <a:r>
               <a:rPr lang="en-US" sz="1250" b="1" dirty="0">
                 <a:solidFill>
-                  <a:srgbClr val="F5F5F0"/>
-                </a:solidFill>
-                <a:latin typeface="Arial" pitchFamily="34" charset="0"/>
-                <a:ea typeface="Arial" pitchFamily="34" charset="-122"/>
-                <a:cs typeface="Arial" pitchFamily="34" charset="-120"/>
+                  <a:srgbClr val="16181D"/>
+                </a:solidFill>
+                <a:latin typeface="Arial" pitchFamily="34" charset="0"/>
+                <a:ea typeface="BIZ UDPGothic" pitchFamily="34" charset="-122"/>
+                <a:cs typeface="BIZ UDPGothic" pitchFamily="34" charset="-120"/>
               </a:rPr>
               <a:t>+約1.5兆円</a:t>
             </a:r>
@@ -14331,7 +14331,7 @@
             <a:avLst/>
           </a:prstGeom>
           <a:solidFill>
-            <a:srgbClr val="A01F1F"/>
+            <a:srgbClr val="9E1016"/>
           </a:solidFill>
           <a:ln/>
         </p:spPr>
@@ -14351,7 +14351,7 @@
             <a:avLst/>
           </a:prstGeom>
           <a:solidFill>
-            <a:srgbClr val="A01F1F"/>
+            <a:srgbClr val="9E1016"/>
           </a:solidFill>
           <a:ln/>
         </p:spPr>
@@ -14383,11 +14383,11 @@
             <a:r>
               <a:rPr lang="en-US" sz="1500" b="1" dirty="0">
                 <a:solidFill>
-                  <a:srgbClr val="F5F5F0"/>
-                </a:solidFill>
-                <a:latin typeface="Arial" pitchFamily="34" charset="0"/>
-                <a:ea typeface="Arial" pitchFamily="34" charset="-122"/>
-                <a:cs typeface="Arial" pitchFamily="34" charset="-120"/>
+                  <a:srgbClr val="FFFFFF"/>
+                </a:solidFill>
+                <a:latin typeface="Arial" pitchFamily="34" charset="0"/>
+                <a:ea typeface="BIZ UDPGothic" pitchFamily="34" charset="-122"/>
+                <a:cs typeface="BIZ UDPGothic" pitchFamily="34" charset="-120"/>
               </a:rPr>
               <a:t>合計</a:t>
             </a:r>
@@ -14422,11 +14422,11 @@
             <a:r>
               <a:rPr lang="en-US" sz="1500" b="1" dirty="0">
                 <a:solidFill>
-                  <a:srgbClr val="F5F5F0"/>
-                </a:solidFill>
-                <a:latin typeface="Arial" pitchFamily="34" charset="0"/>
-                <a:ea typeface="Arial" pitchFamily="34" charset="-122"/>
-                <a:cs typeface="Arial" pitchFamily="34" charset="-120"/>
+                  <a:srgbClr val="FFFFFF"/>
+                </a:solidFill>
+                <a:latin typeface="Arial" pitchFamily="34" charset="0"/>
+                <a:ea typeface="BIZ UDPGothic" pitchFamily="34" charset="-122"/>
+                <a:cs typeface="BIZ UDPGothic" pitchFamily="34" charset="-120"/>
               </a:rPr>
               <a:t>+約4.6〜5.6兆円/年</a:t>
             </a:r>
@@ -14461,11 +14461,11 @@
             <a:r>
               <a:rPr lang="en-US" sz="1200" dirty="0">
                 <a:solidFill>
-                  <a:srgbClr val="999999"/>
-                </a:solidFill>
-                <a:latin typeface="Arial" pitchFamily="34" charset="0"/>
-                <a:ea typeface="Arial" pitchFamily="34" charset="-122"/>
-                <a:cs typeface="Arial" pitchFamily="34" charset="-120"/>
+                  <a:srgbClr val="4B515C"/>
+                </a:solidFill>
+                <a:latin typeface="Arial" pitchFamily="34" charset="0"/>
+                <a:ea typeface="BIZ UDPGothic" pitchFamily="34" charset="-122"/>
+                <a:cs typeface="BIZ UDPGothic" pitchFamily="34" charset="-120"/>
               </a:rPr>
               <a:t>最初の年は今の制度のまま。3年後あたりからプラス効果が見え始める設計です。</a:t>
             </a:r>
@@ -14487,7 +14487,7 @@
     <p:bg>
       <p:bgPr>
         <a:solidFill>
-          <a:srgbClr val="0A0A0A"/>
+          <a:srgbClr val="F5F6F8"/>
         </a:solidFill>
       </p:bgPr>
     </p:bg>
@@ -14532,11 +14532,11 @@
             <a:r>
               <a:rPr lang="en-US" sz="1200" b="1" spc="300" kern="0" dirty="0">
                 <a:solidFill>
-                  <a:srgbClr val="D62828"/>
-                </a:solidFill>
-                <a:latin typeface="Arial" pitchFamily="34" charset="0"/>
-                <a:ea typeface="Arial" pitchFamily="34" charset="-122"/>
-                <a:cs typeface="Arial" pitchFamily="34" charset="-120"/>
+                  <a:srgbClr val="C8161D"/>
+                </a:solidFill>
+                <a:latin typeface="Arial" pitchFamily="34" charset="0"/>
+                <a:ea typeface="BIZ UDPGothic" pitchFamily="34" charset="-122"/>
+                <a:cs typeface="BIZ UDPGothic" pitchFamily="34" charset="-120"/>
               </a:rPr>
               <a:t>6. 10年後の日本経済</a:t>
             </a:r>
@@ -14571,11 +14571,11 @@
             <a:r>
               <a:rPr lang="en-US" sz="3200" b="1" dirty="0">
                 <a:solidFill>
-                  <a:srgbClr val="F5F5F0"/>
-                </a:solidFill>
-                <a:latin typeface="Arial" pitchFamily="34" charset="0"/>
-                <a:ea typeface="Arial" pitchFamily="34" charset="-122"/>
-                <a:cs typeface="Arial" pitchFamily="34" charset="-120"/>
+                  <a:srgbClr val="16181D"/>
+                </a:solidFill>
+                <a:latin typeface="Arial" pitchFamily="34" charset="0"/>
+                <a:ea typeface="BIZ UDPGothic" pitchFamily="34" charset="-122"/>
+                <a:cs typeface="BIZ UDPGothic" pitchFamily="34" charset="-120"/>
               </a:rPr>
               <a:t>10年後、日本経済はこうなっている</a:t>
             </a:r>
@@ -14610,11 +14610,11 @@
             <a:r>
               <a:rPr lang="en-US" sz="1000" dirty="0">
                 <a:solidFill>
-                  <a:srgbClr val="CCCCCC"/>
-                </a:solidFill>
-                <a:latin typeface="Arial" pitchFamily="34" charset="0"/>
-                <a:ea typeface="Arial" pitchFamily="34" charset="-122"/>
-                <a:cs typeface="Arial" pitchFamily="34" charset="-120"/>
+                  <a:srgbClr val="2B2F36"/>
+                </a:solidFill>
+                <a:latin typeface="Arial" pitchFamily="34" charset="0"/>
+                <a:ea typeface="BIZ UDPGothic" pitchFamily="34" charset="-122"/>
+                <a:cs typeface="BIZ UDPGothic" pitchFamily="34" charset="-120"/>
               </a:rPr>
               <a:t>25</a:t>
             </a:r>
@@ -14649,11 +14649,11 @@
             <a:r>
               <a:rPr lang="en-US" sz="900" dirty="0">
                 <a:solidFill>
-                  <a:srgbClr val="555555"/>
-                </a:solidFill>
-                <a:latin typeface="Arial" pitchFamily="34" charset="0"/>
-                <a:ea typeface="Arial" pitchFamily="34" charset="-122"/>
-                <a:cs typeface="Arial" pitchFamily="34" charset="-120"/>
+                  <a:srgbClr val="9AA0AA"/>
+                </a:solidFill>
+                <a:latin typeface="Arial" pitchFamily="34" charset="0"/>
+                <a:ea typeface="BIZ UDPGothic" pitchFamily="34" charset="-122"/>
+                <a:cs typeface="BIZ UDPGothic" pitchFamily="34" charset="-120"/>
               </a:rPr>
               <a:t>REBOOT JAPAN ── 提言003</a:t>
             </a:r>
@@ -14678,11 +14678,11 @@
             </a:avLst>
           </a:prstGeom>
           <a:solidFill>
-            <a:srgbClr val="1A1A1A"/>
+            <a:srgbClr val="FFFFFF"/>
           </a:solidFill>
           <a:ln w="12700">
             <a:solidFill>
-              <a:srgbClr val="2E2E2E"/>
+              <a:srgbClr val="DDE0E6"/>
             </a:solidFill>
             <a:prstDash val="solid"/>
           </a:ln>
@@ -14703,11 +14703,11 @@
             <a:avLst/>
           </a:prstGeom>
           <a:solidFill>
-            <a:srgbClr val="0A0A0A"/>
+            <a:srgbClr val="F5F6F8"/>
           </a:solidFill>
           <a:ln w="12700">
             <a:solidFill>
-              <a:srgbClr val="2E2E2E"/>
+              <a:srgbClr val="DDE0E6"/>
             </a:solidFill>
             <a:prstDash val="solid"/>
           </a:ln>
@@ -14764,11 +14764,11 @@
             <a:r>
               <a:rPr lang="en-US" sz="1600" b="1" dirty="0">
                 <a:solidFill>
-                  <a:srgbClr val="F5F5F0"/>
-                </a:solidFill>
-                <a:latin typeface="Arial" pitchFamily="34" charset="0"/>
-                <a:ea typeface="Arial" pitchFamily="34" charset="-122"/>
-                <a:cs typeface="Arial" pitchFamily="34" charset="-120"/>
+                  <a:srgbClr val="16181D"/>
+                </a:solidFill>
+                <a:latin typeface="Arial" pitchFamily="34" charset="0"/>
+                <a:ea typeface="BIZ UDPGothic" pitchFamily="34" charset="-122"/>
+                <a:cs typeface="BIZ UDPGothic" pitchFamily="34" charset="-120"/>
               </a:rPr>
               <a:t>① 成長を拒む経営者の自然な退場</a:t>
             </a:r>
@@ -14806,11 +14806,11 @@
             <a:r>
               <a:rPr lang="en-US" sz="1250" dirty="0">
                 <a:solidFill>
-                  <a:srgbClr val="CCCCCC"/>
-                </a:solidFill>
-                <a:latin typeface="Arial" pitchFamily="34" charset="0"/>
-                <a:ea typeface="Arial" pitchFamily="34" charset="-122"/>
-                <a:cs typeface="Arial" pitchFamily="34" charset="-120"/>
+                  <a:srgbClr val="2B2F36"/>
+                </a:solidFill>
+                <a:latin typeface="Arial" pitchFamily="34" charset="0"/>
+                <a:ea typeface="BIZ UDPGothic" pitchFamily="34" charset="-122"/>
+                <a:cs typeface="BIZ UDPGothic" pitchFamily="34" charset="-120"/>
               </a:rPr>
               <a:t>成長する気のない経営者は会社を続けられず、引退するか、成長したい会社に売却する</a:t>
             </a:r>
@@ -14835,11 +14835,11 @@
             </a:avLst>
           </a:prstGeom>
           <a:solidFill>
-            <a:srgbClr val="1A1A1A"/>
+            <a:srgbClr val="FFFFFF"/>
           </a:solidFill>
           <a:ln w="12700">
             <a:solidFill>
-              <a:srgbClr val="2E2E2E"/>
+              <a:srgbClr val="DDE0E6"/>
             </a:solidFill>
             <a:prstDash val="solid"/>
           </a:ln>
@@ -14860,11 +14860,11 @@
             <a:avLst/>
           </a:prstGeom>
           <a:solidFill>
-            <a:srgbClr val="0A0A0A"/>
+            <a:srgbClr val="F5F6F8"/>
           </a:solidFill>
           <a:ln w="12700">
             <a:solidFill>
-              <a:srgbClr val="2E2E2E"/>
+              <a:srgbClr val="DDE0E6"/>
             </a:solidFill>
             <a:prstDash val="solid"/>
           </a:ln>
@@ -14921,11 +14921,11 @@
             <a:r>
               <a:rPr lang="en-US" sz="1600" b="1" dirty="0">
                 <a:solidFill>
-                  <a:srgbClr val="F5F5F0"/>
-                </a:solidFill>
-                <a:latin typeface="Arial" pitchFamily="34" charset="0"/>
-                <a:ea typeface="Arial" pitchFamily="34" charset="-122"/>
-                <a:cs typeface="Arial" pitchFamily="34" charset="-120"/>
+                  <a:srgbClr val="16181D"/>
+                </a:solidFill>
+                <a:latin typeface="Arial" pitchFamily="34" charset="0"/>
+                <a:ea typeface="BIZ UDPGothic" pitchFamily="34" charset="-122"/>
+                <a:cs typeface="BIZ UDPGothic" pitchFamily="34" charset="-120"/>
               </a:rPr>
               <a:t>② 強い中堅企業が、世界で戦える</a:t>
             </a:r>
@@ -14963,11 +14963,11 @@
             <a:r>
               <a:rPr lang="en-US" sz="1250" dirty="0">
                 <a:solidFill>
-                  <a:srgbClr val="CCCCCC"/>
-                </a:solidFill>
-                <a:latin typeface="Arial" pitchFamily="34" charset="0"/>
-                <a:ea typeface="Arial" pitchFamily="34" charset="-122"/>
-                <a:cs typeface="Arial" pitchFamily="34" charset="-120"/>
+                  <a:srgbClr val="2B2F36"/>
+                </a:solidFill>
+                <a:latin typeface="Arial" pitchFamily="34" charset="0"/>
+                <a:ea typeface="BIZ UDPGothic" pitchFamily="34" charset="-122"/>
+                <a:cs typeface="BIZ UDPGothic" pitchFamily="34" charset="-120"/>
               </a:rPr>
               <a:t>条件をクリアした会社だけが生き残り、発注元と対等に交渉できるようになる</a:t>
             </a:r>
@@ -14992,11 +14992,11 @@
             </a:avLst>
           </a:prstGeom>
           <a:solidFill>
-            <a:srgbClr val="1A1A1A"/>
+            <a:srgbClr val="FFFFFF"/>
           </a:solidFill>
           <a:ln w="12700">
             <a:solidFill>
-              <a:srgbClr val="2E2E2E"/>
+              <a:srgbClr val="DDE0E6"/>
             </a:solidFill>
             <a:prstDash val="solid"/>
           </a:ln>
@@ -15017,11 +15017,11 @@
             <a:avLst/>
           </a:prstGeom>
           <a:solidFill>
-            <a:srgbClr val="0A0A0A"/>
+            <a:srgbClr val="F5F6F8"/>
           </a:solidFill>
           <a:ln w="12700">
             <a:solidFill>
-              <a:srgbClr val="2E2E2E"/>
+              <a:srgbClr val="DDE0E6"/>
             </a:solidFill>
             <a:prstDash val="solid"/>
           </a:ln>
@@ -15078,11 +15078,11 @@
             <a:r>
               <a:rPr lang="en-US" sz="1600" b="1" dirty="0">
                 <a:solidFill>
-                  <a:srgbClr val="F5F5F0"/>
-                </a:solidFill>
-                <a:latin typeface="Arial" pitchFamily="34" charset="0"/>
-                <a:ea typeface="Arial" pitchFamily="34" charset="-122"/>
-                <a:cs typeface="Arial" pitchFamily="34" charset="-120"/>
+                  <a:srgbClr val="16181D"/>
+                </a:solidFill>
+                <a:latin typeface="Arial" pitchFamily="34" charset="0"/>
+                <a:ea typeface="BIZ UDPGothic" pitchFamily="34" charset="-122"/>
+                <a:cs typeface="BIZ UDPGothic" pitchFamily="34" charset="-120"/>
               </a:rPr>
               <a:t>③ 働く人の給料が劇的に上がる</a:t>
             </a:r>
@@ -15120,11 +15120,11 @@
             <a:r>
               <a:rPr lang="en-US" sz="1250" dirty="0">
                 <a:solidFill>
-                  <a:srgbClr val="CCCCCC"/>
-                </a:solidFill>
-                <a:latin typeface="Arial" pitchFamily="34" charset="0"/>
-                <a:ea typeface="Arial" pitchFamily="34" charset="-122"/>
-                <a:cs typeface="Arial" pitchFamily="34" charset="-120"/>
+                  <a:srgbClr val="2B2F36"/>
+                </a:solidFill>
+                <a:latin typeface="Arial" pitchFamily="34" charset="0"/>
+                <a:ea typeface="BIZ UDPGothic" pitchFamily="34" charset="-122"/>
+                <a:cs typeface="BIZ UDPGothic" pitchFamily="34" charset="-120"/>
               </a:rPr>
               <a:t>中抜き構造がなくなり、提言001の最低賃金2,000円と組み合わさって、本当の意味で救われる</a:t>
             </a:r>
@@ -15149,11 +15149,11 @@
             </a:avLst>
           </a:prstGeom>
           <a:solidFill>
-            <a:srgbClr val="1A1A1A"/>
+            <a:srgbClr val="FFFFFF"/>
           </a:solidFill>
           <a:ln w="12700">
             <a:solidFill>
-              <a:srgbClr val="2E2E2E"/>
+              <a:srgbClr val="DDE0E6"/>
             </a:solidFill>
             <a:prstDash val="solid"/>
           </a:ln>
@@ -15174,11 +15174,11 @@
             <a:avLst/>
           </a:prstGeom>
           <a:solidFill>
-            <a:srgbClr val="0A0A0A"/>
+            <a:srgbClr val="F5F6F8"/>
           </a:solidFill>
           <a:ln w="12700">
             <a:solidFill>
-              <a:srgbClr val="2E2E2E"/>
+              <a:srgbClr val="DDE0E6"/>
             </a:solidFill>
             <a:prstDash val="solid"/>
           </a:ln>
@@ -15235,11 +15235,11 @@
             <a:r>
               <a:rPr lang="en-US" sz="1600" b="1" dirty="0">
                 <a:solidFill>
-                  <a:srgbClr val="F5F5F0"/>
-                </a:solidFill>
-                <a:latin typeface="Arial" pitchFamily="34" charset="0"/>
-                <a:ea typeface="Arial" pitchFamily="34" charset="-122"/>
-                <a:cs typeface="Arial" pitchFamily="34" charset="-120"/>
+                  <a:srgbClr val="16181D"/>
+                </a:solidFill>
+                <a:latin typeface="Arial" pitchFamily="34" charset="0"/>
+                <a:ea typeface="BIZ UDPGothic" pitchFamily="34" charset="-122"/>
+                <a:cs typeface="BIZ UDPGothic" pitchFamily="34" charset="-120"/>
               </a:rPr>
               <a:t>④ 国の財政が健全になる</a:t>
             </a:r>
@@ -15277,11 +15277,11 @@
             <a:r>
               <a:rPr lang="en-US" sz="1250" dirty="0">
                 <a:solidFill>
-                  <a:srgbClr val="CCCCCC"/>
-                </a:solidFill>
-                <a:latin typeface="Arial" pitchFamily="34" charset="0"/>
-                <a:ea typeface="Arial" pitchFamily="34" charset="-122"/>
-                <a:cs typeface="Arial" pitchFamily="34" charset="-120"/>
+                  <a:srgbClr val="2B2F36"/>
+                </a:solidFill>
+                <a:latin typeface="Arial" pitchFamily="34" charset="0"/>
+                <a:ea typeface="BIZ UDPGothic" pitchFamily="34" charset="-122"/>
+                <a:cs typeface="BIZ UDPGothic" pitchFamily="34" charset="-120"/>
               </a:rPr>
               <a:t>補助金削減＋赤字法人の正常化＋賃金上昇で、年間4.6〜5.6兆円の財政改善効果</a:t>
             </a:r>
@@ -15303,7 +15303,7 @@
     <p:bg>
       <p:bgPr>
         <a:solidFill>
-          <a:srgbClr val="0A0A0A"/>
+          <a:srgbClr val="F5F6F8"/>
         </a:solidFill>
       </p:bgPr>
     </p:bg>
@@ -15348,11 +15348,11 @@
             <a:r>
               <a:rPr lang="en-US" sz="1200" b="1" spc="300" kern="0" dirty="0">
                 <a:solidFill>
-                  <a:srgbClr val="D62828"/>
-                </a:solidFill>
-                <a:latin typeface="Arial" pitchFamily="34" charset="0"/>
-                <a:ea typeface="Arial" pitchFamily="34" charset="-122"/>
-                <a:cs typeface="Arial" pitchFamily="34" charset="-120"/>
+                  <a:srgbClr val="C8161D"/>
+                </a:solidFill>
+                <a:latin typeface="Arial" pitchFamily="34" charset="0"/>
+                <a:ea typeface="BIZ UDPGothic" pitchFamily="34" charset="-122"/>
+                <a:cs typeface="BIZ UDPGothic" pitchFamily="34" charset="-120"/>
               </a:rPr>
               <a:t>まとめ</a:t>
             </a:r>
@@ -15387,11 +15387,11 @@
             <a:r>
               <a:rPr lang="en-US" sz="1000" dirty="0">
                 <a:solidFill>
-                  <a:srgbClr val="CCCCCC"/>
-                </a:solidFill>
-                <a:latin typeface="Arial" pitchFamily="34" charset="0"/>
-                <a:ea typeface="Arial" pitchFamily="34" charset="-122"/>
-                <a:cs typeface="Arial" pitchFamily="34" charset="-120"/>
+                  <a:srgbClr val="2B2F36"/>
+                </a:solidFill>
+                <a:latin typeface="Arial" pitchFamily="34" charset="0"/>
+                <a:ea typeface="BIZ UDPGothic" pitchFamily="34" charset="-122"/>
+                <a:cs typeface="BIZ UDPGothic" pitchFamily="34" charset="-120"/>
               </a:rPr>
               <a:t>26</a:t>
             </a:r>
@@ -15426,11 +15426,11 @@
             <a:r>
               <a:rPr lang="en-US" sz="900" dirty="0">
                 <a:solidFill>
-                  <a:srgbClr val="555555"/>
-                </a:solidFill>
-                <a:latin typeface="Arial" pitchFamily="34" charset="0"/>
-                <a:ea typeface="Arial" pitchFamily="34" charset="-122"/>
-                <a:cs typeface="Arial" pitchFamily="34" charset="-120"/>
+                  <a:srgbClr val="9AA0AA"/>
+                </a:solidFill>
+                <a:latin typeface="Arial" pitchFamily="34" charset="0"/>
+                <a:ea typeface="BIZ UDPGothic" pitchFamily="34" charset="-122"/>
+                <a:cs typeface="BIZ UDPGothic" pitchFamily="34" charset="-120"/>
               </a:rPr>
               <a:t>REBOOT JAPAN ── 提言003</a:t>
             </a:r>
@@ -15468,11 +15468,11 @@
             <a:r>
               <a:rPr lang="en-US" sz="2400" b="1" dirty="0">
                 <a:solidFill>
-                  <a:srgbClr val="F5F5F0"/>
-                </a:solidFill>
-                <a:latin typeface="Arial" pitchFamily="34" charset="0"/>
-                <a:ea typeface="Arial" pitchFamily="34" charset="-122"/>
-                <a:cs typeface="Arial" pitchFamily="34" charset="-120"/>
+                  <a:srgbClr val="16181D"/>
+                </a:solidFill>
+                <a:latin typeface="Arial" pitchFamily="34" charset="0"/>
+                <a:ea typeface="BIZ UDPGothic" pitchFamily="34" charset="-122"/>
+                <a:cs typeface="BIZ UDPGothic" pitchFamily="34" charset="-120"/>
               </a:rPr>
               <a:t>「雇用を増やし、賃金を上げた会社を、とことん優遇する」</a:t>
             </a:r>
@@ -15510,11 +15510,11 @@
             <a:r>
               <a:rPr lang="en-US" sz="1500" dirty="0">
                 <a:solidFill>
-                  <a:srgbClr val="CCCCCC"/>
-                </a:solidFill>
-                <a:latin typeface="Arial" pitchFamily="34" charset="0"/>
-                <a:ea typeface="Arial" pitchFamily="34" charset="-122"/>
-                <a:cs typeface="Arial" pitchFamily="34" charset="-120"/>
+                  <a:srgbClr val="2B2F36"/>
+                </a:solidFill>
+                <a:latin typeface="Arial" pitchFamily="34" charset="0"/>
+                <a:ea typeface="BIZ UDPGothic" pitchFamily="34" charset="-122"/>
+                <a:cs typeface="BIZ UDPGothic" pitchFamily="34" charset="-120"/>
               </a:rPr>
               <a:t>誰も表立って反対しにくい、前向きな大義名分を掲げながら、その中身は「成長しない会社・ズルをする会社に、市場から退場してもらう」という、日本経済を立て直すための、最も冷静で効果的なロジックです。</a:t>
             </a:r>
@@ -15552,11 +15552,11 @@
             <a:r>
               <a:rPr lang="en-US" sz="1500" dirty="0">
                 <a:solidFill>
-                  <a:srgbClr val="CCCCCC"/>
-                </a:solidFill>
-                <a:latin typeface="Arial" pitchFamily="34" charset="0"/>
-                <a:ea typeface="Arial" pitchFamily="34" charset="-122"/>
-                <a:cs typeface="Arial" pitchFamily="34" charset="-120"/>
+                  <a:srgbClr val="2B2F36"/>
+                </a:solidFill>
+                <a:latin typeface="Arial" pitchFamily="34" charset="0"/>
+                <a:ea typeface="BIZ UDPGothic" pitchFamily="34" charset="-122"/>
+                <a:cs typeface="BIZ UDPGothic" pitchFamily="34" charset="-120"/>
               </a:rPr>
               <a:t>そして、市場から退場することになった会社で働いていた人たちは、提言001のセーフティネットが確実に受け止めます。</a:t>
             </a:r>
@@ -15581,7 +15581,7 @@
           <a:noFill/>
           <a:ln w="12700">
             <a:solidFill>
-              <a:srgbClr val="2E2E2E"/>
+              <a:srgbClr val="DDE0E6"/>
             </a:solidFill>
             <a:prstDash val="solid"/>
           </a:ln>
@@ -15614,11 +15614,11 @@
             <a:r>
               <a:rPr lang="en-US" sz="3000" b="1" dirty="0">
                 <a:solidFill>
-                  <a:srgbClr val="D62828"/>
-                </a:solidFill>
-                <a:latin typeface="Arial" pitchFamily="34" charset="0"/>
-                <a:ea typeface="Arial" pitchFamily="34" charset="-122"/>
-                <a:cs typeface="Arial" pitchFamily="34" charset="-120"/>
+                  <a:srgbClr val="C8161D"/>
+                </a:solidFill>
+                <a:latin typeface="Arial" pitchFamily="34" charset="0"/>
+                <a:ea typeface="BIZ UDPGothic" pitchFamily="34" charset="-122"/>
+                <a:cs typeface="BIZ UDPGothic" pitchFamily="34" charset="-120"/>
               </a:rPr>
               <a:t>強さと優しさは、矛盾しない。</a:t>
             </a:r>
@@ -15640,7 +15640,7 @@
     <p:bg>
       <p:bgPr>
         <a:solidFill>
-          <a:srgbClr val="0A0A0A"/>
+          <a:srgbClr val="F5F6F8"/>
         </a:solidFill>
       </p:bgPr>
     </p:bg>
@@ -15685,11 +15685,11 @@
             <a:r>
               <a:rPr lang="en-US" sz="1200" b="1" spc="300" kern="0" dirty="0">
                 <a:solidFill>
-                  <a:srgbClr val="D62828"/>
-                </a:solidFill>
-                <a:latin typeface="Arial" pitchFamily="34" charset="0"/>
-                <a:ea typeface="Arial" pitchFamily="34" charset="-122"/>
-                <a:cs typeface="Arial" pitchFamily="34" charset="-120"/>
+                  <a:srgbClr val="C8161D"/>
+                </a:solidFill>
+                <a:latin typeface="Arial" pitchFamily="34" charset="0"/>
+                <a:ea typeface="BIZ UDPGothic" pitchFamily="34" charset="-122"/>
+                <a:cs typeface="BIZ UDPGothic" pitchFamily="34" charset="-120"/>
               </a:rPr>
               <a:t>0. 提言001とのつながり</a:t>
             </a:r>
@@ -15724,11 +15724,11 @@
             <a:r>
               <a:rPr lang="en-US" sz="3200" b="1" dirty="0">
                 <a:solidFill>
-                  <a:srgbClr val="F5F5F0"/>
-                </a:solidFill>
-                <a:latin typeface="Arial" pitchFamily="34" charset="0"/>
-                <a:ea typeface="Arial" pitchFamily="34" charset="-122"/>
-                <a:cs typeface="Arial" pitchFamily="34" charset="-120"/>
+                  <a:srgbClr val="16181D"/>
+                </a:solidFill>
+                <a:latin typeface="Arial" pitchFamily="34" charset="0"/>
+                <a:ea typeface="BIZ UDPGothic" pitchFamily="34" charset="-122"/>
+                <a:cs typeface="BIZ UDPGothic" pitchFamily="34" charset="-120"/>
               </a:rPr>
               <a:t>この提言は、提言001と「セット」で動く</a:t>
             </a:r>
@@ -15763,11 +15763,11 @@
             <a:r>
               <a:rPr lang="en-US" sz="1000" dirty="0">
                 <a:solidFill>
-                  <a:srgbClr val="CCCCCC"/>
-                </a:solidFill>
-                <a:latin typeface="Arial" pitchFamily="34" charset="0"/>
-                <a:ea typeface="Arial" pitchFamily="34" charset="-122"/>
-                <a:cs typeface="Arial" pitchFamily="34" charset="-120"/>
+                  <a:srgbClr val="2B2F36"/>
+                </a:solidFill>
+                <a:latin typeface="Arial" pitchFamily="34" charset="0"/>
+                <a:ea typeface="BIZ UDPGothic" pitchFamily="34" charset="-122"/>
+                <a:cs typeface="BIZ UDPGothic" pitchFamily="34" charset="-120"/>
               </a:rPr>
               <a:t>03</a:t>
             </a:r>
@@ -15802,11 +15802,11 @@
             <a:r>
               <a:rPr lang="en-US" sz="900" dirty="0">
                 <a:solidFill>
-                  <a:srgbClr val="555555"/>
-                </a:solidFill>
-                <a:latin typeface="Arial" pitchFamily="34" charset="0"/>
-                <a:ea typeface="Arial" pitchFamily="34" charset="-122"/>
-                <a:cs typeface="Arial" pitchFamily="34" charset="-120"/>
+                  <a:srgbClr val="9AA0AA"/>
+                </a:solidFill>
+                <a:latin typeface="Arial" pitchFamily="34" charset="0"/>
+                <a:ea typeface="BIZ UDPGothic" pitchFamily="34" charset="-122"/>
+                <a:cs typeface="BIZ UDPGothic" pitchFamily="34" charset="-120"/>
               </a:rPr>
               <a:t>REBOOT JAPAN ── 提言003</a:t>
             </a:r>
@@ -15844,11 +15844,11 @@
             <a:r>
               <a:rPr lang="en-US" sz="1400" dirty="0">
                 <a:solidFill>
-                  <a:srgbClr val="CCCCCC"/>
-                </a:solidFill>
-                <a:latin typeface="Arial" pitchFamily="34" charset="0"/>
-                <a:ea typeface="Arial" pitchFamily="34" charset="-122"/>
-                <a:cs typeface="Arial" pitchFamily="34" charset="-120"/>
+                  <a:srgbClr val="2B2F36"/>
+                </a:solidFill>
+                <a:latin typeface="Arial" pitchFamily="34" charset="0"/>
+                <a:ea typeface="BIZ UDPGothic" pitchFamily="34" charset="-122"/>
+                <a:cs typeface="BIZ UDPGothic" pitchFamily="34" charset="-120"/>
               </a:rPr>
               <a:t>提言003は単独では機能しません。退場する会社が出てくる以上、そこで働いていた人を守る仕組みとペアでなければ、ただ厳しいだけの政策になってしまいます。</a:t>
             </a:r>
@@ -15873,11 +15873,11 @@
             </a:avLst>
           </a:prstGeom>
           <a:solidFill>
-            <a:srgbClr val="1A1A1A"/>
+            <a:srgbClr val="FFFFFF"/>
           </a:solidFill>
           <a:ln w="12700">
             <a:solidFill>
-              <a:srgbClr val="2E2E2E"/>
+              <a:srgbClr val="DDE0E6"/>
             </a:solidFill>
             <a:prstDash val="solid"/>
           </a:ln>
@@ -15898,11 +15898,11 @@
             <a:avLst/>
           </a:prstGeom>
           <a:solidFill>
-            <a:srgbClr val="0A0A0A"/>
+            <a:srgbClr val="F5F6F8"/>
           </a:solidFill>
           <a:ln w="12700">
             <a:solidFill>
-              <a:srgbClr val="2E2E2E"/>
+              <a:srgbClr val="DDE0E6"/>
             </a:solidFill>
             <a:prstDash val="solid"/>
           </a:ln>
@@ -15959,11 +15959,11 @@
             <a:r>
               <a:rPr lang="en-US" sz="1600" b="1" dirty="0">
                 <a:solidFill>
-                  <a:srgbClr val="F5F5F0"/>
-                </a:solidFill>
-                <a:latin typeface="Arial" pitchFamily="34" charset="0"/>
-                <a:ea typeface="Arial" pitchFamily="34" charset="-122"/>
-                <a:cs typeface="Arial" pitchFamily="34" charset="-120"/>
+                  <a:srgbClr val="16181D"/>
+                </a:solidFill>
+                <a:latin typeface="Arial" pitchFamily="34" charset="0"/>
+                <a:ea typeface="BIZ UDPGothic" pitchFamily="34" charset="-122"/>
+                <a:cs typeface="BIZ UDPGothic" pitchFamily="34" charset="-120"/>
               </a:rPr>
               <a:t>提言003（会社側のルール）</a:t>
             </a:r>
@@ -16001,11 +16001,11 @@
             <a:r>
               <a:rPr lang="en-US" sz="1250" dirty="0">
                 <a:solidFill>
-                  <a:srgbClr val="CCCCCC"/>
-                </a:solidFill>
-                <a:latin typeface="Arial" pitchFamily="34" charset="0"/>
-                <a:ea typeface="Arial" pitchFamily="34" charset="-122"/>
-                <a:cs typeface="Arial" pitchFamily="34" charset="-120"/>
+                  <a:srgbClr val="2B2F36"/>
+                </a:solidFill>
+                <a:latin typeface="Arial" pitchFamily="34" charset="0"/>
+                <a:ea typeface="BIZ UDPGothic" pitchFamily="34" charset="-122"/>
+                <a:cs typeface="BIZ UDPGothic" pitchFamily="34" charset="-120"/>
               </a:rPr>
               <a:t>ダメになった会社には、市場から退場してもらいます。</a:t>
             </a:r>
@@ -16030,11 +16030,11 @@
             <a:r>
               <a:rPr lang="en-US" sz="1250" dirty="0">
                 <a:solidFill>
-                  <a:srgbClr val="CCCCCC"/>
-                </a:solidFill>
-                <a:latin typeface="Arial" pitchFamily="34" charset="0"/>
-                <a:ea typeface="Arial" pitchFamily="34" charset="-122"/>
-                <a:cs typeface="Arial" pitchFamily="34" charset="-120"/>
+                  <a:srgbClr val="2B2F36"/>
+                </a:solidFill>
+                <a:latin typeface="Arial" pitchFamily="34" charset="0"/>
+                <a:ea typeface="BIZ UDPGothic" pitchFamily="34" charset="-122"/>
+                <a:cs typeface="BIZ UDPGothic" pitchFamily="34" charset="-120"/>
               </a:rPr>
               <a:t>成長しない会社・ズルをする会社を、税制と補助金のルールで見直します。</a:t>
             </a:r>
@@ -16083,11 +16083,11 @@
             </a:avLst>
           </a:prstGeom>
           <a:solidFill>
-            <a:srgbClr val="1A1A1A"/>
+            <a:srgbClr val="FFFFFF"/>
           </a:solidFill>
           <a:ln w="12700">
             <a:solidFill>
-              <a:srgbClr val="2E2E2E"/>
+              <a:srgbClr val="DDE0E6"/>
             </a:solidFill>
             <a:prstDash val="solid"/>
           </a:ln>
@@ -16108,11 +16108,11 @@
             <a:avLst/>
           </a:prstGeom>
           <a:solidFill>
-            <a:srgbClr val="0A0A0A"/>
+            <a:srgbClr val="F5F6F8"/>
           </a:solidFill>
           <a:ln w="12700">
             <a:solidFill>
-              <a:srgbClr val="2E2E2E"/>
+              <a:srgbClr val="DDE0E6"/>
             </a:solidFill>
             <a:prstDash val="solid"/>
           </a:ln>
@@ -16169,11 +16169,11 @@
             <a:r>
               <a:rPr lang="en-US" sz="1600" b="1" dirty="0">
                 <a:solidFill>
-                  <a:srgbClr val="F5F5F0"/>
-                </a:solidFill>
-                <a:latin typeface="Arial" pitchFamily="34" charset="0"/>
-                <a:ea typeface="Arial" pitchFamily="34" charset="-122"/>
-                <a:cs typeface="Arial" pitchFamily="34" charset="-120"/>
+                  <a:srgbClr val="16181D"/>
+                </a:solidFill>
+                <a:latin typeface="Arial" pitchFamily="34" charset="0"/>
+                <a:ea typeface="BIZ UDPGothic" pitchFamily="34" charset="-122"/>
+                <a:cs typeface="BIZ UDPGothic" pitchFamily="34" charset="-120"/>
               </a:rPr>
               <a:t>提言001（働く人側のルール）</a:t>
             </a:r>
@@ -16211,11 +16211,11 @@
             <a:r>
               <a:rPr lang="en-US" sz="1250" dirty="0">
                 <a:solidFill>
-                  <a:srgbClr val="CCCCCC"/>
-                </a:solidFill>
-                <a:latin typeface="Arial" pitchFamily="34" charset="0"/>
-                <a:ea typeface="Arial" pitchFamily="34" charset="-122"/>
-                <a:cs typeface="Arial" pitchFamily="34" charset="-120"/>
+                  <a:srgbClr val="2B2F36"/>
+                </a:solidFill>
+                <a:latin typeface="Arial" pitchFamily="34" charset="0"/>
+                <a:ea typeface="BIZ UDPGothic" pitchFamily="34" charset="-122"/>
+                <a:cs typeface="BIZ UDPGothic" pitchFamily="34" charset="-120"/>
               </a:rPr>
               <a:t>退場した会社で働いていた人を守ります。</a:t>
             </a:r>
@@ -16240,11 +16240,11 @@
             <a:r>
               <a:rPr lang="en-US" sz="1250" dirty="0">
                 <a:solidFill>
-                  <a:srgbClr val="CCCCCC"/>
-                </a:solidFill>
-                <a:latin typeface="Arial" pitchFamily="34" charset="0"/>
-                <a:ea typeface="Arial" pitchFamily="34" charset="-122"/>
-                <a:cs typeface="Arial" pitchFamily="34" charset="-120"/>
+                  <a:srgbClr val="2B2F36"/>
+                </a:solidFill>
+                <a:latin typeface="Arial" pitchFamily="34" charset="0"/>
+                <a:ea typeface="BIZ UDPGothic" pitchFamily="34" charset="-122"/>
+                <a:cs typeface="BIZ UDPGothic" pitchFamily="34" charset="-120"/>
               </a:rPr>
               <a:t>3年間の失業給付と再教育（学び直し）で、次の仕事につなげます。</a:t>
             </a:r>
@@ -16279,11 +16279,11 @@
             <a:r>
               <a:rPr lang="en-US" sz="1300" i="1" dirty="0">
                 <a:solidFill>
-                  <a:srgbClr val="D62828"/>
-                </a:solidFill>
-                <a:latin typeface="Arial" pitchFamily="34" charset="0"/>
-                <a:ea typeface="Arial" pitchFamily="34" charset="-122"/>
-                <a:cs typeface="Arial" pitchFamily="34" charset="-120"/>
+                  <a:srgbClr val="C8161D"/>
+                </a:solidFill>
+                <a:latin typeface="Arial" pitchFamily="34" charset="0"/>
+                <a:ea typeface="BIZ UDPGothic" pitchFamily="34" charset="-122"/>
+                <a:cs typeface="BIZ UDPGothic" pitchFamily="34" charset="-120"/>
               </a:rPr>
               <a:t>自転車の前輪と後輪のような関係 ── 片方だけでは前に進めません</a:t>
             </a:r>
@@ -16305,7 +16305,7 @@
     <p:bg>
       <p:bgPr>
         <a:solidFill>
-          <a:srgbClr val="0A0A0A"/>
+          <a:srgbClr val="F5F6F8"/>
         </a:solidFill>
       </p:bgPr>
     </p:bg>
@@ -16350,11 +16350,11 @@
             <a:r>
               <a:rPr lang="en-US" sz="1200" b="1" spc="300" kern="0" dirty="0">
                 <a:solidFill>
-                  <a:srgbClr val="D62828"/>
-                </a:solidFill>
-                <a:latin typeface="Arial" pitchFamily="34" charset="0"/>
-                <a:ea typeface="Arial" pitchFamily="34" charset="-122"/>
-                <a:cs typeface="Arial" pitchFamily="34" charset="-120"/>
+                  <a:srgbClr val="C8161D"/>
+                </a:solidFill>
+                <a:latin typeface="Arial" pitchFamily="34" charset="0"/>
+                <a:ea typeface="BIZ UDPGothic" pitchFamily="34" charset="-122"/>
+                <a:cs typeface="BIZ UDPGothic" pitchFamily="34" charset="-120"/>
               </a:rPr>
               <a:t>1. 今、何が起きているか</a:t>
             </a:r>
@@ -16389,11 +16389,11 @@
             <a:r>
               <a:rPr lang="en-US" sz="3200" b="1" dirty="0">
                 <a:solidFill>
-                  <a:srgbClr val="F5F5F0"/>
-                </a:solidFill>
-                <a:latin typeface="Arial" pitchFamily="34" charset="0"/>
-                <a:ea typeface="Arial" pitchFamily="34" charset="-122"/>
-                <a:cs typeface="Arial" pitchFamily="34" charset="-120"/>
+                  <a:srgbClr val="16181D"/>
+                </a:solidFill>
+                <a:latin typeface="Arial" pitchFamily="34" charset="0"/>
+                <a:ea typeface="BIZ UDPGothic" pitchFamily="34" charset="-122"/>
+                <a:cs typeface="BIZ UDPGothic" pitchFamily="34" charset="-120"/>
               </a:rPr>
               <a:t>働く人の7割は、中小・零細企業にいる</a:t>
             </a:r>
@@ -16428,11 +16428,11 @@
             <a:r>
               <a:rPr lang="en-US" sz="1000" dirty="0">
                 <a:solidFill>
-                  <a:srgbClr val="CCCCCC"/>
-                </a:solidFill>
-                <a:latin typeface="Arial" pitchFamily="34" charset="0"/>
-                <a:ea typeface="Arial" pitchFamily="34" charset="-122"/>
-                <a:cs typeface="Arial" pitchFamily="34" charset="-120"/>
+                  <a:srgbClr val="2B2F36"/>
+                </a:solidFill>
+                <a:latin typeface="Arial" pitchFamily="34" charset="0"/>
+                <a:ea typeface="BIZ UDPGothic" pitchFamily="34" charset="-122"/>
+                <a:cs typeface="BIZ UDPGothic" pitchFamily="34" charset="-120"/>
               </a:rPr>
               <a:t>04</a:t>
             </a:r>
@@ -16467,11 +16467,11 @@
             <a:r>
               <a:rPr lang="en-US" sz="900" dirty="0">
                 <a:solidFill>
-                  <a:srgbClr val="555555"/>
-                </a:solidFill>
-                <a:latin typeface="Arial" pitchFamily="34" charset="0"/>
-                <a:ea typeface="Arial" pitchFamily="34" charset="-122"/>
-                <a:cs typeface="Arial" pitchFamily="34" charset="-120"/>
+                  <a:srgbClr val="9AA0AA"/>
+                </a:solidFill>
+                <a:latin typeface="Arial" pitchFamily="34" charset="0"/>
+                <a:ea typeface="BIZ UDPGothic" pitchFamily="34" charset="-122"/>
+                <a:cs typeface="BIZ UDPGothic" pitchFamily="34" charset="-120"/>
               </a:rPr>
               <a:t>REBOOT JAPAN ── 提言003</a:t>
             </a:r>
@@ -16506,11 +16506,11 @@
             <a:r>
               <a:rPr lang="en-US" sz="8000" b="1" dirty="0">
                 <a:solidFill>
-                  <a:srgbClr val="D62828"/>
-                </a:solidFill>
-                <a:latin typeface="Arial" pitchFamily="34" charset="0"/>
-                <a:ea typeface="Arial" pitchFamily="34" charset="-122"/>
-                <a:cs typeface="Arial" pitchFamily="34" charset="-120"/>
+                  <a:srgbClr val="C8161D"/>
+                </a:solidFill>
+                <a:latin typeface="Arial" pitchFamily="34" charset="0"/>
+                <a:ea typeface="BIZ UDPGothic" pitchFamily="34" charset="-122"/>
+                <a:cs typeface="BIZ UDPGothic" pitchFamily="34" charset="-120"/>
               </a:rPr>
               <a:t>約7割</a:t>
             </a:r>
@@ -16545,11 +16545,11 @@
             <a:r>
               <a:rPr lang="en-US" sz="1300" dirty="0">
                 <a:solidFill>
-                  <a:srgbClr val="CCCCCC"/>
-                </a:solidFill>
-                <a:latin typeface="Arial" pitchFamily="34" charset="0"/>
-                <a:ea typeface="Arial" pitchFamily="34" charset="-122"/>
-                <a:cs typeface="Arial" pitchFamily="34" charset="-120"/>
+                  <a:srgbClr val="2B2F36"/>
+                </a:solidFill>
+                <a:latin typeface="Arial" pitchFamily="34" charset="0"/>
+                <a:ea typeface="BIZ UDPGothic" pitchFamily="34" charset="-122"/>
+                <a:cs typeface="BIZ UDPGothic" pitchFamily="34" charset="-120"/>
               </a:rPr>
               <a:t>日本の労働者が、中小企業・零細企業（従業員の少ない小さな会社）で働いている割合</a:t>
             </a:r>
@@ -16574,7 +16574,7 @@
           <a:noFill/>
           <a:ln w="12700">
             <a:solidFill>
-              <a:srgbClr val="2E2E2E"/>
+              <a:srgbClr val="DDE0E6"/>
             </a:solidFill>
             <a:prstDash val="solid"/>
           </a:ln>
@@ -16610,11 +16610,11 @@
             <a:r>
               <a:rPr lang="en-US" sz="2000" b="1" dirty="0">
                 <a:solidFill>
-                  <a:srgbClr val="F5F5F0"/>
-                </a:solidFill>
-                <a:latin typeface="Arial" pitchFamily="34" charset="0"/>
-                <a:ea typeface="Arial" pitchFamily="34" charset="-122"/>
-                <a:cs typeface="Arial" pitchFamily="34" charset="-120"/>
+                  <a:srgbClr val="16181D"/>
+                </a:solidFill>
+                <a:latin typeface="Arial" pitchFamily="34" charset="0"/>
+                <a:ea typeface="BIZ UDPGothic" pitchFamily="34" charset="-122"/>
+                <a:cs typeface="BIZ UDPGothic" pitchFamily="34" charset="-120"/>
               </a:rPr>
               <a:t>でも、過去30年間、ほとんど給料は上がっていない</a:t>
             </a:r>
@@ -16652,11 +16652,11 @@
             <a:r>
               <a:rPr lang="en-US" sz="1350" dirty="0">
                 <a:solidFill>
-                  <a:srgbClr val="CCCCCC"/>
-                </a:solidFill>
-                <a:latin typeface="Arial" pitchFamily="34" charset="0"/>
-                <a:ea typeface="Arial" pitchFamily="34" charset="-122"/>
-                <a:cs typeface="Arial" pitchFamily="34" charset="-120"/>
+                  <a:srgbClr val="2B2F36"/>
+                </a:solidFill>
+                <a:latin typeface="Arial" pitchFamily="34" charset="0"/>
+                <a:ea typeface="BIZ UDPGothic" pitchFamily="34" charset="-122"/>
+                <a:cs typeface="BIZ UDPGothic" pitchFamily="34" charset="-120"/>
               </a:rPr>
               <a:t>これは個人の努力不足ではなく、「会社の新陳代謝（古いものが退場し、新しいものに入れ替わる仕組み）」が止まってしまったことが大きな原因です。</a:t>
             </a:r>
@@ -16715,11 +16715,11 @@
             <a:r>
               <a:rPr lang="en-US" sz="1300" b="1" dirty="0">
                 <a:solidFill>
-                  <a:srgbClr val="D62828"/>
-                </a:solidFill>
-                <a:latin typeface="Arial" pitchFamily="34" charset="0"/>
-                <a:ea typeface="Arial" pitchFamily="34" charset="-122"/>
-                <a:cs typeface="Arial" pitchFamily="34" charset="-120"/>
+                  <a:srgbClr val="C8161D"/>
+                </a:solidFill>
+                <a:latin typeface="Arial" pitchFamily="34" charset="0"/>
+                <a:ea typeface="BIZ UDPGothic" pitchFamily="34" charset="-122"/>
+                <a:cs typeface="BIZ UDPGothic" pitchFamily="34" charset="-120"/>
               </a:rPr>
               <a:t>この提言は「その止まった仕組み」を動かすための提案です。</a:t>
             </a:r>
@@ -16741,7 +16741,7 @@
     <p:bg>
       <p:bgPr>
         <a:solidFill>
-          <a:srgbClr val="0A0A0A"/>
+          <a:srgbClr val="F5F6F8"/>
         </a:solidFill>
       </p:bgPr>
     </p:bg>
@@ -16786,11 +16786,11 @@
             <a:r>
               <a:rPr lang="en-US" sz="1200" b="1" spc="300" kern="0" dirty="0">
                 <a:solidFill>
-                  <a:srgbClr val="D62828"/>
-                </a:solidFill>
-                <a:latin typeface="Arial" pitchFamily="34" charset="0"/>
-                <a:ea typeface="Arial" pitchFamily="34" charset="-122"/>
-                <a:cs typeface="Arial" pitchFamily="34" charset="-120"/>
+                  <a:srgbClr val="C8161D"/>
+                </a:solidFill>
+                <a:latin typeface="Arial" pitchFamily="34" charset="0"/>
+                <a:ea typeface="BIZ UDPGothic" pitchFamily="34" charset="-122"/>
+                <a:cs typeface="BIZ UDPGothic" pitchFamily="34" charset="-120"/>
               </a:rPr>
               <a:t>1. 原因</a:t>
             </a:r>
@@ -16825,11 +16825,11 @@
             <a:r>
               <a:rPr lang="en-US" sz="3200" b="1" dirty="0">
                 <a:solidFill>
-                  <a:srgbClr val="F5F5F0"/>
-                </a:solidFill>
-                <a:latin typeface="Arial" pitchFamily="34" charset="0"/>
-                <a:ea typeface="Arial" pitchFamily="34" charset="-122"/>
-                <a:cs typeface="Arial" pitchFamily="34" charset="-120"/>
+                  <a:srgbClr val="16181D"/>
+                </a:solidFill>
+                <a:latin typeface="Arial" pitchFamily="34" charset="0"/>
+                <a:ea typeface="BIZ UDPGothic" pitchFamily="34" charset="-122"/>
+                <a:cs typeface="BIZ UDPGothic" pitchFamily="34" charset="-120"/>
               </a:rPr>
               <a:t>なぜ、給料が上がらない会社が生き残れるのか</a:t>
             </a:r>
@@ -16864,11 +16864,11 @@
             <a:r>
               <a:rPr lang="en-US" sz="1000" dirty="0">
                 <a:solidFill>
-                  <a:srgbClr val="CCCCCC"/>
-                </a:solidFill>
-                <a:latin typeface="Arial" pitchFamily="34" charset="0"/>
-                <a:ea typeface="Arial" pitchFamily="34" charset="-122"/>
-                <a:cs typeface="Arial" pitchFamily="34" charset="-120"/>
+                  <a:srgbClr val="2B2F36"/>
+                </a:solidFill>
+                <a:latin typeface="Arial" pitchFamily="34" charset="0"/>
+                <a:ea typeface="BIZ UDPGothic" pitchFamily="34" charset="-122"/>
+                <a:cs typeface="BIZ UDPGothic" pitchFamily="34" charset="-120"/>
               </a:rPr>
               <a:t>05</a:t>
             </a:r>
@@ -16903,11 +16903,11 @@
             <a:r>
               <a:rPr lang="en-US" sz="900" dirty="0">
                 <a:solidFill>
-                  <a:srgbClr val="555555"/>
-                </a:solidFill>
-                <a:latin typeface="Arial" pitchFamily="34" charset="0"/>
-                <a:ea typeface="Arial" pitchFamily="34" charset="-122"/>
-                <a:cs typeface="Arial" pitchFamily="34" charset="-120"/>
+                  <a:srgbClr val="9AA0AA"/>
+                </a:solidFill>
+                <a:latin typeface="Arial" pitchFamily="34" charset="0"/>
+                <a:ea typeface="BIZ UDPGothic" pitchFamily="34" charset="-122"/>
+                <a:cs typeface="BIZ UDPGothic" pitchFamily="34" charset="-120"/>
               </a:rPr>
               <a:t>REBOOT JAPAN ── 提言003</a:t>
             </a:r>
@@ -16945,11 +16945,11 @@
             <a:r>
               <a:rPr lang="en-US" sz="1400" dirty="0">
                 <a:solidFill>
-                  <a:srgbClr val="CCCCCC"/>
-                </a:solidFill>
-                <a:latin typeface="Arial" pitchFamily="34" charset="0"/>
-                <a:ea typeface="Arial" pitchFamily="34" charset="-122"/>
-                <a:cs typeface="Arial" pitchFamily="34" charset="-120"/>
+                  <a:srgbClr val="2B2F36"/>
+                </a:solidFill>
+                <a:latin typeface="Arial" pitchFamily="34" charset="0"/>
+                <a:ea typeface="BIZ UDPGothic" pitchFamily="34" charset="-122"/>
+                <a:cs typeface="BIZ UDPGothic" pitchFamily="34" charset="-120"/>
               </a:rPr>
               <a:t>原因は2つの「優しすぎるルール」にあります。本来なら市場から退場するはずの会社が、これらに支えられて生き延びてしまっているのです。</a:t>
             </a:r>
@@ -16974,11 +16974,11 @@
             </a:avLst>
           </a:prstGeom>
           <a:solidFill>
-            <a:srgbClr val="1A1A1A"/>
+            <a:srgbClr val="FFFFFF"/>
           </a:solidFill>
           <a:ln w="12700">
             <a:solidFill>
-              <a:srgbClr val="2E2E2E"/>
+              <a:srgbClr val="DDE0E6"/>
             </a:solidFill>
             <a:prstDash val="solid"/>
           </a:ln>
@@ -16999,11 +16999,11 @@
             <a:avLst/>
           </a:prstGeom>
           <a:solidFill>
-            <a:srgbClr val="0A0A0A"/>
+            <a:srgbClr val="F5F6F8"/>
           </a:solidFill>
           <a:ln w="12700">
             <a:solidFill>
-              <a:srgbClr val="2E2E2E"/>
+              <a:srgbClr val="DDE0E6"/>
             </a:solidFill>
             <a:prstDash val="solid"/>
           </a:ln>
@@ -17060,11 +17060,11 @@
             <a:r>
               <a:rPr lang="en-US" sz="1600" b="1" dirty="0">
                 <a:solidFill>
-                  <a:srgbClr val="F5F5F0"/>
-                </a:solidFill>
-                <a:latin typeface="Arial" pitchFamily="34" charset="0"/>
-                <a:ea typeface="Arial" pitchFamily="34" charset="-122"/>
-                <a:cs typeface="Arial" pitchFamily="34" charset="-120"/>
+                  <a:srgbClr val="16181D"/>
+                </a:solidFill>
+                <a:latin typeface="Arial" pitchFamily="34" charset="0"/>
+                <a:ea typeface="BIZ UDPGothic" pitchFamily="34" charset="-122"/>
+                <a:cs typeface="BIZ UDPGothic" pitchFamily="34" charset="-120"/>
               </a:rPr>
               <a:t>① 条件なしの税金優遇</a:t>
             </a:r>
@@ -17102,11 +17102,11 @@
             <a:r>
               <a:rPr lang="en-US" sz="1250" dirty="0">
                 <a:solidFill>
-                  <a:srgbClr val="CCCCCC"/>
-                </a:solidFill>
-                <a:latin typeface="Arial" pitchFamily="34" charset="0"/>
-                <a:ea typeface="Arial" pitchFamily="34" charset="-122"/>
-                <a:cs typeface="Arial" pitchFamily="34" charset="-120"/>
+                  <a:srgbClr val="2B2F36"/>
+                </a:solidFill>
+                <a:latin typeface="Arial" pitchFamily="34" charset="0"/>
+                <a:ea typeface="BIZ UDPGothic" pitchFamily="34" charset="-122"/>
+                <a:cs typeface="BIZ UDPGothic" pitchFamily="34" charset="-120"/>
               </a:rPr>
               <a:t>成長していてもしていなくても、「中小企業だから」というだけで自動的に税金が安くなる制度（軽減税率）。</a:t>
             </a:r>
@@ -17131,11 +17131,11 @@
             <a:r>
               <a:rPr lang="en-US" sz="1250" dirty="0">
                 <a:solidFill>
-                  <a:srgbClr val="CCCCCC"/>
-                </a:solidFill>
-                <a:latin typeface="Arial" pitchFamily="34" charset="0"/>
-                <a:ea typeface="Arial" pitchFamily="34" charset="-122"/>
-                <a:cs typeface="Arial" pitchFamily="34" charset="-120"/>
+                  <a:srgbClr val="2B2F36"/>
+                </a:solidFill>
+                <a:latin typeface="Arial" pitchFamily="34" charset="0"/>
+                <a:ea typeface="BIZ UDPGothic" pitchFamily="34" charset="-122"/>
+                <a:cs typeface="BIZ UDPGothic" pitchFamily="34" charset="-120"/>
               </a:rPr>
               <a:t>頑張らなくても得をする仕組みになっていました。</a:t>
             </a:r>
@@ -17160,11 +17160,11 @@
             </a:avLst>
           </a:prstGeom>
           <a:solidFill>
-            <a:srgbClr val="1A1A1A"/>
+            <a:srgbClr val="FFFFFF"/>
           </a:solidFill>
           <a:ln w="12700">
             <a:solidFill>
-              <a:srgbClr val="2E2E2E"/>
+              <a:srgbClr val="DDE0E6"/>
             </a:solidFill>
             <a:prstDash val="solid"/>
           </a:ln>
@@ -17185,11 +17185,11 @@
             <a:avLst/>
           </a:prstGeom>
           <a:solidFill>
-            <a:srgbClr val="0A0A0A"/>
+            <a:srgbClr val="F5F6F8"/>
           </a:solidFill>
           <a:ln w="12700">
             <a:solidFill>
-              <a:srgbClr val="2E2E2E"/>
+              <a:srgbClr val="DDE0E6"/>
             </a:solidFill>
             <a:prstDash val="solid"/>
           </a:ln>
@@ -17246,11 +17246,11 @@
             <a:r>
               <a:rPr lang="en-US" sz="1600" b="1" dirty="0">
                 <a:solidFill>
-                  <a:srgbClr val="F5F5F0"/>
-                </a:solidFill>
-                <a:latin typeface="Arial" pitchFamily="34" charset="0"/>
-                <a:ea typeface="Arial" pitchFamily="34" charset="-122"/>
-                <a:cs typeface="Arial" pitchFamily="34" charset="-120"/>
+                  <a:srgbClr val="16181D"/>
+                </a:solidFill>
+                <a:latin typeface="Arial" pitchFamily="34" charset="0"/>
+                <a:ea typeface="BIZ UDPGothic" pitchFamily="34" charset="-122"/>
+                <a:cs typeface="BIZ UDPGothic" pitchFamily="34" charset="-120"/>
               </a:rPr>
               <a:t>② 目的を問わない補助金</a:t>
             </a:r>
@@ -17288,11 +17288,11 @@
             <a:r>
               <a:rPr lang="en-US" sz="1250" dirty="0">
                 <a:solidFill>
-                  <a:srgbClr val="CCCCCC"/>
-                </a:solidFill>
-                <a:latin typeface="Arial" pitchFamily="34" charset="0"/>
-                <a:ea typeface="Arial" pitchFamily="34" charset="-122"/>
-                <a:cs typeface="Arial" pitchFamily="34" charset="-120"/>
+                  <a:srgbClr val="2B2F36"/>
+                </a:solidFill>
+                <a:latin typeface="Arial" pitchFamily="34" charset="0"/>
+                <a:ea typeface="BIZ UDPGothic" pitchFamily="34" charset="-122"/>
+                <a:cs typeface="BIZ UDPGothic" pitchFamily="34" charset="-120"/>
               </a:rPr>
               <a:t>本来なら退場するはずの「自力で稼げない会社」（ゾンビ企業）や、間に何社も入って手数料だけ抜く「多重下請け」を、延命させてしまう補助金。</a:t>
             </a:r>
@@ -17314,7 +17314,7 @@
     <p:bg>
       <p:bgPr>
         <a:solidFill>
-          <a:srgbClr val="0A0A0A"/>
+          <a:srgbClr val="F5F6F8"/>
         </a:solidFill>
       </p:bgPr>
     </p:bg>
@@ -17359,11 +17359,11 @@
             <a:r>
               <a:rPr lang="en-US" sz="1200" b="1" spc="300" kern="0" dirty="0">
                 <a:solidFill>
-                  <a:srgbClr val="D62828"/>
-                </a:solidFill>
-                <a:latin typeface="Arial" pitchFamily="34" charset="0"/>
-                <a:ea typeface="Arial" pitchFamily="34" charset="-122"/>
-                <a:cs typeface="Arial" pitchFamily="34" charset="-120"/>
+                  <a:srgbClr val="C8161D"/>
+                </a:solidFill>
+                <a:latin typeface="Arial" pitchFamily="34" charset="0"/>
+                <a:ea typeface="BIZ UDPGothic" pitchFamily="34" charset="-122"/>
+                <a:cs typeface="BIZ UDPGothic" pitchFamily="34" charset="-120"/>
               </a:rPr>
               <a:t>1. データで見る実態</a:t>
             </a:r>
@@ -17398,11 +17398,11 @@
             <a:r>
               <a:rPr lang="en-US" sz="3200" b="1" dirty="0">
                 <a:solidFill>
-                  <a:srgbClr val="F5F5F0"/>
-                </a:solidFill>
-                <a:latin typeface="Arial" pitchFamily="34" charset="0"/>
-                <a:ea typeface="Arial" pitchFamily="34" charset="-122"/>
-                <a:cs typeface="Arial" pitchFamily="34" charset="-120"/>
+                  <a:srgbClr val="16181D"/>
+                </a:solidFill>
+                <a:latin typeface="Arial" pitchFamily="34" charset="0"/>
+                <a:ea typeface="BIZ UDPGothic" pitchFamily="34" charset="-122"/>
+                <a:cs typeface="BIZ UDPGothic" pitchFamily="34" charset="-120"/>
               </a:rPr>
               <a:t>今の日本の会社、規模の内訳は？</a:t>
             </a:r>
@@ -17437,11 +17437,11 @@
             <a:r>
               <a:rPr lang="en-US" sz="1000" dirty="0">
                 <a:solidFill>
-                  <a:srgbClr val="CCCCCC"/>
-                </a:solidFill>
-                <a:latin typeface="Arial" pitchFamily="34" charset="0"/>
-                <a:ea typeface="Arial" pitchFamily="34" charset="-122"/>
-                <a:cs typeface="Arial" pitchFamily="34" charset="-120"/>
+                  <a:srgbClr val="2B2F36"/>
+                </a:solidFill>
+                <a:latin typeface="Arial" pitchFamily="34" charset="0"/>
+                <a:ea typeface="BIZ UDPGothic" pitchFamily="34" charset="-122"/>
+                <a:cs typeface="BIZ UDPGothic" pitchFamily="34" charset="-120"/>
               </a:rPr>
               <a:t>06</a:t>
             </a:r>
@@ -17476,11 +17476,11 @@
             <a:r>
               <a:rPr lang="en-US" sz="900" dirty="0">
                 <a:solidFill>
-                  <a:srgbClr val="555555"/>
-                </a:solidFill>
-                <a:latin typeface="Arial" pitchFamily="34" charset="0"/>
-                <a:ea typeface="Arial" pitchFamily="34" charset="-122"/>
-                <a:cs typeface="Arial" pitchFamily="34" charset="-120"/>
+                  <a:srgbClr val="9AA0AA"/>
+                </a:solidFill>
+                <a:latin typeface="Arial" pitchFamily="34" charset="0"/>
+                <a:ea typeface="BIZ UDPGothic" pitchFamily="34" charset="-122"/>
+                <a:cs typeface="BIZ UDPGothic" pitchFamily="34" charset="-120"/>
               </a:rPr>
               <a:t>REBOOT JAPAN ── 提言003</a:t>
             </a:r>
@@ -17515,11 +17515,11 @@
             <a:r>
               <a:rPr lang="en-US" sz="1200" dirty="0">
                 <a:solidFill>
-                  <a:srgbClr val="888888"/>
-                </a:solidFill>
-                <a:latin typeface="Arial" pitchFamily="34" charset="0"/>
-                <a:ea typeface="Arial" pitchFamily="34" charset="-122"/>
-                <a:cs typeface="Arial" pitchFamily="34" charset="-120"/>
+                  <a:srgbClr val="626875"/>
+                </a:solidFill>
+                <a:latin typeface="Arial" pitchFamily="34" charset="0"/>
+                <a:ea typeface="BIZ UDPGothic" pitchFamily="34" charset="-122"/>
+                <a:cs typeface="BIZ UDPGothic" pitchFamily="34" charset="-120"/>
               </a:rPr>
               <a:t>2021年・経済センサス（国の調査）より</a:t>
             </a:r>
@@ -17554,11 +17554,11 @@
             <a:r>
               <a:rPr lang="en-US" sz="1300" dirty="0">
                 <a:solidFill>
-                  <a:srgbClr val="F5F5F0"/>
-                </a:solidFill>
-                <a:latin typeface="Arial" pitchFamily="34" charset="0"/>
-                <a:ea typeface="Arial" pitchFamily="34" charset="-122"/>
-                <a:cs typeface="Arial" pitchFamily="34" charset="-120"/>
+                  <a:srgbClr val="16181D"/>
+                </a:solidFill>
+                <a:latin typeface="Arial" pitchFamily="34" charset="0"/>
+                <a:ea typeface="BIZ UDPGothic" pitchFamily="34" charset="-122"/>
+                <a:cs typeface="BIZ UDPGothic" pitchFamily="34" charset="-120"/>
               </a:rPr>
               <a:t>大企業</a:t>
             </a:r>
@@ -17581,7 +17581,7 @@
             <a:avLst/>
           </a:prstGeom>
           <a:solidFill>
-            <a:srgbClr val="1A1A1A"/>
+            <a:srgbClr val="FFFFFF"/>
           </a:solidFill>
           <a:ln/>
         </p:spPr>
@@ -17601,7 +17601,7 @@
             <a:avLst/>
           </a:prstGeom>
           <a:solidFill>
-            <a:srgbClr val="555555"/>
+            <a:srgbClr val="9AA0AA"/>
           </a:solidFill>
           <a:ln/>
         </p:spPr>
@@ -17633,11 +17633,11 @@
             <a:r>
               <a:rPr lang="en-US" sz="1250" dirty="0">
                 <a:solidFill>
-                  <a:srgbClr val="CCCCCC"/>
-                </a:solidFill>
-                <a:latin typeface="Arial" pitchFamily="34" charset="0"/>
-                <a:ea typeface="Arial" pitchFamily="34" charset="-122"/>
-                <a:cs typeface="Arial" pitchFamily="34" charset="-120"/>
+                  <a:srgbClr val="2B2F36"/>
+                </a:solidFill>
+                <a:latin typeface="Arial" pitchFamily="34" charset="0"/>
+                <a:ea typeface="BIZ UDPGothic" pitchFamily="34" charset="-122"/>
+                <a:cs typeface="BIZ UDPGothic" pitchFamily="34" charset="-120"/>
               </a:rPr>
               <a:t>0.3%　約1万社</a:t>
             </a:r>
@@ -17672,11 +17672,11 @@
             <a:r>
               <a:rPr lang="en-US" sz="1300" dirty="0">
                 <a:solidFill>
-                  <a:srgbClr val="F5F5F0"/>
-                </a:solidFill>
-                <a:latin typeface="Arial" pitchFamily="34" charset="0"/>
-                <a:ea typeface="Arial" pitchFamily="34" charset="-122"/>
-                <a:cs typeface="Arial" pitchFamily="34" charset="-120"/>
+                  <a:srgbClr val="16181D"/>
+                </a:solidFill>
+                <a:latin typeface="Arial" pitchFamily="34" charset="0"/>
+                <a:ea typeface="BIZ UDPGothic" pitchFamily="34" charset="-122"/>
+                <a:cs typeface="BIZ UDPGothic" pitchFamily="34" charset="-120"/>
               </a:rPr>
               <a:t>中堅企業（従業員2,000人以下）</a:t>
             </a:r>
@@ -17699,7 +17699,7 @@
             <a:avLst/>
           </a:prstGeom>
           <a:solidFill>
-            <a:srgbClr val="1A1A1A"/>
+            <a:srgbClr val="FFFFFF"/>
           </a:solidFill>
           <a:ln/>
         </p:spPr>
@@ -17719,7 +17719,7 @@
             <a:avLst/>
           </a:prstGeom>
           <a:solidFill>
-            <a:srgbClr val="888888"/>
+            <a:srgbClr val="626875"/>
           </a:solidFill>
           <a:ln/>
         </p:spPr>
@@ -17751,11 +17751,11 @@
             <a:r>
               <a:rPr lang="en-US" sz="1250" dirty="0">
                 <a:solidFill>
-                  <a:srgbClr val="CCCCCC"/>
-                </a:solidFill>
-                <a:latin typeface="Arial" pitchFamily="34" charset="0"/>
-                <a:ea typeface="Arial" pitchFamily="34" charset="-122"/>
-                <a:cs typeface="Arial" pitchFamily="34" charset="-120"/>
+                  <a:srgbClr val="2B2F36"/>
+                </a:solidFill>
+                <a:latin typeface="Arial" pitchFamily="34" charset="0"/>
+                <a:ea typeface="BIZ UDPGothic" pitchFamily="34" charset="-122"/>
+                <a:cs typeface="BIZ UDPGothic" pitchFamily="34" charset="-120"/>
               </a:rPr>
               <a:t>0.7%　約9,229社</a:t>
             </a:r>
@@ -17790,11 +17790,11 @@
             <a:r>
               <a:rPr lang="en-US" sz="1300" dirty="0">
                 <a:solidFill>
-                  <a:srgbClr val="F5F5F0"/>
-                </a:solidFill>
-                <a:latin typeface="Arial" pitchFamily="34" charset="0"/>
-                <a:ea typeface="Arial" pitchFamily="34" charset="-122"/>
-                <a:cs typeface="Arial" pitchFamily="34" charset="-120"/>
+                  <a:srgbClr val="16181D"/>
+                </a:solidFill>
+                <a:latin typeface="Arial" pitchFamily="34" charset="0"/>
+                <a:ea typeface="BIZ UDPGothic" pitchFamily="34" charset="-122"/>
+                <a:cs typeface="BIZ UDPGothic" pitchFamily="34" charset="-120"/>
               </a:rPr>
               <a:t>中小企業</a:t>
             </a:r>
@@ -17817,7 +17817,7 @@
             <a:avLst/>
           </a:prstGeom>
           <a:solidFill>
-            <a:srgbClr val="1A1A1A"/>
+            <a:srgbClr val="FFFFFF"/>
           </a:solidFill>
           <a:ln/>
         </p:spPr>
@@ -17837,7 +17837,7 @@
             <a:avLst/>
           </a:prstGeom>
           <a:solidFill>
-            <a:srgbClr val="A01F1F"/>
+            <a:srgbClr val="9E1016"/>
           </a:solidFill>
           <a:ln/>
         </p:spPr>
@@ -17869,11 +17869,11 @@
             <a:r>
               <a:rPr lang="en-US" sz="1250" dirty="0">
                 <a:solidFill>
-                  <a:srgbClr val="CCCCCC"/>
-                </a:solidFill>
-                <a:latin typeface="Arial" pitchFamily="34" charset="0"/>
-                <a:ea typeface="Arial" pitchFamily="34" charset="-122"/>
-                <a:cs typeface="Arial" pitchFamily="34" charset="-120"/>
+                  <a:srgbClr val="2B2F36"/>
+                </a:solidFill>
+                <a:latin typeface="Arial" pitchFamily="34" charset="0"/>
+                <a:ea typeface="BIZ UDPGothic" pitchFamily="34" charset="-122"/>
+                <a:cs typeface="BIZ UDPGothic" pitchFamily="34" charset="-120"/>
               </a:rPr>
               <a:t>58%　約213万社</a:t>
             </a:r>
@@ -17908,11 +17908,11 @@
             <a:r>
               <a:rPr lang="en-US" sz="1300" dirty="0">
                 <a:solidFill>
-                  <a:srgbClr val="F5F5F0"/>
-                </a:solidFill>
-                <a:latin typeface="Arial" pitchFamily="34" charset="0"/>
-                <a:ea typeface="Arial" pitchFamily="34" charset="-122"/>
-                <a:cs typeface="Arial" pitchFamily="34" charset="-120"/>
+                  <a:srgbClr val="16181D"/>
+                </a:solidFill>
+                <a:latin typeface="Arial" pitchFamily="34" charset="0"/>
+                <a:ea typeface="BIZ UDPGothic" pitchFamily="34" charset="-122"/>
+                <a:cs typeface="BIZ UDPGothic" pitchFamily="34" charset="-120"/>
               </a:rPr>
               <a:t>零細・小規模事業者</a:t>
             </a:r>
@@ -17935,7 +17935,7 @@
             <a:avLst/>
           </a:prstGeom>
           <a:solidFill>
-            <a:srgbClr val="1A1A1A"/>
+            <a:srgbClr val="FFFFFF"/>
           </a:solidFill>
           <a:ln/>
         </p:spPr>
@@ -17955,7 +17955,7 @@
             <a:avLst/>
           </a:prstGeom>
           <a:solidFill>
-            <a:srgbClr val="D62828"/>
+            <a:srgbClr val="C8161D"/>
           </a:solidFill>
           <a:ln/>
         </p:spPr>
@@ -17987,11 +17987,11 @@
             <a:r>
               <a:rPr lang="en-US" sz="1250" dirty="0">
                 <a:solidFill>
-                  <a:srgbClr val="CCCCCC"/>
-                </a:solidFill>
-                <a:latin typeface="Arial" pitchFamily="34" charset="0"/>
-                <a:ea typeface="Arial" pitchFamily="34" charset="-122"/>
-                <a:cs typeface="Arial" pitchFamily="34" charset="-120"/>
+                  <a:srgbClr val="2B2F36"/>
+                </a:solidFill>
+                <a:latin typeface="Arial" pitchFamily="34" charset="0"/>
+                <a:ea typeface="BIZ UDPGothic" pitchFamily="34" charset="-122"/>
+                <a:cs typeface="BIZ UDPGothic" pitchFamily="34" charset="-120"/>
               </a:rPr>
               <a:t>41%　約123万社</a:t>
             </a:r>
@@ -18026,11 +18026,11 @@
             <a:r>
               <a:rPr lang="en-US" sz="1250" i="1" dirty="0">
                 <a:solidFill>
-                  <a:srgbClr val="D62828"/>
-                </a:solidFill>
-                <a:latin typeface="Arial" pitchFamily="34" charset="0"/>
-                <a:ea typeface="Arial" pitchFamily="34" charset="-122"/>
-                <a:cs typeface="Arial" pitchFamily="34" charset="-120"/>
+                  <a:srgbClr val="C8161D"/>
+                </a:solidFill>
+                <a:latin typeface="Arial" pitchFamily="34" charset="0"/>
+                <a:ea typeface="BIZ UDPGothic" pitchFamily="34" charset="-122"/>
+                <a:cs typeface="BIZ UDPGothic" pitchFamily="34" charset="-120"/>
               </a:rPr>
               <a:t>中堅企業はわずか0.7%。大半が中小・零細企業に偏っています。</a:t>
             </a:r>
@@ -18052,7 +18052,7 @@
     <p:bg>
       <p:bgPr>
         <a:solidFill>
-          <a:srgbClr val="0A0A0A"/>
+          <a:srgbClr val="F5F6F8"/>
         </a:solidFill>
       </p:bgPr>
     </p:bg>
@@ -18097,11 +18097,11 @@
             <a:r>
               <a:rPr lang="en-US" sz="1200" b="1" spc="300" kern="0" dirty="0">
                 <a:solidFill>
-                  <a:srgbClr val="D62828"/>
-                </a:solidFill>
-                <a:latin typeface="Arial" pitchFamily="34" charset="0"/>
-                <a:ea typeface="Arial" pitchFamily="34" charset="-122"/>
-                <a:cs typeface="Arial" pitchFamily="34" charset="-120"/>
+                  <a:srgbClr val="C8161D"/>
+                </a:solidFill>
+                <a:latin typeface="Arial" pitchFamily="34" charset="0"/>
+                <a:ea typeface="BIZ UDPGothic" pitchFamily="34" charset="-122"/>
+                <a:cs typeface="BIZ UDPGothic" pitchFamily="34" charset="-120"/>
               </a:rPr>
               <a:t>1. このまま放っておくと</a:t>
             </a:r>
@@ -18136,11 +18136,11 @@
             <a:r>
               <a:rPr lang="en-US" sz="3200" b="1" dirty="0">
                 <a:solidFill>
-                  <a:srgbClr val="F5F5F0"/>
-                </a:solidFill>
-                <a:latin typeface="Arial" pitchFamily="34" charset="0"/>
-                <a:ea typeface="Arial" pitchFamily="34" charset="-122"/>
-                <a:cs typeface="Arial" pitchFamily="34" charset="-120"/>
+                  <a:srgbClr val="16181D"/>
+                </a:solidFill>
+                <a:latin typeface="Arial" pitchFamily="34" charset="0"/>
+                <a:ea typeface="BIZ UDPGothic" pitchFamily="34" charset="-122"/>
+                <a:cs typeface="BIZ UDPGothic" pitchFamily="34" charset="-120"/>
               </a:rPr>
               <a:t>会社は「成長」より「縮小」の方が多い</a:t>
             </a:r>
@@ -18175,11 +18175,11 @@
             <a:r>
               <a:rPr lang="en-US" sz="1000" dirty="0">
                 <a:solidFill>
-                  <a:srgbClr val="CCCCCC"/>
-                </a:solidFill>
-                <a:latin typeface="Arial" pitchFamily="34" charset="0"/>
-                <a:ea typeface="Arial" pitchFamily="34" charset="-122"/>
-                <a:cs typeface="Arial" pitchFamily="34" charset="-120"/>
+                  <a:srgbClr val="2B2F36"/>
+                </a:solidFill>
+                <a:latin typeface="Arial" pitchFamily="34" charset="0"/>
+                <a:ea typeface="BIZ UDPGothic" pitchFamily="34" charset="-122"/>
+                <a:cs typeface="BIZ UDPGothic" pitchFamily="34" charset="-120"/>
               </a:rPr>
               <a:t>07</a:t>
             </a:r>
@@ -18214,11 +18214,11 @@
             <a:r>
               <a:rPr lang="en-US" sz="900" dirty="0">
                 <a:solidFill>
-                  <a:srgbClr val="555555"/>
-                </a:solidFill>
-                <a:latin typeface="Arial" pitchFamily="34" charset="0"/>
-                <a:ea typeface="Arial" pitchFamily="34" charset="-122"/>
-                <a:cs typeface="Arial" pitchFamily="34" charset="-120"/>
+                  <a:srgbClr val="9AA0AA"/>
+                </a:solidFill>
+                <a:latin typeface="Arial" pitchFamily="34" charset="0"/>
+                <a:ea typeface="BIZ UDPGothic" pitchFamily="34" charset="-122"/>
+                <a:cs typeface="BIZ UDPGothic" pitchFamily="34" charset="-120"/>
               </a:rPr>
               <a:t>REBOOT JAPAN ── 提言003</a:t>
             </a:r>
@@ -18253,11 +18253,11 @@
             <a:r>
               <a:rPr lang="en-US" sz="1400" dirty="0">
                 <a:solidFill>
-                  <a:srgbClr val="CCCCCC"/>
-                </a:solidFill>
-                <a:latin typeface="Arial" pitchFamily="34" charset="0"/>
-                <a:ea typeface="Arial" pitchFamily="34" charset="-122"/>
-                <a:cs typeface="Arial" pitchFamily="34" charset="-120"/>
+                  <a:srgbClr val="2B2F36"/>
+                </a:solidFill>
+                <a:latin typeface="Arial" pitchFamily="34" charset="0"/>
+                <a:ea typeface="BIZ UDPGothic" pitchFamily="34" charset="-122"/>
+                <a:cs typeface="BIZ UDPGothic" pitchFamily="34" charset="-120"/>
               </a:rPr>
               <a:t>5年間で会社の規模がどう変化したかを見ると──</a:t>
             </a:r>
@@ -18282,11 +18282,11 @@
             </a:avLst>
           </a:prstGeom>
           <a:solidFill>
-            <a:srgbClr val="1A1A1A"/>
+            <a:srgbClr val="FFFFFF"/>
           </a:solidFill>
           <a:ln w="12700">
             <a:solidFill>
-              <a:srgbClr val="2E2E2E"/>
+              <a:srgbClr val="DDE0E6"/>
             </a:solidFill>
             <a:prstDash val="solid"/>
           </a:ln>
@@ -18343,11 +18343,11 @@
             <a:r>
               <a:rPr lang="en-US" sz="1500" b="1" dirty="0">
                 <a:solidFill>
-                  <a:srgbClr val="F5F5F0"/>
-                </a:solidFill>
-                <a:latin typeface="Arial" pitchFamily="34" charset="0"/>
-                <a:ea typeface="Arial" pitchFamily="34" charset="-122"/>
-                <a:cs typeface="Arial" pitchFamily="34" charset="-120"/>
+                  <a:srgbClr val="16181D"/>
+                </a:solidFill>
+                <a:latin typeface="Arial" pitchFamily="34" charset="0"/>
+                <a:ea typeface="BIZ UDPGothic" pitchFamily="34" charset="-122"/>
+                <a:cs typeface="BIZ UDPGothic" pitchFamily="34" charset="-120"/>
               </a:rPr>
               <a:t>成長した会社</a:t>
             </a:r>
@@ -18382,11 +18382,11 @@
             <a:r>
               <a:rPr lang="en-US" sz="4600" b="1" dirty="0">
                 <a:solidFill>
-                  <a:srgbClr val="CCCCCC"/>
-                </a:solidFill>
-                <a:latin typeface="Arial" pitchFamily="34" charset="0"/>
-                <a:ea typeface="Arial" pitchFamily="34" charset="-122"/>
-                <a:cs typeface="Arial" pitchFamily="34" charset="-120"/>
+                  <a:srgbClr val="2B2F36"/>
+                </a:solidFill>
+                <a:latin typeface="Arial" pitchFamily="34" charset="0"/>
+                <a:ea typeface="BIZ UDPGothic" pitchFamily="34" charset="-122"/>
+                <a:cs typeface="BIZ UDPGothic" pitchFamily="34" charset="-120"/>
               </a:rPr>
               <a:t>3.8万社</a:t>
             </a:r>
@@ -18421,11 +18421,11 @@
             <a:r>
               <a:rPr lang="en-US" sz="1150" dirty="0">
                 <a:solidFill>
-                  <a:srgbClr val="999999"/>
-                </a:solidFill>
-                <a:latin typeface="Arial" pitchFamily="34" charset="0"/>
-                <a:ea typeface="Arial" pitchFamily="34" charset="-122"/>
-                <a:cs typeface="Arial" pitchFamily="34" charset="-120"/>
+                  <a:srgbClr val="4B515C"/>
+                </a:solidFill>
+                <a:latin typeface="Arial" pitchFamily="34" charset="0"/>
+                <a:ea typeface="BIZ UDPGothic" pitchFamily="34" charset="-122"/>
+                <a:cs typeface="BIZ UDPGothic" pitchFamily="34" charset="-120"/>
               </a:rPr>
               <a:t>小規模 → 中規模に成長</a:t>
             </a:r>
@@ -18450,11 +18450,11 @@
             </a:avLst>
           </a:prstGeom>
           <a:solidFill>
-            <a:srgbClr val="1A1A1A"/>
+            <a:srgbClr val="FFFFFF"/>
           </a:solidFill>
           <a:ln w="19050">
             <a:solidFill>
-              <a:srgbClr val="D62828"/>
+              <a:srgbClr val="C8161D"/>
             </a:solidFill>
             <a:prstDash val="solid"/>
           </a:ln>
@@ -18511,11 +18511,11 @@
             <a:r>
               <a:rPr lang="en-US" sz="1500" b="1" dirty="0">
                 <a:solidFill>
-                  <a:srgbClr val="F5F5F0"/>
-                </a:solidFill>
-                <a:latin typeface="Arial" pitchFamily="34" charset="0"/>
-                <a:ea typeface="Arial" pitchFamily="34" charset="-122"/>
-                <a:cs typeface="Arial" pitchFamily="34" charset="-120"/>
+                  <a:srgbClr val="16181D"/>
+                </a:solidFill>
+                <a:latin typeface="Arial" pitchFamily="34" charset="0"/>
+                <a:ea typeface="BIZ UDPGothic" pitchFamily="34" charset="-122"/>
+                <a:cs typeface="BIZ UDPGothic" pitchFamily="34" charset="-120"/>
               </a:rPr>
               <a:t>縮小した会社</a:t>
             </a:r>
@@ -18550,11 +18550,11 @@
             <a:r>
               <a:rPr lang="en-US" sz="4600" b="1" dirty="0">
                 <a:solidFill>
-                  <a:srgbClr val="D62828"/>
-                </a:solidFill>
-                <a:latin typeface="Arial" pitchFamily="34" charset="0"/>
-                <a:ea typeface="Arial" pitchFamily="34" charset="-122"/>
-                <a:cs typeface="Arial" pitchFamily="34" charset="-120"/>
+                  <a:srgbClr val="C8161D"/>
+                </a:solidFill>
+                <a:latin typeface="Arial" pitchFamily="34" charset="0"/>
+                <a:ea typeface="BIZ UDPGothic" pitchFamily="34" charset="-122"/>
+                <a:cs typeface="BIZ UDPGothic" pitchFamily="34" charset="-120"/>
               </a:rPr>
               <a:t>6.5万社</a:t>
             </a:r>
@@ -18589,11 +18589,11 @@
             <a:r>
               <a:rPr lang="en-US" sz="1150" dirty="0">
                 <a:solidFill>
-                  <a:srgbClr val="999999"/>
-                </a:solidFill>
-                <a:latin typeface="Arial" pitchFamily="34" charset="0"/>
-                <a:ea typeface="Arial" pitchFamily="34" charset="-122"/>
-                <a:cs typeface="Arial" pitchFamily="34" charset="-120"/>
+                  <a:srgbClr val="4B515C"/>
+                </a:solidFill>
+                <a:latin typeface="Arial" pitchFamily="34" charset="0"/>
+                <a:ea typeface="BIZ UDPGothic" pitchFamily="34" charset="-122"/>
+                <a:cs typeface="BIZ UDPGothic" pitchFamily="34" charset="-120"/>
               </a:rPr>
               <a:t>中規模 → 小規模に縮小</a:t>
             </a:r>
@@ -18628,11 +18628,11 @@
             <a:r>
               <a:rPr lang="en-US" sz="1300" b="1" dirty="0">
                 <a:solidFill>
-                  <a:srgbClr val="D62828"/>
-                </a:solidFill>
-                <a:latin typeface="Arial" pitchFamily="34" charset="0"/>
-                <a:ea typeface="Arial" pitchFamily="34" charset="-122"/>
-                <a:cs typeface="Arial" pitchFamily="34" charset="-120"/>
+                  <a:srgbClr val="C8161D"/>
+                </a:solidFill>
+                <a:latin typeface="Arial" pitchFamily="34" charset="0"/>
+                <a:ea typeface="BIZ UDPGothic" pitchFamily="34" charset="-122"/>
+                <a:cs typeface="BIZ UDPGothic" pitchFamily="34" charset="-120"/>
               </a:rPr>
               <a:t>放置すれば、零細化は加速する一方です。</a:t>
             </a:r>
@@ -18654,7 +18654,7 @@
     <p:bg>
       <p:bgPr>
         <a:solidFill>
-          <a:srgbClr val="0A0A0A"/>
+          <a:srgbClr val="F5F6F8"/>
         </a:solidFill>
       </p:bgPr>
     </p:bg>
@@ -18699,11 +18699,11 @@
             <a:r>
               <a:rPr lang="en-US" sz="1200" b="1" spc="300" kern="0" dirty="0">
                 <a:solidFill>
-                  <a:srgbClr val="D62828"/>
-                </a:solidFill>
-                <a:latin typeface="Arial" pitchFamily="34" charset="0"/>
-                <a:ea typeface="Arial" pitchFamily="34" charset="-122"/>
-                <a:cs typeface="Arial" pitchFamily="34" charset="-120"/>
+                  <a:srgbClr val="C8161D"/>
+                </a:solidFill>
+                <a:latin typeface="Arial" pitchFamily="34" charset="0"/>
+                <a:ea typeface="BIZ UDPGothic" pitchFamily="34" charset="-122"/>
+                <a:cs typeface="BIZ UDPGothic" pitchFamily="34" charset="-120"/>
               </a:rPr>
               <a:t>1. 用語解説</a:t>
             </a:r>
@@ -18738,11 +18738,11 @@
             <a:r>
               <a:rPr lang="en-US" sz="3200" b="1" dirty="0">
                 <a:solidFill>
-                  <a:srgbClr val="F5F5F0"/>
-                </a:solidFill>
-                <a:latin typeface="Arial" pitchFamily="34" charset="0"/>
-                <a:ea typeface="Arial" pitchFamily="34" charset="-122"/>
-                <a:cs typeface="Arial" pitchFamily="34" charset="-120"/>
+                  <a:srgbClr val="16181D"/>
+                </a:solidFill>
+                <a:latin typeface="Arial" pitchFamily="34" charset="0"/>
+                <a:ea typeface="BIZ UDPGothic" pitchFamily="34" charset="-122"/>
+                <a:cs typeface="BIZ UDPGothic" pitchFamily="34" charset="-120"/>
               </a:rPr>
               <a:t>「赤字法人」って何？</a:t>
             </a:r>
@@ -18777,11 +18777,11 @@
             <a:r>
               <a:rPr lang="en-US" sz="1000" dirty="0">
                 <a:solidFill>
-                  <a:srgbClr val="CCCCCC"/>
-                </a:solidFill>
-                <a:latin typeface="Arial" pitchFamily="34" charset="0"/>
-                <a:ea typeface="Arial" pitchFamily="34" charset="-122"/>
-                <a:cs typeface="Arial" pitchFamily="34" charset="-120"/>
+                  <a:srgbClr val="2B2F36"/>
+                </a:solidFill>
+                <a:latin typeface="Arial" pitchFamily="34" charset="0"/>
+                <a:ea typeface="BIZ UDPGothic" pitchFamily="34" charset="-122"/>
+                <a:cs typeface="BIZ UDPGothic" pitchFamily="34" charset="-120"/>
               </a:rPr>
               <a:t>08</a:t>
             </a:r>
@@ -18816,11 +18816,11 @@
             <a:r>
               <a:rPr lang="en-US" sz="900" dirty="0">
                 <a:solidFill>
-                  <a:srgbClr val="555555"/>
-                </a:solidFill>
-                <a:latin typeface="Arial" pitchFamily="34" charset="0"/>
-                <a:ea typeface="Arial" pitchFamily="34" charset="-122"/>
-                <a:cs typeface="Arial" pitchFamily="34" charset="-120"/>
+                  <a:srgbClr val="9AA0AA"/>
+                </a:solidFill>
+                <a:latin typeface="Arial" pitchFamily="34" charset="0"/>
+                <a:ea typeface="BIZ UDPGothic" pitchFamily="34" charset="-122"/>
+                <a:cs typeface="BIZ UDPGothic" pitchFamily="34" charset="-120"/>
               </a:rPr>
               <a:t>REBOOT JAPAN ── 提言003</a:t>
             </a:r>
@@ -18845,11 +18845,11 @@
             </a:avLst>
           </a:prstGeom>
           <a:solidFill>
-            <a:srgbClr val="1A1A1A"/>
+            <a:srgbClr val="FFFFFF"/>
           </a:solidFill>
           <a:ln w="12700">
             <a:solidFill>
-              <a:srgbClr val="2E2E2E"/>
+              <a:srgbClr val="DDE0E6"/>
             </a:solidFill>
             <a:prstDash val="solid"/>
           </a:ln>
@@ -18870,11 +18870,11 @@
             <a:avLst/>
           </a:prstGeom>
           <a:solidFill>
-            <a:srgbClr val="0A0A0A"/>
+            <a:srgbClr val="F5F6F8"/>
           </a:solidFill>
           <a:ln w="12700">
             <a:solidFill>
-              <a:srgbClr val="2E2E2E"/>
+              <a:srgbClr val="DDE0E6"/>
             </a:solidFill>
             <a:prstDash val="solid"/>
           </a:ln>
@@ -18931,11 +18931,11 @@
             <a:r>
               <a:rPr lang="en-US" sz="1600" b="1" dirty="0">
                 <a:solidFill>
-                  <a:srgbClr val="F5F5F0"/>
-                </a:solidFill>
-                <a:latin typeface="Arial" pitchFamily="34" charset="0"/>
-                <a:ea typeface="Arial" pitchFamily="34" charset="-122"/>
-                <a:cs typeface="Arial" pitchFamily="34" charset="-120"/>
+                  <a:srgbClr val="16181D"/>
+                </a:solidFill>
+                <a:latin typeface="Arial" pitchFamily="34" charset="0"/>
+                <a:ea typeface="BIZ UDPGothic" pitchFamily="34" charset="-122"/>
+                <a:cs typeface="BIZ UDPGothic" pitchFamily="34" charset="-120"/>
               </a:rPr>
               <a:t>赤字法人とは</a:t>
             </a:r>
@@ -18973,11 +18973,11 @@
             <a:r>
               <a:rPr lang="en-US" sz="1250" dirty="0">
                 <a:solidFill>
-                  <a:srgbClr val="CCCCCC"/>
-                </a:solidFill>
-                <a:latin typeface="Arial" pitchFamily="34" charset="0"/>
-                <a:ea typeface="Arial" pitchFamily="34" charset="-122"/>
-                <a:cs typeface="Arial" pitchFamily="34" charset="-120"/>
+                  <a:srgbClr val="2B2F36"/>
+                </a:solidFill>
+                <a:latin typeface="Arial" pitchFamily="34" charset="0"/>
+                <a:ea typeface="BIZ UDPGothic" pitchFamily="34" charset="-122"/>
+                <a:cs typeface="BIZ UDPGothic" pitchFamily="34" charset="-120"/>
               </a:rPr>
               <a:t>会社の決算で「利益よりも費用の方が多かった（＝儲からなかった）」と申告している会社のことです。</a:t>
             </a:r>
@@ -19002,11 +19002,11 @@
             <a:r>
               <a:rPr lang="en-US" sz="1250" dirty="0">
                 <a:solidFill>
-                  <a:srgbClr val="CCCCCC"/>
-                </a:solidFill>
-                <a:latin typeface="Arial" pitchFamily="34" charset="0"/>
-                <a:ea typeface="Arial" pitchFamily="34" charset="-122"/>
-                <a:cs typeface="Arial" pitchFamily="34" charset="-120"/>
+                  <a:srgbClr val="2B2F36"/>
+                </a:solidFill>
+                <a:latin typeface="Arial" pitchFamily="34" charset="0"/>
+                <a:ea typeface="BIZ UDPGothic" pitchFamily="34" charset="-122"/>
+                <a:cs typeface="BIZ UDPGothic" pitchFamily="34" charset="-120"/>
               </a:rPr>
               <a:t>赤字の会社は、法人税（会社の利益にかかる税金）を払わなくて済みます。</a:t>
             </a:r>
@@ -19031,11 +19031,11 @@
             </a:avLst>
           </a:prstGeom>
           <a:solidFill>
-            <a:srgbClr val="1A1A1A"/>
+            <a:srgbClr val="FFFFFF"/>
           </a:solidFill>
           <a:ln w="12700">
             <a:solidFill>
-              <a:srgbClr val="2E2E2E"/>
+              <a:srgbClr val="DDE0E6"/>
             </a:solidFill>
             <a:prstDash val="solid"/>
           </a:ln>
@@ -19056,11 +19056,11 @@
             <a:avLst/>
           </a:prstGeom>
           <a:solidFill>
-            <a:srgbClr val="0A0A0A"/>
+            <a:srgbClr val="F5F6F8"/>
           </a:solidFill>
           <a:ln w="12700">
             <a:solidFill>
-              <a:srgbClr val="2E2E2E"/>
+              <a:srgbClr val="DDE0E6"/>
             </a:solidFill>
             <a:prstDash val="solid"/>
           </a:ln>
@@ -19117,11 +19117,11 @@
             <a:r>
               <a:rPr lang="en-US" sz="1600" b="1" dirty="0">
                 <a:solidFill>
-                  <a:srgbClr val="F5F5F0"/>
-                </a:solidFill>
-                <a:latin typeface="Arial" pitchFamily="34" charset="0"/>
-                <a:ea typeface="Arial" pitchFamily="34" charset="-122"/>
-                <a:cs typeface="Arial" pitchFamily="34" charset="-120"/>
+                  <a:srgbClr val="16181D"/>
+                </a:solidFill>
+                <a:latin typeface="Arial" pitchFamily="34" charset="0"/>
+                <a:ea typeface="BIZ UDPGothic" pitchFamily="34" charset="-122"/>
+                <a:cs typeface="BIZ UDPGothic" pitchFamily="34" charset="-120"/>
               </a:rPr>
               <a:t>ここに潜む問題</a:t>
             </a:r>
@@ -19159,11 +19159,11 @@
             <a:r>
               <a:rPr lang="en-US" sz="1250" dirty="0">
                 <a:solidFill>
-                  <a:srgbClr val="CCCCCC"/>
-                </a:solidFill>
-                <a:latin typeface="Arial" pitchFamily="34" charset="0"/>
-                <a:ea typeface="Arial" pitchFamily="34" charset="-122"/>
-                <a:cs typeface="Arial" pitchFamily="34" charset="-120"/>
+                  <a:srgbClr val="2B2F36"/>
+                </a:solidFill>
+                <a:latin typeface="Arial" pitchFamily="34" charset="0"/>
+                <a:ea typeface="BIZ UDPGothic" pitchFamily="34" charset="-122"/>
+                <a:cs typeface="BIZ UDPGothic" pitchFamily="34" charset="-120"/>
               </a:rPr>
               <a:t>本当は儲かっているのに、わざと経費を多く計上するなどして「帳簿の上だけ赤字」に見せかけ、税金を逃れている会社があると考えられます。</a:t>
             </a:r>
@@ -19188,11 +19188,11 @@
             <a:r>
               <a:rPr lang="en-US" sz="1250" dirty="0">
                 <a:solidFill>
-                  <a:srgbClr val="CCCCCC"/>
-                </a:solidFill>
-                <a:latin typeface="Arial" pitchFamily="34" charset="0"/>
-                <a:ea typeface="Arial" pitchFamily="34" charset="-122"/>
-                <a:cs typeface="Arial" pitchFamily="34" charset="-120"/>
+                  <a:srgbClr val="2B2F36"/>
+                </a:solidFill>
+                <a:latin typeface="Arial" pitchFamily="34" charset="0"/>
+                <a:ea typeface="BIZ UDPGothic" pitchFamily="34" charset="-122"/>
+                <a:cs typeface="BIZ UDPGothic" pitchFamily="34" charset="-120"/>
               </a:rPr>
               <a:t>これを「作られた赤字」と呼びます。</a:t>
             </a:r>
@@ -19214,7 +19214,7 @@
     <p:bg>
       <p:bgPr>
         <a:solidFill>
-          <a:srgbClr val="0A0A0A"/>
+          <a:srgbClr val="F5F6F8"/>
         </a:solidFill>
       </p:bgPr>
     </p:bg>
@@ -19259,11 +19259,11 @@
             <a:r>
               <a:rPr lang="en-US" sz="1200" b="1" spc="300" kern="0" dirty="0">
                 <a:solidFill>
-                  <a:srgbClr val="D62828"/>
-                </a:solidFill>
-                <a:latin typeface="Arial" pitchFamily="34" charset="0"/>
-                <a:ea typeface="Arial" pitchFamily="34" charset="-122"/>
-                <a:cs typeface="Arial" pitchFamily="34" charset="-120"/>
+                  <a:srgbClr val="C8161D"/>
+                </a:solidFill>
+                <a:latin typeface="Arial" pitchFamily="34" charset="0"/>
+                <a:ea typeface="BIZ UDPGothic" pitchFamily="34" charset="-122"/>
+                <a:cs typeface="BIZ UDPGothic" pitchFamily="34" charset="-120"/>
               </a:rPr>
               <a:t>1. 衝撃の数字</a:t>
             </a:r>
@@ -19298,11 +19298,11 @@
             <a:r>
               <a:rPr lang="en-US" sz="3200" b="1" dirty="0">
                 <a:solidFill>
-                  <a:srgbClr val="F5F5F0"/>
-                </a:solidFill>
-                <a:latin typeface="Arial" pitchFamily="34" charset="0"/>
-                <a:ea typeface="Arial" pitchFamily="34" charset="-122"/>
-                <a:cs typeface="Arial" pitchFamily="34" charset="-120"/>
+                  <a:srgbClr val="16181D"/>
+                </a:solidFill>
+                <a:latin typeface="Arial" pitchFamily="34" charset="0"/>
+                <a:ea typeface="BIZ UDPGothic" pitchFamily="34" charset="-122"/>
+                <a:cs typeface="BIZ UDPGothic" pitchFamily="34" charset="-120"/>
               </a:rPr>
               <a:t>全国の会社の61%が「赤字」と申告している</a:t>
             </a:r>
@@ -19337,11 +19337,11 @@
             <a:r>
               <a:rPr lang="en-US" sz="1000" dirty="0">
                 <a:solidFill>
-                  <a:srgbClr val="CCCCCC"/>
-                </a:solidFill>
-                <a:latin typeface="Arial" pitchFamily="34" charset="0"/>
-                <a:ea typeface="Arial" pitchFamily="34" charset="-122"/>
-                <a:cs typeface="Arial" pitchFamily="34" charset="-120"/>
+                  <a:srgbClr val="2B2F36"/>
+                </a:solidFill>
+                <a:latin typeface="Arial" pitchFamily="34" charset="0"/>
+                <a:ea typeface="BIZ UDPGothic" pitchFamily="34" charset="-122"/>
+                <a:cs typeface="BIZ UDPGothic" pitchFamily="34" charset="-120"/>
               </a:rPr>
               <a:t>09</a:t>
             </a:r>
@@ -19376,11 +19376,11 @@
             <a:r>
               <a:rPr lang="en-US" sz="900" dirty="0">
                 <a:solidFill>
-                  <a:srgbClr val="555555"/>
-                </a:solidFill>
-                <a:latin typeface="Arial" pitchFamily="34" charset="0"/>
-                <a:ea typeface="Arial" pitchFamily="34" charset="-122"/>
-                <a:cs typeface="Arial" pitchFamily="34" charset="-120"/>
+                  <a:srgbClr val="9AA0AA"/>
+                </a:solidFill>
+                <a:latin typeface="Arial" pitchFamily="34" charset="0"/>
+                <a:ea typeface="BIZ UDPGothic" pitchFamily="34" charset="-122"/>
+                <a:cs typeface="BIZ UDPGothic" pitchFamily="34" charset="-120"/>
               </a:rPr>
               <a:t>REBOOT JAPAN ── 提言003</a:t>
             </a:r>
@@ -19415,11 +19415,11 @@
             <a:r>
               <a:rPr lang="en-US" sz="1200" dirty="0">
                 <a:solidFill>
-                  <a:srgbClr val="888888"/>
-                </a:solidFill>
-                <a:latin typeface="Arial" pitchFamily="34" charset="0"/>
-                <a:ea typeface="Arial" pitchFamily="34" charset="-122"/>
-                <a:cs typeface="Arial" pitchFamily="34" charset="-120"/>
+                  <a:srgbClr val="626875"/>
+                </a:solidFill>
+                <a:latin typeface="Arial" pitchFamily="34" charset="0"/>
+                <a:ea typeface="BIZ UDPGothic" pitchFamily="34" charset="-122"/>
+                <a:cs typeface="BIZ UDPGothic" pitchFamily="34" charset="-120"/>
               </a:rPr>
               <a:t>令和5年度・国税庁　会社標本調査より</a:t>
             </a:r>
@@ -19442,7 +19442,7 @@
             <a:avLst/>
           </a:prstGeom>
           <a:solidFill>
-            <a:srgbClr val="1A1A1A"/>
+            <a:srgbClr val="FFFFFF"/>
           </a:solidFill>
           <a:ln/>
         </p:spPr>
@@ -19465,7 +19465,7 @@
             </a:avLst>
           </a:prstGeom>
           <a:solidFill>
-            <a:srgbClr val="D62828"/>
+            <a:srgbClr val="C8161D"/>
           </a:solidFill>
           <a:ln/>
         </p:spPr>
@@ -19485,7 +19485,7 @@
             <a:avLst/>
           </a:prstGeom>
           <a:solidFill>
-            <a:srgbClr val="0A0A0A"/>
+            <a:srgbClr val="F5F6F8"/>
           </a:solidFill>
           <a:ln/>
         </p:spPr>
@@ -19517,11 +19517,11 @@
             <a:r>
               <a:rPr lang="en-US" sz="3000" b="1" dirty="0">
                 <a:solidFill>
-                  <a:srgbClr val="D62828"/>
-                </a:solidFill>
-                <a:latin typeface="Arial" pitchFamily="34" charset="0"/>
-                <a:ea typeface="Arial" pitchFamily="34" charset="-122"/>
-                <a:cs typeface="Arial" pitchFamily="34" charset="-120"/>
+                  <a:srgbClr val="C8161D"/>
+                </a:solidFill>
+                <a:latin typeface="Arial" pitchFamily="34" charset="0"/>
+                <a:ea typeface="BIZ UDPGothic" pitchFamily="34" charset="-122"/>
+                <a:cs typeface="BIZ UDPGothic" pitchFamily="34" charset="-120"/>
               </a:rPr>
               <a:t>61%</a:t>
             </a:r>
@@ -19556,11 +19556,11 @@
             <a:r>
               <a:rPr lang="en-US" sz="1100" dirty="0">
                 <a:solidFill>
-                  <a:srgbClr val="CCCCCC"/>
-                </a:solidFill>
-                <a:latin typeface="Arial" pitchFamily="34" charset="0"/>
-                <a:ea typeface="Arial" pitchFamily="34" charset="-122"/>
-                <a:cs typeface="Arial" pitchFamily="34" charset="-120"/>
+                  <a:srgbClr val="FFFFFF"/>
+                </a:solidFill>
+                <a:latin typeface="Arial" pitchFamily="34" charset="0"/>
+                <a:ea typeface="BIZ UDPGothic" pitchFamily="34" charset="-122"/>
+                <a:cs typeface="BIZ UDPGothic" pitchFamily="34" charset="-120"/>
               </a:rPr>
               <a:t>赤字法人</a:t>
             </a:r>
@@ -19598,11 +19598,11 @@
             <a:r>
               <a:rPr lang="en-US" sz="1450" b="1" dirty="0">
                 <a:solidFill>
-                  <a:srgbClr val="F5F5F0"/>
-                </a:solidFill>
-                <a:latin typeface="Arial" pitchFamily="34" charset="0"/>
-                <a:ea typeface="Arial" pitchFamily="34" charset="-122"/>
-                <a:cs typeface="Arial" pitchFamily="34" charset="-120"/>
+                  <a:srgbClr val="16181D"/>
+                </a:solidFill>
+                <a:latin typeface="Arial" pitchFamily="34" charset="0"/>
+                <a:ea typeface="BIZ UDPGothic" pitchFamily="34" charset="-122"/>
+                <a:cs typeface="BIZ UDPGothic" pitchFamily="34" charset="-120"/>
               </a:rPr>
               <a:t>過去10年間の平均で見ても、63〜64%が赤字。</a:t>
             </a:r>
@@ -19618,11 +19618,11 @@
             <a:r>
               <a:rPr lang="en-US" sz="1450" dirty="0">
                 <a:solidFill>
-                  <a:srgbClr val="CCCCCC"/>
-                </a:solidFill>
-                <a:latin typeface="Arial" pitchFamily="34" charset="0"/>
-                <a:ea typeface="Arial" pitchFamily="34" charset="-122"/>
-                <a:cs typeface="Arial" pitchFamily="34" charset="-120"/>
+                  <a:srgbClr val="2B2F36"/>
+                </a:solidFill>
+                <a:latin typeface="Arial" pitchFamily="34" charset="0"/>
+                <a:ea typeface="BIZ UDPGothic" pitchFamily="34" charset="-122"/>
+                <a:cs typeface="BIZ UDPGothic" pitchFamily="34" charset="-120"/>
               </a:rPr>
               <a:t>コロナ禍（2020〜2021年）は給付金で利益が押し上げられ、一時的に61〜62%まで下がって見えただけです。</a:t>
             </a:r>
@@ -19647,11 +19647,11 @@
             </a:avLst>
           </a:prstGeom>
           <a:solidFill>
-            <a:srgbClr val="1A1A1A"/>
+            <a:srgbClr val="FFFFFF"/>
           </a:solidFill>
           <a:ln w="12700">
             <a:solidFill>
-              <a:srgbClr val="D62828"/>
+              <a:srgbClr val="C8161D"/>
             </a:solidFill>
             <a:prstDash val="solid"/>
           </a:ln>
@@ -19687,11 +19687,11 @@
             <a:r>
               <a:rPr lang="en-US" sz="1250" dirty="0">
                 <a:solidFill>
-                  <a:srgbClr val="F5F5F0"/>
-                </a:solidFill>
-                <a:latin typeface="Arial" pitchFamily="34" charset="0"/>
-                <a:ea typeface="Arial" pitchFamily="34" charset="-122"/>
-                <a:cs typeface="Arial" pitchFamily="34" charset="-120"/>
+                  <a:srgbClr val="16181D"/>
+                </a:solidFill>
+                <a:latin typeface="Arial" pitchFamily="34" charset="0"/>
+                <a:ea typeface="BIZ UDPGothic" pitchFamily="34" charset="-122"/>
+                <a:cs typeface="BIZ UDPGothic" pitchFamily="34" charset="-120"/>
               </a:rPr>
               <a:t>補助金がなければ、63〜64%に戻るのが実態。「作られた赤字」が、当たり前のようになっていると考えるのが自然です。</a:t>
             </a:r>
